--- a/GSD2T_Pitch_Deck.pptx
+++ b/GSD2T_Pitch_Deck.pptx
@@ -5,23 +5,25 @@
     <p:sldMasterId id="2147483648" r:id="rId1"/>
   </p:sldMasterIdLst>
   <p:sldIdLst>
-    <p:sldId id="256" r:id="rId2"/>
-    <p:sldId id="257" r:id="rId3"/>
-    <p:sldId id="258" r:id="rId4"/>
-    <p:sldId id="259" r:id="rId5"/>
-    <p:sldId id="260" r:id="rId6"/>
-    <p:sldId id="261" r:id="rId7"/>
-    <p:sldId id="262" r:id="rId8"/>
-    <p:sldId id="263" r:id="rId9"/>
-    <p:sldId id="264" r:id="rId10"/>
-    <p:sldId id="265" r:id="rId11"/>
-    <p:sldId id="266" r:id="rId12"/>
-    <p:sldId id="267" r:id="rId13"/>
-    <p:sldId id="268" r:id="rId14"/>
-    <p:sldId id="269" r:id="rId15"/>
-    <p:sldId id="270" r:id="rId16"/>
+    <p:sldId id="256" r:id="rId7"/>
+    <p:sldId id="257" r:id="rId8"/>
+    <p:sldId id="258" r:id="rId9"/>
+    <p:sldId id="259" r:id="rId10"/>
+    <p:sldId id="260" r:id="rId11"/>
+    <p:sldId id="261" r:id="rId12"/>
+    <p:sldId id="262" r:id="rId13"/>
+    <p:sldId id="263" r:id="rId14"/>
+    <p:sldId id="264" r:id="rId15"/>
+    <p:sldId id="265" r:id="rId16"/>
+    <p:sldId id="266" r:id="rId17"/>
+    <p:sldId id="267" r:id="rId18"/>
+    <p:sldId id="268" r:id="rId19"/>
+    <p:sldId id="269" r:id="rId20"/>
+    <p:sldId id="270" r:id="rId21"/>
+    <p:sldId id="271" r:id="rId22"/>
+    <p:sldId id="272" r:id="rId23"/>
   </p:sldIdLst>
-  <p:sldSz cx="12192000" cy="6858000"/>
+  <p:sldSz cx="12191695" cy="6858000" type="screen4x3"/>
   <p:notesSz cx="6858000" cy="9144000"/>
   <p:defaultTextStyle>
     <a:defPPr>
@@ -118,22 +120,6 @@
       </a:defRPr>
     </a:lvl9pPr>
   </p:defaultTextStyle>
-  <p:extLst>
-    <p:ext uri="{EFAFB233-063F-42B5-8137-9DF3F51BA10A}">
-      <p15:sldGuideLst xmlns:p15="http://schemas.microsoft.com/office/powerpoint/2012/main">
-        <p15:guide id="1" orient="horz" pos="2160">
-          <p15:clr>
-            <a:srgbClr val="A4A3A4"/>
-          </p15:clr>
-        </p15:guide>
-        <p15:guide id="2" pos="2880">
-          <p15:clr>
-            <a:srgbClr val="A4A3A4"/>
-          </p15:clr>
-        </p15:guide>
-      </p15:sldGuideLst>
-    </p:ext>
-  </p:extLst>
 </p:presentation>
 </file>
 
@@ -175,9 +161,10 @@
           <a:lstStyle/>
           <a:p>
             <a:r>
-              <a:rPr lang="en-US"/>
+              <a:rPr lang="en-US" smtClean="0"/>
               <a:t>Click to edit Master title style</a:t>
             </a:r>
+            <a:endParaRPr lang="en-US"/>
           </a:p>
         </p:txBody>
       </p:sp>
@@ -293,9 +280,10 @@
           </a:lstStyle>
           <a:p>
             <a:r>
-              <a:rPr lang="en-US"/>
+              <a:rPr lang="en-US" smtClean="0"/>
               <a:t>Click to edit Master subtitle style</a:t>
             </a:r>
+            <a:endParaRPr lang="en-US"/>
           </a:p>
         </p:txBody>
       </p:sp>
@@ -316,7 +304,7 @@
           <a:p>
             <a:fld id="{5BCAD085-E8A6-8845-BD4E-CB4CCA059FC4}" type="datetimeFigureOut">
               <a:rPr lang="en-US" smtClean="0"/>
-              <a:t>6/4/26</a:t>
+              <a:t>1/27/13</a:t>
             </a:fld>
             <a:endParaRPr lang="en-US"/>
           </a:p>
@@ -410,9 +398,10 @@
           <a:lstStyle/>
           <a:p>
             <a:r>
-              <a:rPr lang="en-US"/>
+              <a:rPr lang="en-US" smtClean="0"/>
               <a:t>Click to edit Master title style</a:t>
             </a:r>
+            <a:endParaRPr lang="en-US"/>
           </a:p>
         </p:txBody>
       </p:sp>
@@ -433,37 +422,38 @@
           <a:p>
             <a:pPr lvl="0"/>
             <a:r>
-              <a:rPr lang="en-US"/>
+              <a:rPr lang="en-US" smtClean="0"/>
               <a:t>Click to edit Master text styles</a:t>
             </a:r>
           </a:p>
           <a:p>
             <a:pPr lvl="1"/>
             <a:r>
-              <a:rPr lang="en-US"/>
+              <a:rPr lang="en-US" smtClean="0"/>
               <a:t>Second level</a:t>
             </a:r>
           </a:p>
           <a:p>
             <a:pPr lvl="2"/>
             <a:r>
-              <a:rPr lang="en-US"/>
+              <a:rPr lang="en-US" smtClean="0"/>
               <a:t>Third level</a:t>
             </a:r>
           </a:p>
           <a:p>
             <a:pPr lvl="3"/>
             <a:r>
-              <a:rPr lang="en-US"/>
+              <a:rPr lang="en-US" smtClean="0"/>
               <a:t>Fourth level</a:t>
             </a:r>
           </a:p>
           <a:p>
             <a:pPr lvl="4"/>
             <a:r>
-              <a:rPr lang="en-US"/>
+              <a:rPr lang="en-US" smtClean="0"/>
               <a:t>Fifth level</a:t>
             </a:r>
+            <a:endParaRPr lang="en-US"/>
           </a:p>
         </p:txBody>
       </p:sp>
@@ -484,7 +474,7 @@
           <a:p>
             <a:fld id="{5BCAD085-E8A6-8845-BD4E-CB4CCA059FC4}" type="datetimeFigureOut">
               <a:rPr lang="en-US" smtClean="0"/>
-              <a:t>6/4/26</a:t>
+              <a:t>1/27/13</a:t>
             </a:fld>
             <a:endParaRPr lang="en-US"/>
           </a:p>
@@ -583,9 +573,10 @@
           <a:lstStyle/>
           <a:p>
             <a:r>
-              <a:rPr lang="en-US"/>
+              <a:rPr lang="en-US" smtClean="0"/>
               <a:t>Click to edit Master title style</a:t>
             </a:r>
+            <a:endParaRPr lang="en-US"/>
           </a:p>
         </p:txBody>
       </p:sp>
@@ -611,37 +602,38 @@
           <a:p>
             <a:pPr lvl="0"/>
             <a:r>
-              <a:rPr lang="en-US"/>
+              <a:rPr lang="en-US" smtClean="0"/>
               <a:t>Click to edit Master text styles</a:t>
             </a:r>
           </a:p>
           <a:p>
             <a:pPr lvl="1"/>
             <a:r>
-              <a:rPr lang="en-US"/>
+              <a:rPr lang="en-US" smtClean="0"/>
               <a:t>Second level</a:t>
             </a:r>
           </a:p>
           <a:p>
             <a:pPr lvl="2"/>
             <a:r>
-              <a:rPr lang="en-US"/>
+              <a:rPr lang="en-US" smtClean="0"/>
               <a:t>Third level</a:t>
             </a:r>
           </a:p>
           <a:p>
             <a:pPr lvl="3"/>
             <a:r>
-              <a:rPr lang="en-US"/>
+              <a:rPr lang="en-US" smtClean="0"/>
               <a:t>Fourth level</a:t>
             </a:r>
           </a:p>
           <a:p>
             <a:pPr lvl="4"/>
             <a:r>
-              <a:rPr lang="en-US"/>
+              <a:rPr lang="en-US" smtClean="0"/>
               <a:t>Fifth level</a:t>
             </a:r>
+            <a:endParaRPr lang="en-US"/>
           </a:p>
         </p:txBody>
       </p:sp>
@@ -662,7 +654,7 @@
           <a:p>
             <a:fld id="{5BCAD085-E8A6-8845-BD4E-CB4CCA059FC4}" type="datetimeFigureOut">
               <a:rPr lang="en-US" smtClean="0"/>
-              <a:t>6/4/26</a:t>
+              <a:t>1/27/13</a:t>
             </a:fld>
             <a:endParaRPr lang="en-US"/>
           </a:p>
@@ -756,9 +748,10 @@
           <a:lstStyle/>
           <a:p>
             <a:r>
-              <a:rPr lang="en-US"/>
+              <a:rPr lang="en-US" smtClean="0"/>
               <a:t>Click to edit Master title style</a:t>
             </a:r>
+            <a:endParaRPr lang="en-US"/>
           </a:p>
         </p:txBody>
       </p:sp>
@@ -779,37 +772,38 @@
           <a:p>
             <a:pPr lvl="0"/>
             <a:r>
-              <a:rPr lang="en-US"/>
+              <a:rPr lang="en-US" smtClean="0"/>
               <a:t>Click to edit Master text styles</a:t>
             </a:r>
           </a:p>
           <a:p>
             <a:pPr lvl="1"/>
             <a:r>
-              <a:rPr lang="en-US"/>
+              <a:rPr lang="en-US" smtClean="0"/>
               <a:t>Second level</a:t>
             </a:r>
           </a:p>
           <a:p>
             <a:pPr lvl="2"/>
             <a:r>
-              <a:rPr lang="en-US"/>
+              <a:rPr lang="en-US" smtClean="0"/>
               <a:t>Third level</a:t>
             </a:r>
           </a:p>
           <a:p>
             <a:pPr lvl="3"/>
             <a:r>
-              <a:rPr lang="en-US"/>
+              <a:rPr lang="en-US" smtClean="0"/>
               <a:t>Fourth level</a:t>
             </a:r>
           </a:p>
           <a:p>
             <a:pPr lvl="4"/>
             <a:r>
-              <a:rPr lang="en-US"/>
+              <a:rPr lang="en-US" smtClean="0"/>
               <a:t>Fifth level</a:t>
             </a:r>
+            <a:endParaRPr lang="en-US"/>
           </a:p>
         </p:txBody>
       </p:sp>
@@ -830,7 +824,7 @@
           <a:p>
             <a:fld id="{5BCAD085-E8A6-8845-BD4E-CB4CCA059FC4}" type="datetimeFigureOut">
               <a:rPr lang="en-US" smtClean="0"/>
-              <a:t>6/4/26</a:t>
+              <a:t>1/27/13</a:t>
             </a:fld>
             <a:endParaRPr lang="en-US"/>
           </a:p>
@@ -933,9 +927,10 @@
           </a:lstStyle>
           <a:p>
             <a:r>
-              <a:rPr lang="en-US"/>
+              <a:rPr lang="en-US" smtClean="0"/>
               <a:t>Click to edit Master title style</a:t>
             </a:r>
+            <a:endParaRPr lang="en-US"/>
           </a:p>
         </p:txBody>
       </p:sp>
@@ -1052,7 +1047,7 @@
           <a:p>
             <a:pPr lvl="0"/>
             <a:r>
-              <a:rPr lang="en-US"/>
+              <a:rPr lang="en-US" smtClean="0"/>
               <a:t>Click to edit Master text styles</a:t>
             </a:r>
           </a:p>
@@ -1075,7 +1070,7 @@
           <a:p>
             <a:fld id="{5BCAD085-E8A6-8845-BD4E-CB4CCA059FC4}" type="datetimeFigureOut">
               <a:rPr lang="en-US" smtClean="0"/>
-              <a:t>6/4/26</a:t>
+              <a:t>1/27/13</a:t>
             </a:fld>
             <a:endParaRPr lang="en-US"/>
           </a:p>
@@ -1169,9 +1164,10 @@
           <a:lstStyle/>
           <a:p>
             <a:r>
-              <a:rPr lang="en-US"/>
+              <a:rPr lang="en-US" smtClean="0"/>
               <a:t>Click to edit Master title style</a:t>
             </a:r>
+            <a:endParaRPr lang="en-US"/>
           </a:p>
         </p:txBody>
       </p:sp>
@@ -1225,37 +1221,38 @@
           <a:p>
             <a:pPr lvl="0"/>
             <a:r>
-              <a:rPr lang="en-US"/>
+              <a:rPr lang="en-US" smtClean="0"/>
               <a:t>Click to edit Master text styles</a:t>
             </a:r>
           </a:p>
           <a:p>
             <a:pPr lvl="1"/>
             <a:r>
-              <a:rPr lang="en-US"/>
+              <a:rPr lang="en-US" smtClean="0"/>
               <a:t>Second level</a:t>
             </a:r>
           </a:p>
           <a:p>
             <a:pPr lvl="2"/>
             <a:r>
-              <a:rPr lang="en-US"/>
+              <a:rPr lang="en-US" smtClean="0"/>
               <a:t>Third level</a:t>
             </a:r>
           </a:p>
           <a:p>
             <a:pPr lvl="3"/>
             <a:r>
-              <a:rPr lang="en-US"/>
+              <a:rPr lang="en-US" smtClean="0"/>
               <a:t>Fourth level</a:t>
             </a:r>
           </a:p>
           <a:p>
             <a:pPr lvl="4"/>
             <a:r>
-              <a:rPr lang="en-US"/>
+              <a:rPr lang="en-US" smtClean="0"/>
               <a:t>Fifth level</a:t>
             </a:r>
+            <a:endParaRPr lang="en-US"/>
           </a:p>
         </p:txBody>
       </p:sp>
@@ -1309,37 +1306,38 @@
           <a:p>
             <a:pPr lvl="0"/>
             <a:r>
-              <a:rPr lang="en-US"/>
+              <a:rPr lang="en-US" smtClean="0"/>
               <a:t>Click to edit Master text styles</a:t>
             </a:r>
           </a:p>
           <a:p>
             <a:pPr lvl="1"/>
             <a:r>
-              <a:rPr lang="en-US"/>
+              <a:rPr lang="en-US" smtClean="0"/>
               <a:t>Second level</a:t>
             </a:r>
           </a:p>
           <a:p>
             <a:pPr lvl="2"/>
             <a:r>
-              <a:rPr lang="en-US"/>
+              <a:rPr lang="en-US" smtClean="0"/>
               <a:t>Third level</a:t>
             </a:r>
           </a:p>
           <a:p>
             <a:pPr lvl="3"/>
             <a:r>
-              <a:rPr lang="en-US"/>
+              <a:rPr lang="en-US" smtClean="0"/>
               <a:t>Fourth level</a:t>
             </a:r>
           </a:p>
           <a:p>
             <a:pPr lvl="4"/>
             <a:r>
-              <a:rPr lang="en-US"/>
+              <a:rPr lang="en-US" smtClean="0"/>
               <a:t>Fifth level</a:t>
             </a:r>
+            <a:endParaRPr lang="en-US"/>
           </a:p>
         </p:txBody>
       </p:sp>
@@ -1360,7 +1358,7 @@
           <a:p>
             <a:fld id="{5BCAD085-E8A6-8845-BD4E-CB4CCA059FC4}" type="datetimeFigureOut">
               <a:rPr lang="en-US" smtClean="0"/>
-              <a:t>6/4/26</a:t>
+              <a:t>1/27/13</a:t>
             </a:fld>
             <a:endParaRPr lang="en-US"/>
           </a:p>
@@ -1458,9 +1456,10 @@
           </a:lstStyle>
           <a:p>
             <a:r>
-              <a:rPr lang="en-US"/>
+              <a:rPr lang="en-US" smtClean="0"/>
               <a:t>Click to edit Master title style</a:t>
             </a:r>
+            <a:endParaRPr lang="en-US"/>
           </a:p>
         </p:txBody>
       </p:sp>
@@ -1523,7 +1522,7 @@
           <a:p>
             <a:pPr lvl="0"/>
             <a:r>
-              <a:rPr lang="en-US"/>
+              <a:rPr lang="en-US" smtClean="0"/>
               <a:t>Click to edit Master text styles</a:t>
             </a:r>
           </a:p>
@@ -1579,37 +1578,38 @@
           <a:p>
             <a:pPr lvl="0"/>
             <a:r>
-              <a:rPr lang="en-US"/>
+              <a:rPr lang="en-US" smtClean="0"/>
               <a:t>Click to edit Master text styles</a:t>
             </a:r>
           </a:p>
           <a:p>
             <a:pPr lvl="1"/>
             <a:r>
-              <a:rPr lang="en-US"/>
+              <a:rPr lang="en-US" smtClean="0"/>
               <a:t>Second level</a:t>
             </a:r>
           </a:p>
           <a:p>
             <a:pPr lvl="2"/>
             <a:r>
-              <a:rPr lang="en-US"/>
+              <a:rPr lang="en-US" smtClean="0"/>
               <a:t>Third level</a:t>
             </a:r>
           </a:p>
           <a:p>
             <a:pPr lvl="3"/>
             <a:r>
-              <a:rPr lang="en-US"/>
+              <a:rPr lang="en-US" smtClean="0"/>
               <a:t>Fourth level</a:t>
             </a:r>
           </a:p>
           <a:p>
             <a:pPr lvl="4"/>
             <a:r>
-              <a:rPr lang="en-US"/>
+              <a:rPr lang="en-US" smtClean="0"/>
               <a:t>Fifth level</a:t>
             </a:r>
+            <a:endParaRPr lang="en-US"/>
           </a:p>
         </p:txBody>
       </p:sp>
@@ -1672,7 +1672,7 @@
           <a:p>
             <a:pPr lvl="0"/>
             <a:r>
-              <a:rPr lang="en-US"/>
+              <a:rPr lang="en-US" smtClean="0"/>
               <a:t>Click to edit Master text styles</a:t>
             </a:r>
           </a:p>
@@ -1728,37 +1728,38 @@
           <a:p>
             <a:pPr lvl="0"/>
             <a:r>
-              <a:rPr lang="en-US"/>
+              <a:rPr lang="en-US" smtClean="0"/>
               <a:t>Click to edit Master text styles</a:t>
             </a:r>
           </a:p>
           <a:p>
             <a:pPr lvl="1"/>
             <a:r>
-              <a:rPr lang="en-US"/>
+              <a:rPr lang="en-US" smtClean="0"/>
               <a:t>Second level</a:t>
             </a:r>
           </a:p>
           <a:p>
             <a:pPr lvl="2"/>
             <a:r>
-              <a:rPr lang="en-US"/>
+              <a:rPr lang="en-US" smtClean="0"/>
               <a:t>Third level</a:t>
             </a:r>
           </a:p>
           <a:p>
             <a:pPr lvl="3"/>
             <a:r>
-              <a:rPr lang="en-US"/>
+              <a:rPr lang="en-US" smtClean="0"/>
               <a:t>Fourth level</a:t>
             </a:r>
           </a:p>
           <a:p>
             <a:pPr lvl="4"/>
             <a:r>
-              <a:rPr lang="en-US"/>
+              <a:rPr lang="en-US" smtClean="0"/>
               <a:t>Fifth level</a:t>
             </a:r>
+            <a:endParaRPr lang="en-US"/>
           </a:p>
         </p:txBody>
       </p:sp>
@@ -1779,7 +1780,7 @@
           <a:p>
             <a:fld id="{5BCAD085-E8A6-8845-BD4E-CB4CCA059FC4}" type="datetimeFigureOut">
               <a:rPr lang="en-US" smtClean="0"/>
-              <a:t>6/4/26</a:t>
+              <a:t>1/27/13</a:t>
             </a:fld>
             <a:endParaRPr lang="en-US"/>
           </a:p>
@@ -1873,9 +1874,10 @@
           <a:lstStyle/>
           <a:p>
             <a:r>
-              <a:rPr lang="en-US"/>
+              <a:rPr lang="en-US" smtClean="0"/>
               <a:t>Click to edit Master title style</a:t>
             </a:r>
+            <a:endParaRPr lang="en-US"/>
           </a:p>
         </p:txBody>
       </p:sp>
@@ -1896,7 +1898,7 @@
           <a:p>
             <a:fld id="{5BCAD085-E8A6-8845-BD4E-CB4CCA059FC4}" type="datetimeFigureOut">
               <a:rPr lang="en-US" smtClean="0"/>
-              <a:t>6/4/26</a:t>
+              <a:t>1/27/13</a:t>
             </a:fld>
             <a:endParaRPr lang="en-US"/>
           </a:p>
@@ -1991,7 +1993,7 @@
           <a:p>
             <a:fld id="{5BCAD085-E8A6-8845-BD4E-CB4CCA059FC4}" type="datetimeFigureOut">
               <a:rPr lang="en-US" smtClean="0"/>
-              <a:t>6/4/26</a:t>
+              <a:t>1/27/13</a:t>
             </a:fld>
             <a:endParaRPr lang="en-US"/>
           </a:p>
@@ -2094,9 +2096,10 @@
           </a:lstStyle>
           <a:p>
             <a:r>
-              <a:rPr lang="en-US"/>
+              <a:rPr lang="en-US" smtClean="0"/>
               <a:t>Click to edit Master title style</a:t>
             </a:r>
+            <a:endParaRPr lang="en-US"/>
           </a:p>
         </p:txBody>
       </p:sp>
@@ -2150,37 +2153,38 @@
           <a:p>
             <a:pPr lvl="0"/>
             <a:r>
-              <a:rPr lang="en-US"/>
+              <a:rPr lang="en-US" smtClean="0"/>
               <a:t>Click to edit Master text styles</a:t>
             </a:r>
           </a:p>
           <a:p>
             <a:pPr lvl="1"/>
             <a:r>
-              <a:rPr lang="en-US"/>
+              <a:rPr lang="en-US" smtClean="0"/>
               <a:t>Second level</a:t>
             </a:r>
           </a:p>
           <a:p>
             <a:pPr lvl="2"/>
             <a:r>
-              <a:rPr lang="en-US"/>
+              <a:rPr lang="en-US" smtClean="0"/>
               <a:t>Third level</a:t>
             </a:r>
           </a:p>
           <a:p>
             <a:pPr lvl="3"/>
             <a:r>
-              <a:rPr lang="en-US"/>
+              <a:rPr lang="en-US" smtClean="0"/>
               <a:t>Fourth level</a:t>
             </a:r>
           </a:p>
           <a:p>
             <a:pPr lvl="4"/>
             <a:r>
-              <a:rPr lang="en-US"/>
+              <a:rPr lang="en-US" smtClean="0"/>
               <a:t>Fifth level</a:t>
             </a:r>
+            <a:endParaRPr lang="en-US"/>
           </a:p>
         </p:txBody>
       </p:sp>
@@ -2243,7 +2247,7 @@
           <a:p>
             <a:pPr lvl="0"/>
             <a:r>
-              <a:rPr lang="en-US"/>
+              <a:rPr lang="en-US" smtClean="0"/>
               <a:t>Click to edit Master text styles</a:t>
             </a:r>
           </a:p>
@@ -2266,7 +2270,7 @@
           <a:p>
             <a:fld id="{5BCAD085-E8A6-8845-BD4E-CB4CCA059FC4}" type="datetimeFigureOut">
               <a:rPr lang="en-US" smtClean="0"/>
-              <a:t>6/4/26</a:t>
+              <a:t>1/27/13</a:t>
             </a:fld>
             <a:endParaRPr lang="en-US"/>
           </a:p>
@@ -2369,9 +2373,10 @@
           </a:lstStyle>
           <a:p>
             <a:r>
-              <a:rPr lang="en-US"/>
+              <a:rPr lang="en-US" smtClean="0"/>
               <a:t>Click to edit Master title style</a:t>
             </a:r>
+            <a:endParaRPr lang="en-US"/>
           </a:p>
         </p:txBody>
       </p:sp>
@@ -2495,7 +2500,7 @@
           <a:p>
             <a:pPr lvl="0"/>
             <a:r>
-              <a:rPr lang="en-US"/>
+              <a:rPr lang="en-US" smtClean="0"/>
               <a:t>Click to edit Master text styles</a:t>
             </a:r>
           </a:p>
@@ -2518,7 +2523,7 @@
           <a:p>
             <a:fld id="{5BCAD085-E8A6-8845-BD4E-CB4CCA059FC4}" type="datetimeFigureOut">
               <a:rPr lang="en-US" smtClean="0"/>
-              <a:t>6/4/26</a:t>
+              <a:t>1/27/13</a:t>
             </a:fld>
             <a:endParaRPr lang="en-US"/>
           </a:p>
@@ -2627,9 +2632,10 @@
           <a:lstStyle/>
           <a:p>
             <a:r>
-              <a:rPr lang="en-US"/>
+              <a:rPr lang="en-US" smtClean="0"/>
               <a:t>Click to edit Master title style</a:t>
             </a:r>
+            <a:endParaRPr lang="en-US"/>
           </a:p>
         </p:txBody>
       </p:sp>
@@ -2660,37 +2666,38 @@
           <a:p>
             <a:pPr lvl="0"/>
             <a:r>
-              <a:rPr lang="en-US"/>
+              <a:rPr lang="en-US" smtClean="0"/>
               <a:t>Click to edit Master text styles</a:t>
             </a:r>
           </a:p>
           <a:p>
             <a:pPr lvl="1"/>
             <a:r>
-              <a:rPr lang="en-US"/>
+              <a:rPr lang="en-US" smtClean="0"/>
               <a:t>Second level</a:t>
             </a:r>
           </a:p>
           <a:p>
             <a:pPr lvl="2"/>
             <a:r>
-              <a:rPr lang="en-US"/>
+              <a:rPr lang="en-US" smtClean="0"/>
               <a:t>Third level</a:t>
             </a:r>
           </a:p>
           <a:p>
             <a:pPr lvl="3"/>
             <a:r>
-              <a:rPr lang="en-US"/>
+              <a:rPr lang="en-US" smtClean="0"/>
               <a:t>Fourth level</a:t>
             </a:r>
           </a:p>
           <a:p>
             <a:pPr lvl="4"/>
             <a:r>
-              <a:rPr lang="en-US"/>
+              <a:rPr lang="en-US" smtClean="0"/>
               <a:t>Fifth level</a:t>
             </a:r>
+            <a:endParaRPr lang="en-US"/>
           </a:p>
         </p:txBody>
       </p:sp>
@@ -2729,7 +2736,7 @@
           <a:p>
             <a:fld id="{5BCAD085-E8A6-8845-BD4E-CB4CCA059FC4}" type="datetimeFigureOut">
               <a:rPr lang="en-US" smtClean="0"/>
-              <a:t>6/4/26</a:t>
+              <a:t>1/27/13</a:t>
             </a:fld>
             <a:endParaRPr lang="en-US"/>
           </a:p>
@@ -3088,7 +3095,7 @@
 </file>
 
 <file path=ppt/slides/slide1.xml><?xml version="1.0" encoding="utf-8"?>
-<p:sld xmlns:a="http://schemas.openxmlformats.org/drawingml/2006/main" xmlns:r="http://schemas.openxmlformats.org/officeDocument/2006/relationships" xmlns:p="http://schemas.openxmlformats.org/presentationml/2006/main">
+<p:sld xmlns:a="http://schemas.openxmlformats.org/drawingml/2006/main" xmlns:p="http://schemas.openxmlformats.org/presentationml/2006/main" xmlns:r="http://schemas.openxmlformats.org/officeDocument/2006/relationships">
   <p:cSld>
     <p:spTree>
       <p:nvGrpSpPr>
@@ -3096,14 +3103,7 @@
         <p:cNvGrpSpPr/>
         <p:nvPr/>
       </p:nvGrpSpPr>
-      <p:grpSpPr>
-        <a:xfrm>
-          <a:off x="0" y="0"/>
-          <a:ext cx="0" cy="0"/>
-          <a:chOff x="0" y="0"/>
-          <a:chExt cx="0" cy="0"/>
-        </a:xfrm>
-      </p:grpSpPr>
+      <p:grpSpPr/>
       <p:sp>
         <p:nvSpPr>
           <p:cNvPr id="2" name="Rectangle 1"/>
@@ -3145,7 +3145,6 @@
           <a:lstStyle/>
           <a:p>
             <a:pPr algn="ctr"/>
-            <a:endParaRPr/>
           </a:p>
         </p:txBody>
       </p:sp>
@@ -3190,7 +3189,6 @@
           <a:lstStyle/>
           <a:p>
             <a:pPr algn="ctr"/>
-            <a:endParaRPr/>
           </a:p>
         </p:txBody>
       </p:sp>
@@ -3246,7 +3244,16 @@
                 </a:solidFill>
                 <a:latin typeface="Georgia"/>
               </a:rPr>
-              <a:t>T  Asset Management</a:t>
+              <a:t>T  </a:t>
+            </a:r>
+            <a:r>
+              <a:rPr sz="4600" b="1">
+                <a:solidFill>
+                  <a:srgbClr val="FFFFFF"/>
+                </a:solidFill>
+                <a:latin typeface="Georgia"/>
+              </a:rPr>
+              <a:t>Asset Management</a:t>
             </a:r>
           </a:p>
         </p:txBody>
@@ -3377,7 +3384,7 @@
 </file>
 
 <file path=ppt/slides/slide10.xml><?xml version="1.0" encoding="utf-8"?>
-<p:sld xmlns:a="http://schemas.openxmlformats.org/drawingml/2006/main" xmlns:r="http://schemas.openxmlformats.org/officeDocument/2006/relationships" xmlns:p="http://schemas.openxmlformats.org/presentationml/2006/main">
+<p:sld xmlns:a="http://schemas.openxmlformats.org/drawingml/2006/main" xmlns:p="http://schemas.openxmlformats.org/presentationml/2006/main" xmlns:r="http://schemas.openxmlformats.org/officeDocument/2006/relationships">
   <p:cSld>
     <p:spTree>
       <p:nvGrpSpPr>
@@ -3385,14 +3392,7 @@
         <p:cNvGrpSpPr/>
         <p:nvPr/>
       </p:nvGrpSpPr>
-      <p:grpSpPr>
-        <a:xfrm>
-          <a:off x="0" y="0"/>
-          <a:ext cx="0" cy="0"/>
-          <a:chOff x="0" y="0"/>
-          <a:chExt cx="0" cy="0"/>
-        </a:xfrm>
-      </p:grpSpPr>
+      <p:grpSpPr/>
       <p:sp>
         <p:nvSpPr>
           <p:cNvPr id="2" name="Rectangle 1"/>
@@ -3434,7 +3434,6 @@
           <a:lstStyle/>
           <a:p>
             <a:pPr algn="ctr"/>
-            <a:endParaRPr/>
           </a:p>
         </p:txBody>
       </p:sp>
@@ -3479,7 +3478,6 @@
           <a:lstStyle/>
           <a:p>
             <a:pPr algn="ctr"/>
-            <a:endParaRPr/>
           </a:p>
         </p:txBody>
       </p:sp>
@@ -3524,7 +3522,6 @@
           <a:lstStyle/>
           <a:p>
             <a:pPr algn="ctr"/>
-            <a:endParaRPr/>
           </a:p>
         </p:txBody>
       </p:sp>
@@ -3842,7 +3839,7 @@
 </file>
 
 <file path=ppt/slides/slide11.xml><?xml version="1.0" encoding="utf-8"?>
-<p:sld xmlns:a="http://schemas.openxmlformats.org/drawingml/2006/main" xmlns:r="http://schemas.openxmlformats.org/officeDocument/2006/relationships" xmlns:p="http://schemas.openxmlformats.org/presentationml/2006/main">
+<p:sld xmlns:a="http://schemas.openxmlformats.org/drawingml/2006/main" xmlns:p="http://schemas.openxmlformats.org/presentationml/2006/main" xmlns:r="http://schemas.openxmlformats.org/officeDocument/2006/relationships">
   <p:cSld>
     <p:spTree>
       <p:nvGrpSpPr>
@@ -3850,14 +3847,7 @@
         <p:cNvGrpSpPr/>
         <p:nvPr/>
       </p:nvGrpSpPr>
-      <p:grpSpPr>
-        <a:xfrm>
-          <a:off x="0" y="0"/>
-          <a:ext cx="0" cy="0"/>
-          <a:chOff x="0" y="0"/>
-          <a:chExt cx="0" cy="0"/>
-        </a:xfrm>
-      </p:grpSpPr>
+      <p:grpSpPr/>
       <p:sp>
         <p:nvSpPr>
           <p:cNvPr id="2" name="Rectangle 1"/>
@@ -3899,7 +3889,6 @@
           <a:lstStyle/>
           <a:p>
             <a:pPr algn="ctr"/>
-            <a:endParaRPr/>
           </a:p>
         </p:txBody>
       </p:sp>
@@ -3944,7 +3933,6 @@
           <a:lstStyle/>
           <a:p>
             <a:pPr algn="ctr"/>
-            <a:endParaRPr/>
           </a:p>
         </p:txBody>
       </p:sp>
@@ -3989,7 +3977,6 @@
           <a:lstStyle/>
           <a:p>
             <a:pPr algn="ctr"/>
-            <a:endParaRPr/>
           </a:p>
         </p:txBody>
       </p:sp>
@@ -4225,7 +4212,7 @@
                 </a:solidFill>
                 <a:latin typeface="Calibri"/>
               </a:rPr>
-              <a:t>Sharpe 0.97–1.04 across 15 lookback × quantile settings — a plateau, not a spike.</a:t>
+              <a:t>Sharpe 0.93–1.00 across 15 lookback × quantile settings — a plateau, not a spike.</a:t>
             </a:r>
           </a:p>
           <a:p>
@@ -4307,7 +4294,7 @@
 </file>
 
 <file path=ppt/slides/slide12.xml><?xml version="1.0" encoding="utf-8"?>
-<p:sld xmlns:a="http://schemas.openxmlformats.org/drawingml/2006/main" xmlns:r="http://schemas.openxmlformats.org/officeDocument/2006/relationships" xmlns:p="http://schemas.openxmlformats.org/presentationml/2006/main">
+<p:sld xmlns:a="http://schemas.openxmlformats.org/drawingml/2006/main" xmlns:p="http://schemas.openxmlformats.org/presentationml/2006/main" xmlns:r="http://schemas.openxmlformats.org/officeDocument/2006/relationships">
   <p:cSld>
     <p:spTree>
       <p:nvGrpSpPr>
@@ -4315,14 +4302,7 @@
         <p:cNvGrpSpPr/>
         <p:nvPr/>
       </p:nvGrpSpPr>
-      <p:grpSpPr>
-        <a:xfrm>
-          <a:off x="0" y="0"/>
-          <a:ext cx="0" cy="0"/>
-          <a:chOff x="0" y="0"/>
-          <a:chExt cx="0" cy="0"/>
-        </a:xfrm>
-      </p:grpSpPr>
+      <p:grpSpPr/>
       <p:sp>
         <p:nvSpPr>
           <p:cNvPr id="2" name="Rectangle 1"/>
@@ -4364,7 +4344,6 @@
           <a:lstStyle/>
           <a:p>
             <a:pPr algn="ctr"/>
-            <a:endParaRPr/>
           </a:p>
         </p:txBody>
       </p:sp>
@@ -4409,7 +4388,6 @@
           <a:lstStyle/>
           <a:p>
             <a:pPr algn="ctr"/>
-            <a:endParaRPr/>
           </a:p>
         </p:txBody>
       </p:sp>
@@ -4454,7 +4432,6 @@
           <a:lstStyle/>
           <a:p>
             <a:pPr algn="ctr"/>
-            <a:endParaRPr/>
           </a:p>
         </p:txBody>
       </p:sp>
@@ -4655,7 +4632,6 @@
           <a:lstStyle/>
           <a:p>
             <a:pPr algn="ctr"/>
-            <a:endParaRPr/>
           </a:p>
         </p:txBody>
       </p:sp>
@@ -4700,7 +4676,6 @@
           <a:lstStyle/>
           <a:p>
             <a:pPr algn="ctr"/>
-            <a:endParaRPr/>
           </a:p>
         </p:txBody>
       </p:sp>
@@ -4862,7 +4837,6 @@
           <a:lstStyle/>
           <a:p>
             <a:pPr algn="ctr"/>
-            <a:endParaRPr/>
           </a:p>
         </p:txBody>
       </p:sp>
@@ -4907,7 +4881,6 @@
           <a:lstStyle/>
           <a:p>
             <a:pPr algn="ctr"/>
-            <a:endParaRPr/>
           </a:p>
         </p:txBody>
       </p:sp>
@@ -4984,7 +4957,7 @@
                 </a:solidFill>
                 <a:latin typeface="Georgia"/>
               </a:rPr>
-              <a:t>$3.3–5.6B</a:t>
+              <a:t>$1.7–3.3B</a:t>
             </a:r>
           </a:p>
         </p:txBody>
@@ -5069,7 +5042,6 @@
           <a:lstStyle/>
           <a:p>
             <a:pPr algn="ctr"/>
-            <a:endParaRPr/>
           </a:p>
         </p:txBody>
       </p:sp>
@@ -5114,7 +5086,6 @@
           <a:lstStyle/>
           <a:p>
             <a:pPr algn="ctr"/>
-            <a:endParaRPr/>
           </a:p>
         </p:txBody>
       </p:sp>
@@ -5191,7 +5162,7 @@
                 </a:solidFill>
                 <a:latin typeface="Georgia"/>
               </a:rPr>
-              <a:t>33–56×</a:t>
+              <a:t>17–33×</a:t>
             </a:r>
           </a:p>
         </p:txBody>
@@ -5276,7 +5247,6 @@
           <a:lstStyle/>
           <a:p>
             <a:pPr algn="ctr"/>
-            <a:endParaRPr/>
           </a:p>
         </p:txBody>
       </p:sp>
@@ -5321,7 +5291,6 @@
           <a:lstStyle/>
           <a:p>
             <a:pPr algn="ctr"/>
-            <a:endParaRPr/>
           </a:p>
         </p:txBody>
       </p:sp>
@@ -5398,7 +5367,7 @@
                 </a:solidFill>
                 <a:latin typeface="Georgia"/>
               </a:rPr>
-              <a:t>~2%</a:t>
+              <a:t>~3%</a:t>
             </a:r>
           </a:p>
         </p:txBody>
@@ -5494,7 +5463,7 @@
                 </a:solidFill>
                 <a:latin typeface="Calibri"/>
               </a:rPr>
-              <a:t>5% of average daily volume over 2 days per name, across ~125 large-cap holdings; ADV assumed $300M (conservative) to $500M (base) ADV per name.</a:t>
+              <a:t>5% of average daily volume over 2 days per name, across ~111 holdings. ADV $150M (measured median) to $300M ADV per name — cross-checked against actual volume data, not assumed.</a:t>
             </a:r>
           </a:p>
           <a:p>
@@ -5576,7 +5545,7 @@
 </file>
 
 <file path=ppt/slides/slide13.xml><?xml version="1.0" encoding="utf-8"?>
-<p:sld xmlns:a="http://schemas.openxmlformats.org/drawingml/2006/main" xmlns:r="http://schemas.openxmlformats.org/officeDocument/2006/relationships" xmlns:p="http://schemas.openxmlformats.org/presentationml/2006/main">
+<p:sld xmlns:a="http://schemas.openxmlformats.org/drawingml/2006/main" xmlns:p="http://schemas.openxmlformats.org/presentationml/2006/main" xmlns:r="http://schemas.openxmlformats.org/officeDocument/2006/relationships">
   <p:cSld>
     <p:spTree>
       <p:nvGrpSpPr>
@@ -5584,14 +5553,7 @@
         <p:cNvGrpSpPr/>
         <p:nvPr/>
       </p:nvGrpSpPr>
-      <p:grpSpPr>
-        <a:xfrm>
-          <a:off x="0" y="0"/>
-          <a:ext cx="0" cy="0"/>
-          <a:chOff x="0" y="0"/>
-          <a:chExt cx="0" cy="0"/>
-        </a:xfrm>
-      </p:grpSpPr>
+      <p:grpSpPr/>
       <p:sp>
         <p:nvSpPr>
           <p:cNvPr id="2" name="Rectangle 1"/>
@@ -5633,7 +5595,6 @@
           <a:lstStyle/>
           <a:p>
             <a:pPr algn="ctr"/>
-            <a:endParaRPr/>
           </a:p>
         </p:txBody>
       </p:sp>
@@ -5678,7 +5639,6 @@
           <a:lstStyle/>
           <a:p>
             <a:pPr algn="ctr"/>
-            <a:endParaRPr/>
           </a:p>
         </p:txBody>
       </p:sp>
@@ -5723,7 +5683,6 @@
           <a:lstStyle/>
           <a:p>
             <a:pPr algn="ctr"/>
-            <a:endParaRPr/>
           </a:p>
         </p:txBody>
       </p:sp>
@@ -5941,20 +5900,8 @@
                 <a:tableStyleId>{5C22544A-7EE6-4342-B048-85BDC9FD1C3A}</a:tableStyleId>
               </a:tblPr>
               <a:tblGrid>
-                <a:gridCol w="2037805">
-                  <a:extLst>
-                    <a:ext uri="{9D8B030D-6E8A-4147-A177-3AD203B41FA5}">
-                      <a16:colId xmlns:a16="http://schemas.microsoft.com/office/drawing/2014/main" val="20000"/>
-                    </a:ext>
-                  </a:extLst>
-                </a:gridCol>
-                <a:gridCol w="3448594">
-                  <a:extLst>
-                    <a:ext uri="{9D8B030D-6E8A-4147-A177-3AD203B41FA5}">
-                      <a16:colId xmlns:a16="http://schemas.microsoft.com/office/drawing/2014/main" val="20001"/>
-                    </a:ext>
-                  </a:extLst>
-                </a:gridCol>
+                <a:gridCol w="2037805"/>
+                <a:gridCol w="3448594"/>
               </a:tblGrid>
               <a:tr h="502920">
                 <a:tc>
@@ -6003,11 +5950,6 @@
                     </a:solidFill>
                   </a:tcPr>
                 </a:tc>
-                <a:extLst>
-                  <a:ext uri="{0D108BD9-81ED-4DB2-BD59-A6C34878D82A}">
-                    <a16:rowId xmlns:a16="http://schemas.microsoft.com/office/drawing/2014/main" val="10000"/>
-                  </a:ext>
-                </a:extLst>
               </a:tr>
               <a:tr h="502920">
                 <a:tc>
@@ -6056,11 +5998,6 @@
                     </a:solidFill>
                   </a:tcPr>
                 </a:tc>
-                <a:extLst>
-                  <a:ext uri="{0D108BD9-81ED-4DB2-BD59-A6C34878D82A}">
-                    <a16:rowId xmlns:a16="http://schemas.microsoft.com/office/drawing/2014/main" val="10001"/>
-                  </a:ext>
-                </a:extLst>
               </a:tr>
               <a:tr h="502920">
                 <a:tc>
@@ -6109,11 +6046,6 @@
                     </a:solidFill>
                   </a:tcPr>
                 </a:tc>
-                <a:extLst>
-                  <a:ext uri="{0D108BD9-81ED-4DB2-BD59-A6C34878D82A}">
-                    <a16:rowId xmlns:a16="http://schemas.microsoft.com/office/drawing/2014/main" val="10002"/>
-                  </a:ext>
-                </a:extLst>
               </a:tr>
               <a:tr h="502920">
                 <a:tc>
@@ -6162,11 +6094,6 @@
                     </a:solidFill>
                   </a:tcPr>
                 </a:tc>
-                <a:extLst>
-                  <a:ext uri="{0D108BD9-81ED-4DB2-BD59-A6C34878D82A}">
-                    <a16:rowId xmlns:a16="http://schemas.microsoft.com/office/drawing/2014/main" val="10003"/>
-                  </a:ext>
-                </a:extLst>
               </a:tr>
               <a:tr h="502920">
                 <a:tc>
@@ -6215,11 +6142,6 @@
                     </a:solidFill>
                   </a:tcPr>
                 </a:tc>
-                <a:extLst>
-                  <a:ext uri="{0D108BD9-81ED-4DB2-BD59-A6C34878D82A}">
-                    <a16:rowId xmlns:a16="http://schemas.microsoft.com/office/drawing/2014/main" val="10004"/>
-                  </a:ext>
-                </a:extLst>
               </a:tr>
               <a:tr h="502920">
                 <a:tc>
@@ -6268,11 +6190,6 @@
                     </a:solidFill>
                   </a:tcPr>
                 </a:tc>
-                <a:extLst>
-                  <a:ext uri="{0D108BD9-81ED-4DB2-BD59-A6C34878D82A}">
-                    <a16:rowId xmlns:a16="http://schemas.microsoft.com/office/drawing/2014/main" val="10005"/>
-                  </a:ext>
-                </a:extLst>
               </a:tr>
             </a:tbl>
           </a:graphicData>
@@ -6336,34 +6253,10 @@
                 <a:tableStyleId>{5C22544A-7EE6-4342-B048-85BDC9FD1C3A}</a:tableStyleId>
               </a:tblPr>
               <a:tblGrid>
-                <a:gridCol w="1908313">
-                  <a:extLst>
-                    <a:ext uri="{9D8B030D-6E8A-4147-A177-3AD203B41FA5}">
-                      <a16:colId xmlns:a16="http://schemas.microsoft.com/office/drawing/2014/main" val="20000"/>
-                    </a:ext>
-                  </a:extLst>
-                </a:gridCol>
-                <a:gridCol w="1192695">
-                  <a:extLst>
-                    <a:ext uri="{9D8B030D-6E8A-4147-A177-3AD203B41FA5}">
-                      <a16:colId xmlns:a16="http://schemas.microsoft.com/office/drawing/2014/main" val="20001"/>
-                    </a:ext>
-                  </a:extLst>
-                </a:gridCol>
-                <a:gridCol w="1192695">
-                  <a:extLst>
-                    <a:ext uri="{9D8B030D-6E8A-4147-A177-3AD203B41FA5}">
-                      <a16:colId xmlns:a16="http://schemas.microsoft.com/office/drawing/2014/main" val="20002"/>
-                    </a:ext>
-                  </a:extLst>
-                </a:gridCol>
-                <a:gridCol w="1192695">
-                  <a:extLst>
-                    <a:ext uri="{9D8B030D-6E8A-4147-A177-3AD203B41FA5}">
-                      <a16:colId xmlns:a16="http://schemas.microsoft.com/office/drawing/2014/main" val="20003"/>
-                    </a:ext>
-                  </a:extLst>
-                </a:gridCol>
+                <a:gridCol w="1908313"/>
+                <a:gridCol w="1192695"/>
+                <a:gridCol w="1192695"/>
+                <a:gridCol w="1192695"/>
               </a:tblGrid>
               <a:tr h="502920">
                 <a:tc>
@@ -6372,7 +6265,15 @@
                     <a:lstStyle/>
                     <a:p>
                       <a:pPr algn="l"/>
-                      <a:endParaRPr/>
+                      <a:r>
+                        <a:rPr sz="1100" b="1">
+                          <a:solidFill>
+                            <a:srgbClr val="FFFFFF"/>
+                          </a:solidFill>
+                          <a:latin typeface="Calibri"/>
+                        </a:rPr>
+                        <a:t/>
+                      </a:r>
                     </a:p>
                   </a:txBody>
                   <a:tcPr marT="25400" marB="25400">
@@ -6450,11 +6351,6 @@
                     </a:solidFill>
                   </a:tcPr>
                 </a:tc>
-                <a:extLst>
-                  <a:ext uri="{0D108BD9-81ED-4DB2-BD59-A6C34878D82A}">
-                    <a16:rowId xmlns:a16="http://schemas.microsoft.com/office/drawing/2014/main" val="10000"/>
-                  </a:ext>
-                </a:extLst>
               </a:tr>
               <a:tr h="502920">
                 <a:tc>
@@ -6516,7 +6412,7 @@
                           </a:solidFill>
                           <a:latin typeface="Calibri"/>
                         </a:rPr>
-                        <a:t>1.15</a:t>
+                        <a:t>1.09</a:t>
                       </a:r>
                     </a:p>
                   </a:txBody>
@@ -6549,11 +6445,6 @@
                     </a:solidFill>
                   </a:tcPr>
                 </a:tc>
-                <a:extLst>
-                  <a:ext uri="{0D108BD9-81ED-4DB2-BD59-A6C34878D82A}">
-                    <a16:rowId xmlns:a16="http://schemas.microsoft.com/office/drawing/2014/main" val="10001"/>
-                  </a:ext>
-                </a:extLst>
               </a:tr>
               <a:tr h="502920">
                 <a:tc>
@@ -6615,7 +6506,7 @@
                           </a:solidFill>
                           <a:latin typeface="Calibri"/>
                         </a:rPr>
-                        <a:t>1.02</a:t>
+                        <a:t>0.96</a:t>
                       </a:r>
                     </a:p>
                   </a:txBody>
@@ -6648,11 +6539,6 @@
                     </a:solidFill>
                   </a:tcPr>
                 </a:tc>
-                <a:extLst>
-                  <a:ext uri="{0D108BD9-81ED-4DB2-BD59-A6C34878D82A}">
-                    <a16:rowId xmlns:a16="http://schemas.microsoft.com/office/drawing/2014/main" val="10002"/>
-                  </a:ext>
-                </a:extLst>
               </a:tr>
               <a:tr h="502920">
                 <a:tc>
@@ -6714,7 +6600,7 @@
                           </a:solidFill>
                           <a:latin typeface="Calibri"/>
                         </a:rPr>
-                        <a:t>0.65</a:t>
+                        <a:t>0.60</a:t>
                       </a:r>
                     </a:p>
                   </a:txBody>
@@ -6747,11 +6633,6 @@
                     </a:solidFill>
                   </a:tcPr>
                 </a:tc>
-                <a:extLst>
-                  <a:ext uri="{0D108BD9-81ED-4DB2-BD59-A6C34878D82A}">
-                    <a16:rowId xmlns:a16="http://schemas.microsoft.com/office/drawing/2014/main" val="10003"/>
-                  </a:ext>
-                </a:extLst>
               </a:tr>
             </a:tbl>
           </a:graphicData>
@@ -6891,7 +6772,7 @@
 </file>
 
 <file path=ppt/slides/slide14.xml><?xml version="1.0" encoding="utf-8"?>
-<p:sld xmlns:a="http://schemas.openxmlformats.org/drawingml/2006/main" xmlns:r="http://schemas.openxmlformats.org/officeDocument/2006/relationships" xmlns:p="http://schemas.openxmlformats.org/presentationml/2006/main">
+<p:sld xmlns:a="http://schemas.openxmlformats.org/drawingml/2006/main" xmlns:p="http://schemas.openxmlformats.org/presentationml/2006/main" xmlns:r="http://schemas.openxmlformats.org/officeDocument/2006/relationships">
   <p:cSld>
     <p:spTree>
       <p:nvGrpSpPr>
@@ -6899,14 +6780,7 @@
         <p:cNvGrpSpPr/>
         <p:nvPr/>
       </p:nvGrpSpPr>
-      <p:grpSpPr>
-        <a:xfrm>
-          <a:off x="0" y="0"/>
-          <a:ext cx="0" cy="0"/>
-          <a:chOff x="0" y="0"/>
-          <a:chExt cx="0" cy="0"/>
-        </a:xfrm>
-      </p:grpSpPr>
+      <p:grpSpPr/>
       <p:sp>
         <p:nvSpPr>
           <p:cNvPr id="2" name="Rectangle 1"/>
@@ -6948,7 +6822,6 @@
           <a:lstStyle/>
           <a:p>
             <a:pPr algn="ctr"/>
-            <a:endParaRPr/>
           </a:p>
         </p:txBody>
       </p:sp>
@@ -6993,7 +6866,6 @@
           <a:lstStyle/>
           <a:p>
             <a:pPr algn="ctr"/>
-            <a:endParaRPr/>
           </a:p>
         </p:txBody>
       </p:sp>
@@ -7038,7 +6910,6 @@
           <a:lstStyle/>
           <a:p>
             <a:pPr algn="ctr"/>
-            <a:endParaRPr/>
           </a:p>
         </p:txBody>
       </p:sp>
@@ -7366,7 +7237,7 @@
 </file>
 
 <file path=ppt/slides/slide15.xml><?xml version="1.0" encoding="utf-8"?>
-<p:sld xmlns:a="http://schemas.openxmlformats.org/drawingml/2006/main" xmlns:r="http://schemas.openxmlformats.org/officeDocument/2006/relationships" xmlns:p="http://schemas.openxmlformats.org/presentationml/2006/main">
+<p:sld xmlns:a="http://schemas.openxmlformats.org/drawingml/2006/main" xmlns:p="http://schemas.openxmlformats.org/presentationml/2006/main" xmlns:r="http://schemas.openxmlformats.org/officeDocument/2006/relationships">
   <p:cSld>
     <p:spTree>
       <p:nvGrpSpPr>
@@ -7374,14 +7245,7 @@
         <p:cNvGrpSpPr/>
         <p:nvPr/>
       </p:nvGrpSpPr>
-      <p:grpSpPr>
-        <a:xfrm>
-          <a:off x="0" y="0"/>
-          <a:ext cx="0" cy="0"/>
-          <a:chOff x="0" y="0"/>
-          <a:chExt cx="0" cy="0"/>
-        </a:xfrm>
-      </p:grpSpPr>
+      <p:grpSpPr/>
       <p:sp>
         <p:nvSpPr>
           <p:cNvPr id="2" name="Rectangle 1"/>
@@ -7423,7 +7287,6 @@
           <a:lstStyle/>
           <a:p>
             <a:pPr algn="ctr"/>
-            <a:endParaRPr/>
           </a:p>
         </p:txBody>
       </p:sp>
@@ -7468,7 +7331,6 @@
           <a:lstStyle/>
           <a:p>
             <a:pPr algn="ctr"/>
-            <a:endParaRPr/>
           </a:p>
         </p:txBody>
       </p:sp>
@@ -7819,6 +7681,2490 @@
                 <a:latin typeface="Calibri"/>
               </a:rPr>
               <a:t>Disclaimer: Fictional pitch for the ESADE Asset Management course. Not investment advice. All performance is SIMULATED; past performance does not indicate future results. No real fund names or live numbers are used.</a:t>
+            </a:r>
+          </a:p>
+        </p:txBody>
+      </p:sp>
+    </p:spTree>
+  </p:cSld>
+  <p:clrMapOvr>
+    <a:masterClrMapping/>
+  </p:clrMapOvr>
+</p:sld>
+</file>
+
+<file path=ppt/slides/slide16.xml><?xml version="1.0" encoding="utf-8"?>
+<p:sld xmlns:a="http://schemas.openxmlformats.org/drawingml/2006/main" xmlns:p="http://schemas.openxmlformats.org/presentationml/2006/main" xmlns:r="http://schemas.openxmlformats.org/officeDocument/2006/relationships">
+  <p:cSld>
+    <p:spTree>
+      <p:nvGrpSpPr>
+        <p:cNvPr id="1" name=""/>
+        <p:cNvGrpSpPr/>
+        <p:nvPr/>
+      </p:nvGrpSpPr>
+      <p:grpSpPr/>
+      <p:sp>
+        <p:nvSpPr>
+          <p:cNvPr id="2" name="Rectangle 1"/>
+          <p:cNvSpPr/>
+          <p:nvPr/>
+        </p:nvSpPr>
+        <p:spPr>
+          <a:xfrm>
+            <a:off x="0" y="0"/>
+            <a:ext cx="12191695" cy="6858000"/>
+          </a:xfrm>
+          <a:prstGeom prst="rect">
+            <a:avLst/>
+          </a:prstGeom>
+          <a:solidFill>
+            <a:srgbClr val="FFFFFF"/>
+          </a:solidFill>
+          <a:ln>
+            <a:noFill/>
+          </a:ln>
+          <a:effectLst/>
+        </p:spPr>
+        <p:style>
+          <a:lnRef idx="1">
+            <a:schemeClr val="accent1"/>
+          </a:lnRef>
+          <a:fillRef idx="3">
+            <a:schemeClr val="accent1"/>
+          </a:fillRef>
+          <a:effectRef idx="2">
+            <a:schemeClr val="accent1"/>
+          </a:effectRef>
+          <a:fontRef idx="minor">
+            <a:schemeClr val="lt1"/>
+          </a:fontRef>
+        </p:style>
+        <p:txBody>
+          <a:bodyPr rtlCol="0" anchor="ctr"/>
+          <a:lstStyle/>
+          <a:p>
+            <a:pPr algn="ctr"/>
+          </a:p>
+        </p:txBody>
+      </p:sp>
+      <p:sp>
+        <p:nvSpPr>
+          <p:cNvPr id="3" name="Rectangle 2"/>
+          <p:cNvSpPr/>
+          <p:nvPr/>
+        </p:nvSpPr>
+        <p:spPr>
+          <a:xfrm>
+            <a:off x="0" y="0"/>
+            <a:ext cx="12191695" cy="1078992"/>
+          </a:xfrm>
+          <a:prstGeom prst="rect">
+            <a:avLst/>
+          </a:prstGeom>
+          <a:solidFill>
+            <a:srgbClr val="0B1F3A"/>
+          </a:solidFill>
+          <a:ln>
+            <a:noFill/>
+          </a:ln>
+          <a:effectLst/>
+        </p:spPr>
+        <p:style>
+          <a:lnRef idx="1">
+            <a:schemeClr val="accent1"/>
+          </a:lnRef>
+          <a:fillRef idx="3">
+            <a:schemeClr val="accent1"/>
+          </a:fillRef>
+          <a:effectRef idx="2">
+            <a:schemeClr val="accent1"/>
+          </a:effectRef>
+          <a:fontRef idx="minor">
+            <a:schemeClr val="lt1"/>
+          </a:fontRef>
+        </p:style>
+        <p:txBody>
+          <a:bodyPr rtlCol="0" anchor="ctr"/>
+          <a:lstStyle/>
+          <a:p>
+            <a:pPr algn="ctr"/>
+          </a:p>
+        </p:txBody>
+      </p:sp>
+      <p:sp>
+        <p:nvSpPr>
+          <p:cNvPr id="4" name="Rectangle 3"/>
+          <p:cNvSpPr/>
+          <p:nvPr/>
+        </p:nvSpPr>
+        <p:spPr>
+          <a:xfrm>
+            <a:off x="0" y="1078992"/>
+            <a:ext cx="12191695" cy="54864"/>
+          </a:xfrm>
+          <a:prstGeom prst="rect">
+            <a:avLst/>
+          </a:prstGeom>
+          <a:solidFill>
+            <a:srgbClr val="C9A96E"/>
+          </a:solidFill>
+          <a:ln>
+            <a:noFill/>
+          </a:ln>
+          <a:effectLst/>
+        </p:spPr>
+        <p:style>
+          <a:lnRef idx="1">
+            <a:schemeClr val="accent1"/>
+          </a:lnRef>
+          <a:fillRef idx="3">
+            <a:schemeClr val="accent1"/>
+          </a:fillRef>
+          <a:effectRef idx="2">
+            <a:schemeClr val="accent1"/>
+          </a:effectRef>
+          <a:fontRef idx="minor">
+            <a:schemeClr val="lt1"/>
+          </a:fontRef>
+        </p:style>
+        <p:txBody>
+          <a:bodyPr rtlCol="0" anchor="ctr"/>
+          <a:lstStyle/>
+          <a:p>
+            <a:pPr algn="ctr"/>
+          </a:p>
+        </p:txBody>
+      </p:sp>
+      <p:sp>
+        <p:nvSpPr>
+          <p:cNvPr id="5" name="TextBox 4"/>
+          <p:cNvSpPr txBox="1"/>
+          <p:nvPr/>
+        </p:nvSpPr>
+        <p:spPr>
+          <a:xfrm>
+            <a:off x="502920" y="274320"/>
+            <a:ext cx="10515600" cy="640080"/>
+          </a:xfrm>
+          <a:prstGeom prst="rect">
+            <a:avLst/>
+          </a:prstGeom>
+          <a:noFill/>
+        </p:spPr>
+        <p:txBody>
+          <a:bodyPr wrap="square" anchor="t">
+            <a:spAutoFit/>
+          </a:bodyPr>
+          <a:lstStyle/>
+          <a:p>
+            <a:pPr algn="l">
+              <a:spcAft>
+                <a:spcPts val="400"/>
+              </a:spcAft>
+            </a:pPr>
+            <a:r>
+              <a:rPr sz="2600" b="1">
+                <a:solidFill>
+                  <a:srgbClr val="FFFFFF"/>
+                </a:solidFill>
+                <a:latin typeface="Calibri"/>
+              </a:rPr>
+              <a:t>Appendix A — why we hold ~125 names, not 25</a:t>
+            </a:r>
+          </a:p>
+        </p:txBody>
+      </p:sp>
+      <p:sp>
+        <p:nvSpPr>
+          <p:cNvPr id="6" name="TextBox 5"/>
+          <p:cNvSpPr txBox="1"/>
+          <p:nvPr/>
+        </p:nvSpPr>
+        <p:spPr>
+          <a:xfrm>
+            <a:off x="521207" y="786384"/>
+            <a:ext cx="10515600" cy="274320"/>
+          </a:xfrm>
+          <a:prstGeom prst="rect">
+            <a:avLst/>
+          </a:prstGeom>
+          <a:noFill/>
+        </p:spPr>
+        <p:txBody>
+          <a:bodyPr wrap="square" anchor="t">
+            <a:spAutoFit/>
+          </a:bodyPr>
+          <a:lstStyle/>
+          <a:p>
+            <a:pPr algn="l">
+              <a:spcAft>
+                <a:spcPts val="400"/>
+              </a:spcAft>
+            </a:pPr>
+            <a:r>
+              <a:rPr sz="1200" b="1">
+                <a:solidFill>
+                  <a:srgbClr val="C9A96E"/>
+                </a:solidFill>
+                <a:latin typeface="Calibri"/>
+              </a:rPr>
+              <a:t>Q&amp;A BACKUP · BEYOND THE 15-SLIDE PITCH</a:t>
+            </a:r>
+          </a:p>
+        </p:txBody>
+      </p:sp>
+      <p:sp>
+        <p:nvSpPr>
+          <p:cNvPr id="7" name="TextBox 6"/>
+          <p:cNvSpPr txBox="1"/>
+          <p:nvPr/>
+        </p:nvSpPr>
+        <p:spPr>
+          <a:xfrm>
+            <a:off x="11338560" y="411480"/>
+            <a:ext cx="640080" cy="365760"/>
+          </a:xfrm>
+          <a:prstGeom prst="rect">
+            <a:avLst/>
+          </a:prstGeom>
+          <a:noFill/>
+        </p:spPr>
+        <p:txBody>
+          <a:bodyPr wrap="square" anchor="t">
+            <a:spAutoFit/>
+          </a:bodyPr>
+          <a:lstStyle/>
+          <a:p>
+            <a:pPr algn="r">
+              <a:spcAft>
+                <a:spcPts val="400"/>
+              </a:spcAft>
+            </a:pPr>
+            <a:r>
+              <a:rPr sz="1200" b="1">
+                <a:solidFill>
+                  <a:srgbClr val="C9A96E"/>
+                </a:solidFill>
+                <a:latin typeface="Calibri"/>
+              </a:rPr>
+              <a:t>14</a:t>
+            </a:r>
+          </a:p>
+        </p:txBody>
+      </p:sp>
+      <p:sp>
+        <p:nvSpPr>
+          <p:cNvPr id="8" name="TextBox 7"/>
+          <p:cNvSpPr txBox="1"/>
+          <p:nvPr/>
+        </p:nvSpPr>
+        <p:spPr>
+          <a:xfrm>
+            <a:off x="502920" y="6473952"/>
+            <a:ext cx="8229600" cy="274320"/>
+          </a:xfrm>
+          <a:prstGeom prst="rect">
+            <a:avLst/>
+          </a:prstGeom>
+          <a:noFill/>
+        </p:spPr>
+        <p:txBody>
+          <a:bodyPr wrap="square" anchor="t">
+            <a:spAutoFit/>
+          </a:bodyPr>
+          <a:lstStyle/>
+          <a:p>
+            <a:pPr algn="l">
+              <a:spcAft>
+                <a:spcPts val="400"/>
+              </a:spcAft>
+            </a:pPr>
+            <a:r>
+              <a:rPr sz="800" b="0">
+                <a:solidFill>
+                  <a:srgbClr val="5A6F8C"/>
+                </a:solidFill>
+                <a:latin typeface="Calibri"/>
+              </a:rPr>
+              <a:t>GSD2T ASSET MANAGEMENT · SIMULATED / FICTIONAL PITCH</a:t>
+            </a:r>
+          </a:p>
+        </p:txBody>
+      </p:sp>
+      <p:sp>
+        <p:nvSpPr>
+          <p:cNvPr id="9" name="TextBox 8"/>
+          <p:cNvSpPr txBox="1"/>
+          <p:nvPr/>
+        </p:nvSpPr>
+        <p:spPr>
+          <a:xfrm>
+            <a:off x="502920" y="1280160"/>
+            <a:ext cx="11155680" cy="457200"/>
+          </a:xfrm>
+          <a:prstGeom prst="rect">
+            <a:avLst/>
+          </a:prstGeom>
+          <a:noFill/>
+        </p:spPr>
+        <p:txBody>
+          <a:bodyPr wrap="square" anchor="t">
+            <a:spAutoFit/>
+          </a:bodyPr>
+          <a:lstStyle/>
+          <a:p>
+            <a:pPr algn="l">
+              <a:spcAft>
+                <a:spcPts val="400"/>
+              </a:spcAft>
+            </a:pPr>
+            <a:r>
+              <a:rPr sz="1300" b="1">
+                <a:solidFill>
+                  <a:srgbClr val="0B1F3A"/>
+                </a:solidFill>
+                <a:latin typeface="Calibri"/>
+              </a:rPr>
+              <a:t>"Why not just hold 20–30 high-conviction names?" — Because the concentrated book only wins in our single most-optimistic backtest, and reverses on the honest data.</a:t>
+            </a:r>
+          </a:p>
+        </p:txBody>
+      </p:sp>
+      <p:graphicFrame>
+        <p:nvGraphicFramePr>
+          <p:cNvPr id="10" name="Table 9"/>
+          <p:cNvGraphicFramePr>
+            <a:graphicFrameLocks noGrp="1"/>
+          </p:cNvGraphicFramePr>
+          <p:nvPr/>
+        </p:nvGraphicFramePr>
+        <p:xfrm>
+          <a:off x="502920" y="1920240"/>
+          <a:ext cx="7772398" cy="2743200"/>
+        </p:xfrm>
+        <a:graphic>
+          <a:graphicData uri="http://schemas.openxmlformats.org/drawingml/2006/table">
+            <a:tbl>
+              <a:tblPr firstRow="1" bandRow="1">
+                <a:tableStyleId>{5C22544A-7EE6-4342-B048-85BDC9FD1C3A}</a:tableStyleId>
+              </a:tblPr>
+              <a:tblGrid>
+                <a:gridCol w="3057993"/>
+                <a:gridCol w="1656413"/>
+                <a:gridCol w="1783829"/>
+                <a:gridCol w="1274163"/>
+              </a:tblGrid>
+              <a:tr h="548640">
+                <a:tc>
+                  <a:txBody>
+                    <a:bodyPr/>
+                    <a:lstStyle/>
+                    <a:p>
+                      <a:pPr algn="l"/>
+                      <a:r>
+                        <a:rPr sz="1100" b="1">
+                          <a:solidFill>
+                            <a:srgbClr val="FFFFFF"/>
+                          </a:solidFill>
+                          <a:latin typeface="Calibri"/>
+                        </a:rPr>
+                        <a:t>Concentration</a:t>
+                      </a:r>
+                    </a:p>
+                  </a:txBody>
+                  <a:tcPr marT="25400" marB="25400">
+                    <a:solidFill>
+                      <a:srgbClr val="0B1F3A"/>
+                    </a:solidFill>
+                  </a:tcPr>
+                </a:tc>
+                <a:tc>
+                  <a:txBody>
+                    <a:bodyPr/>
+                    <a:lstStyle/>
+                    <a:p>
+                      <a:pPr algn="ctr"/>
+                      <a:r>
+                        <a:rPr sz="1100" b="1">
+                          <a:solidFill>
+                            <a:srgbClr val="FFFFFF"/>
+                          </a:solidFill>
+                          <a:latin typeface="Calibri"/>
+                        </a:rPr>
+                        <a:t>Monthly Sharpe
+(optimistic)</a:t>
+                      </a:r>
+                    </a:p>
+                  </a:txBody>
+                  <a:tcPr marT="25400" marB="25400">
+                    <a:solidFill>
+                      <a:srgbClr val="0B1F3A"/>
+                    </a:solidFill>
+                  </a:tcPr>
+                </a:tc>
+                <a:tc>
+                  <a:txBody>
+                    <a:bodyPr/>
+                    <a:lstStyle/>
+                    <a:p>
+                      <a:pPr algn="ctr"/>
+                      <a:r>
+                        <a:rPr sz="1100" b="1">
+                          <a:solidFill>
+                            <a:srgbClr val="FFFFFF"/>
+                          </a:solidFill>
+                          <a:latin typeface="Calibri"/>
+                        </a:rPr>
+                        <a:t>Survivorship-free
+Sharpe (honest)</a:t>
+                      </a:r>
+                    </a:p>
+                  </a:txBody>
+                  <a:tcPr marT="25400" marB="25400">
+                    <a:solidFill>
+                      <a:srgbClr val="0B1F3A"/>
+                    </a:solidFill>
+                  </a:tcPr>
+                </a:tc>
+                <a:tc>
+                  <a:txBody>
+                    <a:bodyPr/>
+                    <a:lstStyle/>
+                    <a:p>
+                      <a:pPr algn="ctr"/>
+                      <a:r>
+                        <a:rPr sz="1100" b="1">
+                          <a:solidFill>
+                            <a:srgbClr val="FFFFFF"/>
+                          </a:solidFill>
+                          <a:latin typeface="Calibri"/>
+                        </a:rPr>
+                        <a:t>Surv-free
+MaxDD</a:t>
+                      </a:r>
+                    </a:p>
+                  </a:txBody>
+                  <a:tcPr marT="25400" marB="25400">
+                    <a:solidFill>
+                      <a:srgbClr val="0B1F3A"/>
+                    </a:solidFill>
+                  </a:tcPr>
+                </a:tc>
+              </a:tr>
+              <a:tr h="548640">
+                <a:tc>
+                  <a:txBody>
+                    <a:bodyPr/>
+                    <a:lstStyle/>
+                    <a:p>
+                      <a:pPr algn="l"/>
+                      <a:r>
+                        <a:rPr sz="1100" b="1">
+                          <a:solidFill>
+                            <a:srgbClr val="0B1F3A"/>
+                          </a:solidFill>
+                          <a:latin typeface="Calibri"/>
+                        </a:rPr>
+                        <a:t>Top 25 names</a:t>
+                      </a:r>
+                    </a:p>
+                  </a:txBody>
+                  <a:tcPr marT="12700" marB="12700">
+                    <a:solidFill>
+                      <a:srgbClr val="FFFFFF"/>
+                    </a:solidFill>
+                  </a:tcPr>
+                </a:tc>
+                <a:tc>
+                  <a:txBody>
+                    <a:bodyPr/>
+                    <a:lstStyle/>
+                    <a:p>
+                      <a:pPr algn="ctr"/>
+                      <a:r>
+                        <a:rPr sz="1100" b="0">
+                          <a:solidFill>
+                            <a:srgbClr val="0B1F3A"/>
+                          </a:solidFill>
+                          <a:latin typeface="Calibri"/>
+                        </a:rPr>
+                        <a:t>1.20</a:t>
+                      </a:r>
+                    </a:p>
+                  </a:txBody>
+                  <a:tcPr marT="12700" marB="12700">
+                    <a:solidFill>
+                      <a:srgbClr val="FFFFFF"/>
+                    </a:solidFill>
+                  </a:tcPr>
+                </a:tc>
+                <a:tc>
+                  <a:txBody>
+                    <a:bodyPr/>
+                    <a:lstStyle/>
+                    <a:p>
+                      <a:pPr algn="ctr"/>
+                      <a:r>
+                        <a:rPr sz="1100" b="0">
+                          <a:solidFill>
+                            <a:srgbClr val="0B1F3A"/>
+                          </a:solidFill>
+                          <a:latin typeface="Calibri"/>
+                        </a:rPr>
+                        <a:t>0.48</a:t>
+                      </a:r>
+                    </a:p>
+                  </a:txBody>
+                  <a:tcPr marT="12700" marB="12700">
+                    <a:solidFill>
+                      <a:srgbClr val="FFFFFF"/>
+                    </a:solidFill>
+                  </a:tcPr>
+                </a:tc>
+                <a:tc>
+                  <a:txBody>
+                    <a:bodyPr/>
+                    <a:lstStyle/>
+                    <a:p>
+                      <a:pPr algn="ctr"/>
+                      <a:r>
+                        <a:rPr sz="1100" b="0">
+                          <a:solidFill>
+                            <a:srgbClr val="0B1F3A"/>
+                          </a:solidFill>
+                          <a:latin typeface="Calibri"/>
+                        </a:rPr>
+                        <a:t>-31%</a:t>
+                      </a:r>
+                    </a:p>
+                  </a:txBody>
+                  <a:tcPr marT="12700" marB="12700">
+                    <a:solidFill>
+                      <a:srgbClr val="FFFFFF"/>
+                    </a:solidFill>
+                  </a:tcPr>
+                </a:tc>
+              </a:tr>
+              <a:tr h="548640">
+                <a:tc>
+                  <a:txBody>
+                    <a:bodyPr/>
+                    <a:lstStyle/>
+                    <a:p>
+                      <a:pPr algn="l"/>
+                      <a:r>
+                        <a:rPr sz="1100" b="1">
+                          <a:solidFill>
+                            <a:srgbClr val="0B1F3A"/>
+                          </a:solidFill>
+                          <a:latin typeface="Calibri"/>
+                        </a:rPr>
+                        <a:t>Top decile (~50)</a:t>
+                      </a:r>
+                    </a:p>
+                  </a:txBody>
+                  <a:tcPr marT="12700" marB="12700">
+                    <a:solidFill>
+                      <a:srgbClr val="F5F2EA"/>
+                    </a:solidFill>
+                  </a:tcPr>
+                </a:tc>
+                <a:tc>
+                  <a:txBody>
+                    <a:bodyPr/>
+                    <a:lstStyle/>
+                    <a:p>
+                      <a:pPr algn="ctr"/>
+                      <a:r>
+                        <a:rPr sz="1100" b="0">
+                          <a:solidFill>
+                            <a:srgbClr val="0B1F3A"/>
+                          </a:solidFill>
+                          <a:latin typeface="Calibri"/>
+                        </a:rPr>
+                        <a:t>1.11</a:t>
+                      </a:r>
+                    </a:p>
+                  </a:txBody>
+                  <a:tcPr marT="12700" marB="12700">
+                    <a:solidFill>
+                      <a:srgbClr val="F5F2EA"/>
+                    </a:solidFill>
+                  </a:tcPr>
+                </a:tc>
+                <a:tc>
+                  <a:txBody>
+                    <a:bodyPr/>
+                    <a:lstStyle/>
+                    <a:p>
+                      <a:pPr algn="ctr"/>
+                      <a:r>
+                        <a:rPr sz="1100" b="0">
+                          <a:solidFill>
+                            <a:srgbClr val="0B1F3A"/>
+                          </a:solidFill>
+                          <a:latin typeface="Calibri"/>
+                        </a:rPr>
+                        <a:t>0.50</a:t>
+                      </a:r>
+                    </a:p>
+                  </a:txBody>
+                  <a:tcPr marT="12700" marB="12700">
+                    <a:solidFill>
+                      <a:srgbClr val="F5F2EA"/>
+                    </a:solidFill>
+                  </a:tcPr>
+                </a:tc>
+                <a:tc>
+                  <a:txBody>
+                    <a:bodyPr/>
+                    <a:lstStyle/>
+                    <a:p>
+                      <a:pPr algn="ctr"/>
+                      <a:r>
+                        <a:rPr sz="1100" b="0">
+                          <a:solidFill>
+                            <a:srgbClr val="0B1F3A"/>
+                          </a:solidFill>
+                          <a:latin typeface="Calibri"/>
+                        </a:rPr>
+                        <a:t>-28%</a:t>
+                      </a:r>
+                    </a:p>
+                  </a:txBody>
+                  <a:tcPr marT="12700" marB="12700">
+                    <a:solidFill>
+                      <a:srgbClr val="F5F2EA"/>
+                    </a:solidFill>
+                  </a:tcPr>
+                </a:tc>
+              </a:tr>
+              <a:tr h="548640">
+                <a:tc>
+                  <a:txBody>
+                    <a:bodyPr/>
+                    <a:lstStyle/>
+                    <a:p>
+                      <a:pPr algn="l"/>
+                      <a:r>
+                        <a:rPr sz="1100" b="1">
+                          <a:solidFill>
+                            <a:srgbClr val="0B1F3A"/>
+                          </a:solidFill>
+                          <a:latin typeface="Calibri"/>
+                        </a:rPr>
+                        <a:t>Quartile (~125) — FLAGSHIP</a:t>
+                      </a:r>
+                    </a:p>
+                  </a:txBody>
+                  <a:tcPr marT="12700" marB="12700">
+                    <a:solidFill>
+                      <a:srgbClr val="FFFFFF"/>
+                    </a:solidFill>
+                  </a:tcPr>
+                </a:tc>
+                <a:tc>
+                  <a:txBody>
+                    <a:bodyPr/>
+                    <a:lstStyle/>
+                    <a:p>
+                      <a:pPr algn="ctr"/>
+                      <a:r>
+                        <a:rPr sz="1100" b="0">
+                          <a:solidFill>
+                            <a:srgbClr val="0B1F3A"/>
+                          </a:solidFill>
+                          <a:latin typeface="Calibri"/>
+                        </a:rPr>
+                        <a:t>1.09</a:t>
+                      </a:r>
+                    </a:p>
+                  </a:txBody>
+                  <a:tcPr marT="12700" marB="12700">
+                    <a:solidFill>
+                      <a:srgbClr val="FFFFFF"/>
+                    </a:solidFill>
+                  </a:tcPr>
+                </a:tc>
+                <a:tc>
+                  <a:txBody>
+                    <a:bodyPr/>
+                    <a:lstStyle/>
+                    <a:p>
+                      <a:pPr algn="ctr"/>
+                      <a:r>
+                        <a:rPr sz="1100" b="0">
+                          <a:solidFill>
+                            <a:srgbClr val="0B1F3A"/>
+                          </a:solidFill>
+                          <a:latin typeface="Calibri"/>
+                        </a:rPr>
+                        <a:t>0.54</a:t>
+                      </a:r>
+                    </a:p>
+                  </a:txBody>
+                  <a:tcPr marT="12700" marB="12700">
+                    <a:solidFill>
+                      <a:srgbClr val="FFFFFF"/>
+                    </a:solidFill>
+                  </a:tcPr>
+                </a:tc>
+                <a:tc>
+                  <a:txBody>
+                    <a:bodyPr/>
+                    <a:lstStyle/>
+                    <a:p>
+                      <a:pPr algn="ctr"/>
+                      <a:r>
+                        <a:rPr sz="1100" b="0">
+                          <a:solidFill>
+                            <a:srgbClr val="0B1F3A"/>
+                          </a:solidFill>
+                          <a:latin typeface="Calibri"/>
+                        </a:rPr>
+                        <a:t>-21%</a:t>
+                      </a:r>
+                    </a:p>
+                  </a:txBody>
+                  <a:tcPr marT="12700" marB="12700">
+                    <a:solidFill>
+                      <a:srgbClr val="FFFFFF"/>
+                    </a:solidFill>
+                  </a:tcPr>
+                </a:tc>
+              </a:tr>
+              <a:tr h="548640">
+                <a:tc>
+                  <a:txBody>
+                    <a:bodyPr/>
+                    <a:lstStyle/>
+                    <a:p>
+                      <a:pPr algn="l"/>
+                      <a:r>
+                        <a:rPr sz="1100" b="1">
+                          <a:solidFill>
+                            <a:srgbClr val="0B1F3A"/>
+                          </a:solidFill>
+                          <a:latin typeface="Calibri"/>
+                        </a:rPr>
+                        <a:t>Tercile (~165)</a:t>
+                      </a:r>
+                    </a:p>
+                  </a:txBody>
+                  <a:tcPr marT="12700" marB="12700">
+                    <a:solidFill>
+                      <a:srgbClr val="F5F2EA"/>
+                    </a:solidFill>
+                  </a:tcPr>
+                </a:tc>
+                <a:tc>
+                  <a:txBody>
+                    <a:bodyPr/>
+                    <a:lstStyle/>
+                    <a:p>
+                      <a:pPr algn="ctr"/>
+                      <a:r>
+                        <a:rPr sz="1100" b="0">
+                          <a:solidFill>
+                            <a:srgbClr val="0B1F3A"/>
+                          </a:solidFill>
+                          <a:latin typeface="Calibri"/>
+                        </a:rPr>
+                        <a:t>1.09</a:t>
+                      </a:r>
+                    </a:p>
+                  </a:txBody>
+                  <a:tcPr marT="12700" marB="12700">
+                    <a:solidFill>
+                      <a:srgbClr val="F5F2EA"/>
+                    </a:solidFill>
+                  </a:tcPr>
+                </a:tc>
+                <a:tc>
+                  <a:txBody>
+                    <a:bodyPr/>
+                    <a:lstStyle/>
+                    <a:p>
+                      <a:pPr algn="ctr"/>
+                      <a:r>
+                        <a:rPr sz="1100" b="0">
+                          <a:solidFill>
+                            <a:srgbClr val="0B1F3A"/>
+                          </a:solidFill>
+                          <a:latin typeface="Calibri"/>
+                        </a:rPr>
+                        <a:t>0.57</a:t>
+                      </a:r>
+                    </a:p>
+                  </a:txBody>
+                  <a:tcPr marT="12700" marB="12700">
+                    <a:solidFill>
+                      <a:srgbClr val="F5F2EA"/>
+                    </a:solidFill>
+                  </a:tcPr>
+                </a:tc>
+                <a:tc>
+                  <a:txBody>
+                    <a:bodyPr/>
+                    <a:lstStyle/>
+                    <a:p>
+                      <a:pPr algn="ctr"/>
+                      <a:r>
+                        <a:rPr sz="1100" b="0">
+                          <a:solidFill>
+                            <a:srgbClr val="0B1F3A"/>
+                          </a:solidFill>
+                          <a:latin typeface="Calibri"/>
+                        </a:rPr>
+                        <a:t>-21%</a:t>
+                      </a:r>
+                    </a:p>
+                  </a:txBody>
+                  <a:tcPr marT="12700" marB="12700">
+                    <a:solidFill>
+                      <a:srgbClr val="F5F2EA"/>
+                    </a:solidFill>
+                  </a:tcPr>
+                </a:tc>
+              </a:tr>
+            </a:tbl>
+          </a:graphicData>
+        </a:graphic>
+      </p:graphicFrame>
+      <p:sp>
+        <p:nvSpPr>
+          <p:cNvPr id="11" name="TextBox 10"/>
+          <p:cNvSpPr txBox="1"/>
+          <p:nvPr/>
+        </p:nvSpPr>
+        <p:spPr>
+          <a:xfrm>
+            <a:off x="8503920" y="1920240"/>
+            <a:ext cx="3200400" cy="2926080"/>
+          </a:xfrm>
+          <a:prstGeom prst="rect">
+            <a:avLst/>
+          </a:prstGeom>
+          <a:noFill/>
+        </p:spPr>
+        <p:txBody>
+          <a:bodyPr wrap="square" anchor="t">
+            <a:spAutoFit/>
+          </a:bodyPr>
+          <a:lstStyle/>
+          <a:p>
+            <a:pPr algn="l">
+              <a:spcAft>
+                <a:spcPts val="400"/>
+              </a:spcAft>
+            </a:pPr>
+            <a:r>
+              <a:rPr sz="1200" b="1">
+                <a:solidFill>
+                  <a:srgbClr val="0B1F3A"/>
+                </a:solidFill>
+                <a:latin typeface="Calibri"/>
+              </a:rPr>
+              <a:t>THE PATTERN</a:t>
+            </a:r>
+          </a:p>
+          <a:p>
+            <a:pPr algn="l">
+              <a:spcAft>
+                <a:spcPts val="400"/>
+              </a:spcAft>
+            </a:pPr>
+            <a:r>
+              <a:rPr sz="1200" b="0">
+                <a:solidFill>
+                  <a:srgbClr val="222A38"/>
+                </a:solidFill>
+                <a:latin typeface="Calibri"/>
+              </a:rPr>
+              <a:t>Concentrated (25) wins only at monthly frequency on current constituents (Sharpe 1.20).</a:t>
+            </a:r>
+          </a:p>
+          <a:p>
+            <a:pPr algn="l">
+              <a:spcAft>
+                <a:spcPts val="400"/>
+              </a:spcAft>
+            </a:pPr>
+            <a:r>
+              <a:rPr sz="1200" b="0">
+                <a:solidFill>
+                  <a:srgbClr val="222A38"/>
+                </a:solidFill>
+                <a:latin typeface="Calibri"/>
+              </a:rPr>
+              <a:t> </a:t>
+            </a:r>
+          </a:p>
+          <a:p>
+            <a:pPr algn="l">
+              <a:spcAft>
+                <a:spcPts val="400"/>
+              </a:spcAft>
+            </a:pPr>
+            <a:r>
+              <a:rPr sz="1200" b="0">
+                <a:solidFill>
+                  <a:srgbClr val="222A38"/>
+                </a:solidFill>
+                <a:latin typeface="Calibri"/>
+              </a:rPr>
+              <a:t>On survivorship-free, point-in-time data it LOSES — quartile 0.54 vs 0.48, and −21% vs −31% drawdown.</a:t>
+            </a:r>
+          </a:p>
+        </p:txBody>
+      </p:sp>
+      <p:sp>
+        <p:nvSpPr>
+          <p:cNvPr id="12" name="TextBox 11"/>
+          <p:cNvSpPr txBox="1"/>
+          <p:nvPr/>
+        </p:nvSpPr>
+        <p:spPr>
+          <a:xfrm>
+            <a:off x="502920" y="4572000"/>
+            <a:ext cx="11155680" cy="1463040"/>
+          </a:xfrm>
+          <a:prstGeom prst="rect">
+            <a:avLst/>
+          </a:prstGeom>
+          <a:noFill/>
+        </p:spPr>
+        <p:txBody>
+          <a:bodyPr wrap="square">
+            <a:spAutoFit/>
+          </a:bodyPr>
+          <a:lstStyle/>
+          <a:p>
+            <a:pPr>
+              <a:spcAft>
+                <a:spcPts val="800"/>
+              </a:spcAft>
+            </a:pPr>
+            <a:r>
+              <a:rPr sz="1250" b="1">
+                <a:solidFill>
+                  <a:srgbClr val="C9A96E"/>
+                </a:solidFill>
+                <a:latin typeface="Calibri"/>
+              </a:rPr>
+              <a:t>▪  </a:t>
+            </a:r>
+            <a:r>
+              <a:rPr sz="1250" b="1">
+                <a:solidFill>
+                  <a:srgbClr val="0B1F3A"/>
+                </a:solidFill>
+                <a:latin typeface="Calibri"/>
+              </a:rPr>
+              <a:t>Verdict: </a:t>
+            </a:r>
+            <a:r>
+              <a:rPr sz="1250">
+                <a:solidFill>
+                  <a:srgbClr val="222A38"/>
+                </a:solidFill>
+                <a:latin typeface="Calibri"/>
+              </a:rPr>
+              <a:t>an edge that appears only in our most flattering configuration — and reverses on survivorship-free data and at quarterly frequency — is an artifact, not an edge. We pitch the diversified book: the number we can trust.</a:t>
+            </a:r>
+          </a:p>
+          <a:p>
+            <a:pPr>
+              <a:spcAft>
+                <a:spcPts val="800"/>
+              </a:spcAft>
+            </a:pPr>
+            <a:r>
+              <a:rPr sz="1250" b="1">
+                <a:solidFill>
+                  <a:srgbClr val="C9A96E"/>
+                </a:solidFill>
+                <a:latin typeface="Calibri"/>
+              </a:rPr>
+              <a:t>▪  </a:t>
+            </a:r>
+            <a:r>
+              <a:rPr sz="1250" b="1">
+                <a:solidFill>
+                  <a:srgbClr val="0B1F3A"/>
+                </a:solidFill>
+                <a:latin typeface="Calibri"/>
+              </a:rPr>
+              <a:t>Also tested: </a:t>
+            </a:r>
+            <a:r>
+              <a:rPr sz="1250">
+                <a:solidFill>
+                  <a:srgbClr val="222A38"/>
+                </a:solidFill>
+                <a:latin typeface="Calibri"/>
+              </a:rPr>
+              <a:t>inverse-volatility weighting lowered the Sharpe (0.99 vs 1.09); equal weight won on evidence.</a:t>
+            </a:r>
+          </a:p>
+        </p:txBody>
+      </p:sp>
+    </p:spTree>
+  </p:cSld>
+  <p:clrMapOvr>
+    <a:masterClrMapping/>
+  </p:clrMapOvr>
+</p:sld>
+</file>
+
+<file path=ppt/slides/slide17.xml><?xml version="1.0" encoding="utf-8"?>
+<p:sld xmlns:a="http://schemas.openxmlformats.org/drawingml/2006/main" xmlns:p="http://schemas.openxmlformats.org/presentationml/2006/main" xmlns:r="http://schemas.openxmlformats.org/officeDocument/2006/relationships">
+  <p:cSld>
+    <p:spTree>
+      <p:nvGrpSpPr>
+        <p:cNvPr id="1" name=""/>
+        <p:cNvGrpSpPr/>
+        <p:nvPr/>
+      </p:nvGrpSpPr>
+      <p:grpSpPr/>
+      <p:sp>
+        <p:nvSpPr>
+          <p:cNvPr id="2" name="Rectangle 1"/>
+          <p:cNvSpPr/>
+          <p:nvPr/>
+        </p:nvSpPr>
+        <p:spPr>
+          <a:xfrm>
+            <a:off x="0" y="0"/>
+            <a:ext cx="12191695" cy="6858000"/>
+          </a:xfrm>
+          <a:prstGeom prst="rect">
+            <a:avLst/>
+          </a:prstGeom>
+          <a:solidFill>
+            <a:srgbClr val="FFFFFF"/>
+          </a:solidFill>
+          <a:ln>
+            <a:noFill/>
+          </a:ln>
+          <a:effectLst/>
+        </p:spPr>
+        <p:style>
+          <a:lnRef idx="1">
+            <a:schemeClr val="accent1"/>
+          </a:lnRef>
+          <a:fillRef idx="3">
+            <a:schemeClr val="accent1"/>
+          </a:fillRef>
+          <a:effectRef idx="2">
+            <a:schemeClr val="accent1"/>
+          </a:effectRef>
+          <a:fontRef idx="minor">
+            <a:schemeClr val="lt1"/>
+          </a:fontRef>
+        </p:style>
+        <p:txBody>
+          <a:bodyPr rtlCol="0" anchor="ctr"/>
+          <a:lstStyle/>
+          <a:p>
+            <a:pPr algn="ctr"/>
+          </a:p>
+        </p:txBody>
+      </p:sp>
+      <p:sp>
+        <p:nvSpPr>
+          <p:cNvPr id="3" name="Rectangle 2"/>
+          <p:cNvSpPr/>
+          <p:nvPr/>
+        </p:nvSpPr>
+        <p:spPr>
+          <a:xfrm>
+            <a:off x="0" y="0"/>
+            <a:ext cx="12191695" cy="1078992"/>
+          </a:xfrm>
+          <a:prstGeom prst="rect">
+            <a:avLst/>
+          </a:prstGeom>
+          <a:solidFill>
+            <a:srgbClr val="0B1F3A"/>
+          </a:solidFill>
+          <a:ln>
+            <a:noFill/>
+          </a:ln>
+          <a:effectLst/>
+        </p:spPr>
+        <p:style>
+          <a:lnRef idx="1">
+            <a:schemeClr val="accent1"/>
+          </a:lnRef>
+          <a:fillRef idx="3">
+            <a:schemeClr val="accent1"/>
+          </a:fillRef>
+          <a:effectRef idx="2">
+            <a:schemeClr val="accent1"/>
+          </a:effectRef>
+          <a:fontRef idx="minor">
+            <a:schemeClr val="lt1"/>
+          </a:fontRef>
+        </p:style>
+        <p:txBody>
+          <a:bodyPr rtlCol="0" anchor="ctr"/>
+          <a:lstStyle/>
+          <a:p>
+            <a:pPr algn="ctr"/>
+          </a:p>
+        </p:txBody>
+      </p:sp>
+      <p:sp>
+        <p:nvSpPr>
+          <p:cNvPr id="4" name="Rectangle 3"/>
+          <p:cNvSpPr/>
+          <p:nvPr/>
+        </p:nvSpPr>
+        <p:spPr>
+          <a:xfrm>
+            <a:off x="0" y="1078992"/>
+            <a:ext cx="12191695" cy="54864"/>
+          </a:xfrm>
+          <a:prstGeom prst="rect">
+            <a:avLst/>
+          </a:prstGeom>
+          <a:solidFill>
+            <a:srgbClr val="C9A96E"/>
+          </a:solidFill>
+          <a:ln>
+            <a:noFill/>
+          </a:ln>
+          <a:effectLst/>
+        </p:spPr>
+        <p:style>
+          <a:lnRef idx="1">
+            <a:schemeClr val="accent1"/>
+          </a:lnRef>
+          <a:fillRef idx="3">
+            <a:schemeClr val="accent1"/>
+          </a:fillRef>
+          <a:effectRef idx="2">
+            <a:schemeClr val="accent1"/>
+          </a:effectRef>
+          <a:fontRef idx="minor">
+            <a:schemeClr val="lt1"/>
+          </a:fontRef>
+        </p:style>
+        <p:txBody>
+          <a:bodyPr rtlCol="0" anchor="ctr"/>
+          <a:lstStyle/>
+          <a:p>
+            <a:pPr algn="ctr"/>
+          </a:p>
+        </p:txBody>
+      </p:sp>
+      <p:sp>
+        <p:nvSpPr>
+          <p:cNvPr id="5" name="TextBox 4"/>
+          <p:cNvSpPr txBox="1"/>
+          <p:nvPr/>
+        </p:nvSpPr>
+        <p:spPr>
+          <a:xfrm>
+            <a:off x="502920" y="274320"/>
+            <a:ext cx="10515600" cy="640080"/>
+          </a:xfrm>
+          <a:prstGeom prst="rect">
+            <a:avLst/>
+          </a:prstGeom>
+          <a:noFill/>
+        </p:spPr>
+        <p:txBody>
+          <a:bodyPr wrap="square" anchor="t">
+            <a:spAutoFit/>
+          </a:bodyPr>
+          <a:lstStyle/>
+          <a:p>
+            <a:pPr algn="l">
+              <a:spcAft>
+                <a:spcPts val="400"/>
+              </a:spcAft>
+            </a:pPr>
+            <a:r>
+              <a:rPr sz="2600" b="1">
+                <a:solidFill>
+                  <a:srgbClr val="FFFFFF"/>
+                </a:solidFill>
+                <a:latin typeface="Calibri"/>
+              </a:rPr>
+              <a:t>Appendix B — every assumption stress-tested</a:t>
+            </a:r>
+          </a:p>
+        </p:txBody>
+      </p:sp>
+      <p:sp>
+        <p:nvSpPr>
+          <p:cNvPr id="6" name="TextBox 5"/>
+          <p:cNvSpPr txBox="1"/>
+          <p:nvPr/>
+        </p:nvSpPr>
+        <p:spPr>
+          <a:xfrm>
+            <a:off x="521207" y="786384"/>
+            <a:ext cx="10515600" cy="274320"/>
+          </a:xfrm>
+          <a:prstGeom prst="rect">
+            <a:avLst/>
+          </a:prstGeom>
+          <a:noFill/>
+        </p:spPr>
+        <p:txBody>
+          <a:bodyPr wrap="square" anchor="t">
+            <a:spAutoFit/>
+          </a:bodyPr>
+          <a:lstStyle/>
+          <a:p>
+            <a:pPr algn="l">
+              <a:spcAft>
+                <a:spcPts val="400"/>
+              </a:spcAft>
+            </a:pPr>
+            <a:r>
+              <a:rPr sz="1200" b="1">
+                <a:solidFill>
+                  <a:srgbClr val="C9A96E"/>
+                </a:solidFill>
+                <a:latin typeface="Calibri"/>
+              </a:rPr>
+              <a:t>Q&amp;A BACKUP · BEYOND THE 15-SLIDE PITCH</a:t>
+            </a:r>
+          </a:p>
+        </p:txBody>
+      </p:sp>
+      <p:sp>
+        <p:nvSpPr>
+          <p:cNvPr id="7" name="TextBox 6"/>
+          <p:cNvSpPr txBox="1"/>
+          <p:nvPr/>
+        </p:nvSpPr>
+        <p:spPr>
+          <a:xfrm>
+            <a:off x="11338560" y="411480"/>
+            <a:ext cx="640080" cy="365760"/>
+          </a:xfrm>
+          <a:prstGeom prst="rect">
+            <a:avLst/>
+          </a:prstGeom>
+          <a:noFill/>
+        </p:spPr>
+        <p:txBody>
+          <a:bodyPr wrap="square" anchor="t">
+            <a:spAutoFit/>
+          </a:bodyPr>
+          <a:lstStyle/>
+          <a:p>
+            <a:pPr algn="r">
+              <a:spcAft>
+                <a:spcPts val="400"/>
+              </a:spcAft>
+            </a:pPr>
+            <a:r>
+              <a:rPr sz="1200" b="1">
+                <a:solidFill>
+                  <a:srgbClr val="C9A96E"/>
+                </a:solidFill>
+                <a:latin typeface="Calibri"/>
+              </a:rPr>
+              <a:t>15</a:t>
+            </a:r>
+          </a:p>
+        </p:txBody>
+      </p:sp>
+      <p:sp>
+        <p:nvSpPr>
+          <p:cNvPr id="8" name="TextBox 7"/>
+          <p:cNvSpPr txBox="1"/>
+          <p:nvPr/>
+        </p:nvSpPr>
+        <p:spPr>
+          <a:xfrm>
+            <a:off x="502920" y="6473952"/>
+            <a:ext cx="8229600" cy="274320"/>
+          </a:xfrm>
+          <a:prstGeom prst="rect">
+            <a:avLst/>
+          </a:prstGeom>
+          <a:noFill/>
+        </p:spPr>
+        <p:txBody>
+          <a:bodyPr wrap="square" anchor="t">
+            <a:spAutoFit/>
+          </a:bodyPr>
+          <a:lstStyle/>
+          <a:p>
+            <a:pPr algn="l">
+              <a:spcAft>
+                <a:spcPts val="400"/>
+              </a:spcAft>
+            </a:pPr>
+            <a:r>
+              <a:rPr sz="800" b="0">
+                <a:solidFill>
+                  <a:srgbClr val="5A6F8C"/>
+                </a:solidFill>
+                <a:latin typeface="Calibri"/>
+              </a:rPr>
+              <a:t>GSD2T ASSET MANAGEMENT · SIMULATED / FICTIONAL PITCH</a:t>
+            </a:r>
+          </a:p>
+        </p:txBody>
+      </p:sp>
+      <p:sp>
+        <p:nvSpPr>
+          <p:cNvPr id="9" name="TextBox 8"/>
+          <p:cNvSpPr txBox="1"/>
+          <p:nvPr/>
+        </p:nvSpPr>
+        <p:spPr>
+          <a:xfrm>
+            <a:off x="502920" y="1280160"/>
+            <a:ext cx="11155680" cy="457200"/>
+          </a:xfrm>
+          <a:prstGeom prst="rect">
+            <a:avLst/>
+          </a:prstGeom>
+          <a:noFill/>
+        </p:spPr>
+        <p:txBody>
+          <a:bodyPr wrap="square" anchor="t">
+            <a:spAutoFit/>
+          </a:bodyPr>
+          <a:lstStyle/>
+          <a:p>
+            <a:pPr algn="l">
+              <a:spcAft>
+                <a:spcPts val="400"/>
+              </a:spcAft>
+            </a:pPr>
+            <a:r>
+              <a:rPr sz="1300" b="1">
+                <a:solidFill>
+                  <a:srgbClr val="0B1F3A"/>
+                </a:solidFill>
+                <a:latin typeface="Calibri"/>
+              </a:rPr>
+              <a:t>We measured or stress-tested every input. The two judgement calls — trading costs and the overlay calibration — both hold.</a:t>
+            </a:r>
+          </a:p>
+        </p:txBody>
+      </p:sp>
+      <p:sp>
+        <p:nvSpPr>
+          <p:cNvPr id="10" name="TextBox 9"/>
+          <p:cNvSpPr txBox="1"/>
+          <p:nvPr/>
+        </p:nvSpPr>
+        <p:spPr>
+          <a:xfrm>
+            <a:off x="502920" y="1874519"/>
+            <a:ext cx="5212080" cy="320040"/>
+          </a:xfrm>
+          <a:prstGeom prst="rect">
+            <a:avLst/>
+          </a:prstGeom>
+          <a:noFill/>
+        </p:spPr>
+        <p:txBody>
+          <a:bodyPr wrap="square" anchor="t">
+            <a:spAutoFit/>
+          </a:bodyPr>
+          <a:lstStyle/>
+          <a:p>
+            <a:pPr algn="l">
+              <a:spcAft>
+                <a:spcPts val="400"/>
+              </a:spcAft>
+            </a:pPr>
+            <a:r>
+              <a:rPr sz="1100" b="1">
+                <a:solidFill>
+                  <a:srgbClr val="0B1F3A"/>
+                </a:solidFill>
+                <a:latin typeface="Calibri"/>
+              </a:rPr>
+              <a:t>TRANSACTION COST — edge survives even at 6× the assumption</a:t>
+            </a:r>
+          </a:p>
+        </p:txBody>
+      </p:sp>
+      <p:graphicFrame>
+        <p:nvGraphicFramePr>
+          <p:cNvPr id="11" name="Table 10"/>
+          <p:cNvGraphicFramePr>
+            <a:graphicFrameLocks noGrp="1"/>
+          </p:cNvGraphicFramePr>
+          <p:nvPr/>
+        </p:nvGraphicFramePr>
+        <p:xfrm>
+          <a:off x="502920" y="2286000"/>
+          <a:ext cx="5212079" cy="2514600"/>
+        </p:xfrm>
+        <a:graphic>
+          <a:graphicData uri="http://schemas.openxmlformats.org/drawingml/2006/table">
+            <a:tbl>
+              <a:tblPr firstRow="1" bandRow="1">
+                <a:tableStyleId>{5C22544A-7EE6-4342-B048-85BDC9FD1C3A}</a:tableStyleId>
+              </a:tblPr>
+              <a:tblGrid>
+                <a:gridCol w="1885220"/>
+                <a:gridCol w="1108953"/>
+                <a:gridCol w="1108953"/>
+                <a:gridCol w="1108953"/>
+              </a:tblGrid>
+              <a:tr h="502920">
+                <a:tc>
+                  <a:txBody>
+                    <a:bodyPr/>
+                    <a:lstStyle/>
+                    <a:p>
+                      <a:pPr algn="l"/>
+                      <a:r>
+                        <a:rPr sz="1050" b="1">
+                          <a:solidFill>
+                            <a:srgbClr val="FFFFFF"/>
+                          </a:solidFill>
+                          <a:latin typeface="Calibri"/>
+                        </a:rPr>
+                        <a:t>Round-trip cost</a:t>
+                      </a:r>
+                    </a:p>
+                  </a:txBody>
+                  <a:tcPr marT="25400" marB="25400">
+                    <a:solidFill>
+                      <a:srgbClr val="0B1F3A"/>
+                    </a:solidFill>
+                  </a:tcPr>
+                </a:tc>
+                <a:tc>
+                  <a:txBody>
+                    <a:bodyPr/>
+                    <a:lstStyle/>
+                    <a:p>
+                      <a:pPr algn="ctr"/>
+                      <a:r>
+                        <a:rPr sz="1050" b="1">
+                          <a:solidFill>
+                            <a:srgbClr val="FFFFFF"/>
+                          </a:solidFill>
+                          <a:latin typeface="Calibri"/>
+                        </a:rPr>
+                        <a:t>CAGR</a:t>
+                      </a:r>
+                    </a:p>
+                  </a:txBody>
+                  <a:tcPr marT="25400" marB="25400">
+                    <a:solidFill>
+                      <a:srgbClr val="0B1F3A"/>
+                    </a:solidFill>
+                  </a:tcPr>
+                </a:tc>
+                <a:tc>
+                  <a:txBody>
+                    <a:bodyPr/>
+                    <a:lstStyle/>
+                    <a:p>
+                      <a:pPr algn="ctr"/>
+                      <a:r>
+                        <a:rPr sz="1050" b="1">
+                          <a:solidFill>
+                            <a:srgbClr val="FFFFFF"/>
+                          </a:solidFill>
+                          <a:latin typeface="Calibri"/>
+                        </a:rPr>
+                        <a:t>Sharpe</a:t>
+                      </a:r>
+                    </a:p>
+                  </a:txBody>
+                  <a:tcPr marT="25400" marB="25400">
+                    <a:solidFill>
+                      <a:srgbClr val="0B1F3A"/>
+                    </a:solidFill>
+                  </a:tcPr>
+                </a:tc>
+                <a:tc>
+                  <a:txBody>
+                    <a:bodyPr/>
+                    <a:lstStyle/>
+                    <a:p>
+                      <a:pPr algn="ctr"/>
+                      <a:r>
+                        <a:rPr sz="1050" b="1">
+                          <a:solidFill>
+                            <a:srgbClr val="FFFFFF"/>
+                          </a:solidFill>
+                          <a:latin typeface="Calibri"/>
+                        </a:rPr>
+                        <a:t>MaxDD</a:t>
+                      </a:r>
+                    </a:p>
+                  </a:txBody>
+                  <a:tcPr marT="25400" marB="25400">
+                    <a:solidFill>
+                      <a:srgbClr val="0B1F3A"/>
+                    </a:solidFill>
+                  </a:tcPr>
+                </a:tc>
+              </a:tr>
+              <a:tr h="502920">
+                <a:tc>
+                  <a:txBody>
+                    <a:bodyPr/>
+                    <a:lstStyle/>
+                    <a:p>
+                      <a:pPr algn="l"/>
+                      <a:r>
+                        <a:rPr sz="1050" b="1">
+                          <a:solidFill>
+                            <a:srgbClr val="0B1F3A"/>
+                          </a:solidFill>
+                          <a:latin typeface="Calibri"/>
+                        </a:rPr>
+                        <a:t>15 bps (current)</a:t>
+                      </a:r>
+                    </a:p>
+                  </a:txBody>
+                  <a:tcPr marT="12700" marB="12700">
+                    <a:solidFill>
+                      <a:srgbClr val="FFFFFF"/>
+                    </a:solidFill>
+                  </a:tcPr>
+                </a:tc>
+                <a:tc>
+                  <a:txBody>
+                    <a:bodyPr/>
+                    <a:lstStyle/>
+                    <a:p>
+                      <a:pPr algn="ctr"/>
+                      <a:r>
+                        <a:rPr sz="1050" b="0">
+                          <a:solidFill>
+                            <a:srgbClr val="0B1F3A"/>
+                          </a:solidFill>
+                          <a:latin typeface="Calibri"/>
+                        </a:rPr>
+                        <a:t>14.9%</a:t>
+                      </a:r>
+                    </a:p>
+                  </a:txBody>
+                  <a:tcPr marT="12700" marB="12700">
+                    <a:solidFill>
+                      <a:srgbClr val="FFFFFF"/>
+                    </a:solidFill>
+                  </a:tcPr>
+                </a:tc>
+                <a:tc>
+                  <a:txBody>
+                    <a:bodyPr/>
+                    <a:lstStyle/>
+                    <a:p>
+                      <a:pPr algn="ctr"/>
+                      <a:r>
+                        <a:rPr sz="1050" b="0">
+                          <a:solidFill>
+                            <a:srgbClr val="0B1F3A"/>
+                          </a:solidFill>
+                          <a:latin typeface="Calibri"/>
+                        </a:rPr>
+                        <a:t>1.09</a:t>
+                      </a:r>
+                    </a:p>
+                  </a:txBody>
+                  <a:tcPr marT="12700" marB="12700">
+                    <a:solidFill>
+                      <a:srgbClr val="FFFFFF"/>
+                    </a:solidFill>
+                  </a:tcPr>
+                </a:tc>
+                <a:tc>
+                  <a:txBody>
+                    <a:bodyPr/>
+                    <a:lstStyle/>
+                    <a:p>
+                      <a:pPr algn="ctr"/>
+                      <a:r>
+                        <a:rPr sz="1050" b="0">
+                          <a:solidFill>
+                            <a:srgbClr val="0B1F3A"/>
+                          </a:solidFill>
+                          <a:latin typeface="Calibri"/>
+                        </a:rPr>
+                        <a:t>-21.2%</a:t>
+                      </a:r>
+                    </a:p>
+                  </a:txBody>
+                  <a:tcPr marT="12700" marB="12700">
+                    <a:solidFill>
+                      <a:srgbClr val="FFFFFF"/>
+                    </a:solidFill>
+                  </a:tcPr>
+                </a:tc>
+              </a:tr>
+              <a:tr h="502920">
+                <a:tc>
+                  <a:txBody>
+                    <a:bodyPr/>
+                    <a:lstStyle/>
+                    <a:p>
+                      <a:pPr algn="l"/>
+                      <a:r>
+                        <a:rPr sz="1050" b="1">
+                          <a:solidFill>
+                            <a:srgbClr val="0B1F3A"/>
+                          </a:solidFill>
+                          <a:latin typeface="Calibri"/>
+                        </a:rPr>
+                        <a:t>30 bps (2×)</a:t>
+                      </a:r>
+                    </a:p>
+                  </a:txBody>
+                  <a:tcPr marT="12700" marB="12700">
+                    <a:solidFill>
+                      <a:srgbClr val="F5F2EA"/>
+                    </a:solidFill>
+                  </a:tcPr>
+                </a:tc>
+                <a:tc>
+                  <a:txBody>
+                    <a:bodyPr/>
+                    <a:lstStyle/>
+                    <a:p>
+                      <a:pPr algn="ctr"/>
+                      <a:r>
+                        <a:rPr sz="1050" b="0">
+                          <a:solidFill>
+                            <a:srgbClr val="0B1F3A"/>
+                          </a:solidFill>
+                          <a:latin typeface="Calibri"/>
+                        </a:rPr>
+                        <a:t>14.3%</a:t>
+                      </a:r>
+                    </a:p>
+                  </a:txBody>
+                  <a:tcPr marT="12700" marB="12700">
+                    <a:solidFill>
+                      <a:srgbClr val="F5F2EA"/>
+                    </a:solidFill>
+                  </a:tcPr>
+                </a:tc>
+                <a:tc>
+                  <a:txBody>
+                    <a:bodyPr/>
+                    <a:lstStyle/>
+                    <a:p>
+                      <a:pPr algn="ctr"/>
+                      <a:r>
+                        <a:rPr sz="1050" b="0">
+                          <a:solidFill>
+                            <a:srgbClr val="0B1F3A"/>
+                          </a:solidFill>
+                          <a:latin typeface="Calibri"/>
+                        </a:rPr>
+                        <a:t>1.04</a:t>
+                      </a:r>
+                    </a:p>
+                  </a:txBody>
+                  <a:tcPr marT="12700" marB="12700">
+                    <a:solidFill>
+                      <a:srgbClr val="F5F2EA"/>
+                    </a:solidFill>
+                  </a:tcPr>
+                </a:tc>
+                <a:tc>
+                  <a:txBody>
+                    <a:bodyPr/>
+                    <a:lstStyle/>
+                    <a:p>
+                      <a:pPr algn="ctr"/>
+                      <a:r>
+                        <a:rPr sz="1050" b="0">
+                          <a:solidFill>
+                            <a:srgbClr val="0B1F3A"/>
+                          </a:solidFill>
+                          <a:latin typeface="Calibri"/>
+                        </a:rPr>
+                        <a:t>-21.6%</a:t>
+                      </a:r>
+                    </a:p>
+                  </a:txBody>
+                  <a:tcPr marT="12700" marB="12700">
+                    <a:solidFill>
+                      <a:srgbClr val="F5F2EA"/>
+                    </a:solidFill>
+                  </a:tcPr>
+                </a:tc>
+              </a:tr>
+              <a:tr h="502920">
+                <a:tc>
+                  <a:txBody>
+                    <a:bodyPr/>
+                    <a:lstStyle/>
+                    <a:p>
+                      <a:pPr algn="l"/>
+                      <a:r>
+                        <a:rPr sz="1050" b="1">
+                          <a:solidFill>
+                            <a:srgbClr val="0B1F3A"/>
+                          </a:solidFill>
+                          <a:latin typeface="Calibri"/>
+                        </a:rPr>
+                        <a:t>50 bps</a:t>
+                      </a:r>
+                    </a:p>
+                  </a:txBody>
+                  <a:tcPr marT="12700" marB="12700">
+                    <a:solidFill>
+                      <a:srgbClr val="FFFFFF"/>
+                    </a:solidFill>
+                  </a:tcPr>
+                </a:tc>
+                <a:tc>
+                  <a:txBody>
+                    <a:bodyPr/>
+                    <a:lstStyle/>
+                    <a:p>
+                      <a:pPr algn="ctr"/>
+                      <a:r>
+                        <a:rPr sz="1050" b="0">
+                          <a:solidFill>
+                            <a:srgbClr val="0B1F3A"/>
+                          </a:solidFill>
+                          <a:latin typeface="Calibri"/>
+                        </a:rPr>
+                        <a:t>13.4%</a:t>
+                      </a:r>
+                    </a:p>
+                  </a:txBody>
+                  <a:tcPr marT="12700" marB="12700">
+                    <a:solidFill>
+                      <a:srgbClr val="FFFFFF"/>
+                    </a:solidFill>
+                  </a:tcPr>
+                </a:tc>
+                <a:tc>
+                  <a:txBody>
+                    <a:bodyPr/>
+                    <a:lstStyle/>
+                    <a:p>
+                      <a:pPr algn="ctr"/>
+                      <a:r>
+                        <a:rPr sz="1050" b="0">
+                          <a:solidFill>
+                            <a:srgbClr val="0B1F3A"/>
+                          </a:solidFill>
+                          <a:latin typeface="Calibri"/>
+                        </a:rPr>
+                        <a:t>0.98</a:t>
+                      </a:r>
+                    </a:p>
+                  </a:txBody>
+                  <a:tcPr marT="12700" marB="12700">
+                    <a:solidFill>
+                      <a:srgbClr val="FFFFFF"/>
+                    </a:solidFill>
+                  </a:tcPr>
+                </a:tc>
+                <a:tc>
+                  <a:txBody>
+                    <a:bodyPr/>
+                    <a:lstStyle/>
+                    <a:p>
+                      <a:pPr algn="ctr"/>
+                      <a:r>
+                        <a:rPr sz="1050" b="0">
+                          <a:solidFill>
+                            <a:srgbClr val="0B1F3A"/>
+                          </a:solidFill>
+                          <a:latin typeface="Calibri"/>
+                        </a:rPr>
+                        <a:t>-22.1%</a:t>
+                      </a:r>
+                    </a:p>
+                  </a:txBody>
+                  <a:tcPr marT="12700" marB="12700">
+                    <a:solidFill>
+                      <a:srgbClr val="FFFFFF"/>
+                    </a:solidFill>
+                  </a:tcPr>
+                </a:tc>
+              </a:tr>
+              <a:tr h="502920">
+                <a:tc>
+                  <a:txBody>
+                    <a:bodyPr/>
+                    <a:lstStyle/>
+                    <a:p>
+                      <a:pPr algn="l"/>
+                      <a:r>
+                        <a:rPr sz="1050" b="1">
+                          <a:solidFill>
+                            <a:srgbClr val="0B1F3A"/>
+                          </a:solidFill>
+                          <a:latin typeface="Calibri"/>
+                        </a:rPr>
+                        <a:t>100 bps</a:t>
+                      </a:r>
+                    </a:p>
+                  </a:txBody>
+                  <a:tcPr marT="12700" marB="12700">
+                    <a:solidFill>
+                      <a:srgbClr val="F5F2EA"/>
+                    </a:solidFill>
+                  </a:tcPr>
+                </a:tc>
+                <a:tc>
+                  <a:txBody>
+                    <a:bodyPr/>
+                    <a:lstStyle/>
+                    <a:p>
+                      <a:pPr algn="ctr"/>
+                      <a:r>
+                        <a:rPr sz="1050" b="0">
+                          <a:solidFill>
+                            <a:srgbClr val="0B1F3A"/>
+                          </a:solidFill>
+                          <a:latin typeface="Calibri"/>
+                        </a:rPr>
+                        <a:t>11.3%</a:t>
+                      </a:r>
+                    </a:p>
+                  </a:txBody>
+                  <a:tcPr marT="12700" marB="12700">
+                    <a:solidFill>
+                      <a:srgbClr val="F5F2EA"/>
+                    </a:solidFill>
+                  </a:tcPr>
+                </a:tc>
+                <a:tc>
+                  <a:txBody>
+                    <a:bodyPr/>
+                    <a:lstStyle/>
+                    <a:p>
+                      <a:pPr algn="ctr"/>
+                      <a:r>
+                        <a:rPr sz="1050" b="0">
+                          <a:solidFill>
+                            <a:srgbClr val="0B1F3A"/>
+                          </a:solidFill>
+                          <a:latin typeface="Calibri"/>
+                        </a:rPr>
+                        <a:t>0.82</a:t>
+                      </a:r>
+                    </a:p>
+                  </a:txBody>
+                  <a:tcPr marT="12700" marB="12700">
+                    <a:solidFill>
+                      <a:srgbClr val="F5F2EA"/>
+                    </a:solidFill>
+                  </a:tcPr>
+                </a:tc>
+                <a:tc>
+                  <a:txBody>
+                    <a:bodyPr/>
+                    <a:lstStyle/>
+                    <a:p>
+                      <a:pPr algn="ctr"/>
+                      <a:r>
+                        <a:rPr sz="1050" b="0">
+                          <a:solidFill>
+                            <a:srgbClr val="0B1F3A"/>
+                          </a:solidFill>
+                          <a:latin typeface="Calibri"/>
+                        </a:rPr>
+                        <a:t>-23.3%</a:t>
+                      </a:r>
+                    </a:p>
+                  </a:txBody>
+                  <a:tcPr marT="12700" marB="12700">
+                    <a:solidFill>
+                      <a:srgbClr val="F5F2EA"/>
+                    </a:solidFill>
+                  </a:tcPr>
+                </a:tc>
+              </a:tr>
+            </a:tbl>
+          </a:graphicData>
+        </a:graphic>
+      </p:graphicFrame>
+      <p:sp>
+        <p:nvSpPr>
+          <p:cNvPr id="12" name="TextBox 11"/>
+          <p:cNvSpPr txBox="1"/>
+          <p:nvPr/>
+        </p:nvSpPr>
+        <p:spPr>
+          <a:xfrm>
+            <a:off x="502920" y="4754880"/>
+            <a:ext cx="5212080" cy="822960"/>
+          </a:xfrm>
+          <a:prstGeom prst="rect">
+            <a:avLst/>
+          </a:prstGeom>
+          <a:noFill/>
+        </p:spPr>
+        <p:txBody>
+          <a:bodyPr wrap="square" anchor="t">
+            <a:spAutoFit/>
+          </a:bodyPr>
+          <a:lstStyle/>
+          <a:p>
+            <a:pPr algn="l">
+              <a:spcAft>
+                <a:spcPts val="400"/>
+              </a:spcAft>
+            </a:pPr>
+            <a:r>
+              <a:rPr sz="1050" b="0">
+                <a:solidFill>
+                  <a:srgbClr val="5A6F8C"/>
+                </a:solidFill>
+                <a:latin typeface="Calibri"/>
+              </a:rPr>
+              <a:t>Even at 100 bps — six times our assumption — Sharpe 0.82 and 11.3% CAGR still beat the market (0.60 / 10.0%). The 15 bps assumption is not load-bearing.</a:t>
+            </a:r>
+          </a:p>
+        </p:txBody>
+      </p:sp>
+      <p:sp>
+        <p:nvSpPr>
+          <p:cNvPr id="13" name="TextBox 12"/>
+          <p:cNvSpPr txBox="1"/>
+          <p:nvPr/>
+        </p:nvSpPr>
+        <p:spPr>
+          <a:xfrm>
+            <a:off x="6126480" y="1874519"/>
+            <a:ext cx="5577840" cy="320040"/>
+          </a:xfrm>
+          <a:prstGeom prst="rect">
+            <a:avLst/>
+          </a:prstGeom>
+          <a:noFill/>
+        </p:spPr>
+        <p:txBody>
+          <a:bodyPr wrap="square" anchor="t">
+            <a:spAutoFit/>
+          </a:bodyPr>
+          <a:lstStyle/>
+          <a:p>
+            <a:pPr algn="l">
+              <a:spcAft>
+                <a:spcPts val="400"/>
+              </a:spcAft>
+            </a:pPr>
+            <a:r>
+              <a:rPr sz="1100" b="1">
+                <a:solidFill>
+                  <a:srgbClr val="0B1F3A"/>
+                </a:solidFill>
+                <a:latin typeface="Calibri"/>
+              </a:rPr>
+              <a:t>OVERLAY CALIBRATION — a plateau, not a curve-fit</a:t>
+            </a:r>
+          </a:p>
+        </p:txBody>
+      </p:sp>
+      <p:graphicFrame>
+        <p:nvGraphicFramePr>
+          <p:cNvPr id="14" name="Table 13"/>
+          <p:cNvGraphicFramePr>
+            <a:graphicFrameLocks noGrp="1"/>
+          </p:cNvGraphicFramePr>
+          <p:nvPr/>
+        </p:nvGraphicFramePr>
+        <p:xfrm>
+          <a:off x="6126480" y="2286000"/>
+          <a:ext cx="5577837" cy="2011680"/>
+        </p:xfrm>
+        <a:graphic>
+          <a:graphicData uri="http://schemas.openxmlformats.org/drawingml/2006/table">
+            <a:tbl>
+              <a:tblPr firstRow="1" bandRow="1">
+                <a:tableStyleId>{5C22544A-7EE6-4342-B048-85BDC9FD1C3A}</a:tableStyleId>
+              </a:tblPr>
+              <a:tblGrid>
+                <a:gridCol w="1774767"/>
+                <a:gridCol w="1267690"/>
+                <a:gridCol w="1267690"/>
+                <a:gridCol w="1267690"/>
+              </a:tblGrid>
+              <a:tr h="502920">
+                <a:tc>
+                  <a:txBody>
+                    <a:bodyPr/>
+                    <a:lstStyle/>
+                    <a:p>
+                      <a:pPr algn="l"/>
+                      <a:r>
+                        <a:rPr sz="1050" b="1">
+                          <a:solidFill>
+                            <a:srgbClr val="FFFFFF"/>
+                          </a:solidFill>
+                          <a:latin typeface="Calibri"/>
+                        </a:rPr>
+                        <a:t>base \ slope</a:t>
+                      </a:r>
+                    </a:p>
+                  </a:txBody>
+                  <a:tcPr marT="25400" marB="25400">
+                    <a:solidFill>
+                      <a:srgbClr val="0B1F3A"/>
+                    </a:solidFill>
+                  </a:tcPr>
+                </a:tc>
+                <a:tc>
+                  <a:txBody>
+                    <a:bodyPr/>
+                    <a:lstStyle/>
+                    <a:p>
+                      <a:pPr algn="ctr"/>
+                      <a:r>
+                        <a:rPr sz="1050" b="1">
+                          <a:solidFill>
+                            <a:srgbClr val="FFFFFF"/>
+                          </a:solidFill>
+                          <a:latin typeface="Calibri"/>
+                        </a:rPr>
+                        <a:t>0.125</a:t>
+                      </a:r>
+                    </a:p>
+                  </a:txBody>
+                  <a:tcPr marT="25400" marB="25400">
+                    <a:solidFill>
+                      <a:srgbClr val="0B1F3A"/>
+                    </a:solidFill>
+                  </a:tcPr>
+                </a:tc>
+                <a:tc>
+                  <a:txBody>
+                    <a:bodyPr/>
+                    <a:lstStyle/>
+                    <a:p>
+                      <a:pPr algn="ctr"/>
+                      <a:r>
+                        <a:rPr sz="1050" b="1">
+                          <a:solidFill>
+                            <a:srgbClr val="FFFFFF"/>
+                          </a:solidFill>
+                          <a:latin typeface="Calibri"/>
+                        </a:rPr>
+                        <a:t>0.175</a:t>
+                      </a:r>
+                    </a:p>
+                  </a:txBody>
+                  <a:tcPr marT="25400" marB="25400">
+                    <a:solidFill>
+                      <a:srgbClr val="0B1F3A"/>
+                    </a:solidFill>
+                  </a:tcPr>
+                </a:tc>
+                <a:tc>
+                  <a:txBody>
+                    <a:bodyPr/>
+                    <a:lstStyle/>
+                    <a:p>
+                      <a:pPr algn="ctr"/>
+                      <a:r>
+                        <a:rPr sz="1050" b="1">
+                          <a:solidFill>
+                            <a:srgbClr val="FFFFFF"/>
+                          </a:solidFill>
+                          <a:latin typeface="Calibri"/>
+                        </a:rPr>
+                        <a:t>0.225</a:t>
+                      </a:r>
+                    </a:p>
+                  </a:txBody>
+                  <a:tcPr marT="25400" marB="25400">
+                    <a:solidFill>
+                      <a:srgbClr val="0B1F3A"/>
+                    </a:solidFill>
+                  </a:tcPr>
+                </a:tc>
+              </a:tr>
+              <a:tr h="502920">
+                <a:tc>
+                  <a:txBody>
+                    <a:bodyPr/>
+                    <a:lstStyle/>
+                    <a:p>
+                      <a:pPr algn="l"/>
+                      <a:r>
+                        <a:rPr sz="1050" b="1">
+                          <a:solidFill>
+                            <a:srgbClr val="0B1F3A"/>
+                          </a:solidFill>
+                          <a:latin typeface="Calibri"/>
+                        </a:rPr>
+                        <a:t>0.55</a:t>
+                      </a:r>
+                    </a:p>
+                  </a:txBody>
+                  <a:tcPr marT="12700" marB="12700">
+                    <a:solidFill>
+                      <a:srgbClr val="FFFFFF"/>
+                    </a:solidFill>
+                  </a:tcPr>
+                </a:tc>
+                <a:tc>
+                  <a:txBody>
+                    <a:bodyPr/>
+                    <a:lstStyle/>
+                    <a:p>
+                      <a:pPr algn="ctr"/>
+                      <a:r>
+                        <a:rPr sz="1050" b="0">
+                          <a:solidFill>
+                            <a:srgbClr val="0B1F3A"/>
+                          </a:solidFill>
+                          <a:latin typeface="Calibri"/>
+                        </a:rPr>
+                        <a:t>1.09</a:t>
+                      </a:r>
+                    </a:p>
+                  </a:txBody>
+                  <a:tcPr marT="12700" marB="12700">
+                    <a:solidFill>
+                      <a:srgbClr val="FFFFFF"/>
+                    </a:solidFill>
+                  </a:tcPr>
+                </a:tc>
+                <a:tc>
+                  <a:txBody>
+                    <a:bodyPr/>
+                    <a:lstStyle/>
+                    <a:p>
+                      <a:pPr algn="ctr"/>
+                      <a:r>
+                        <a:rPr sz="1050" b="0">
+                          <a:solidFill>
+                            <a:srgbClr val="0B1F3A"/>
+                          </a:solidFill>
+                          <a:latin typeface="Calibri"/>
+                        </a:rPr>
+                        <a:t>1.09</a:t>
+                      </a:r>
+                    </a:p>
+                  </a:txBody>
+                  <a:tcPr marT="12700" marB="12700">
+                    <a:solidFill>
+                      <a:srgbClr val="FFFFFF"/>
+                    </a:solidFill>
+                  </a:tcPr>
+                </a:tc>
+                <a:tc>
+                  <a:txBody>
+                    <a:bodyPr/>
+                    <a:lstStyle/>
+                    <a:p>
+                      <a:pPr algn="ctr"/>
+                      <a:r>
+                        <a:rPr sz="1050" b="0">
+                          <a:solidFill>
+                            <a:srgbClr val="0B1F3A"/>
+                          </a:solidFill>
+                          <a:latin typeface="Calibri"/>
+                        </a:rPr>
+                        <a:t>1.09</a:t>
+                      </a:r>
+                    </a:p>
+                  </a:txBody>
+                  <a:tcPr marT="12700" marB="12700">
+                    <a:solidFill>
+                      <a:srgbClr val="FFFFFF"/>
+                    </a:solidFill>
+                  </a:tcPr>
+                </a:tc>
+              </a:tr>
+              <a:tr h="502920">
+                <a:tc>
+                  <a:txBody>
+                    <a:bodyPr/>
+                    <a:lstStyle/>
+                    <a:p>
+                      <a:pPr algn="l"/>
+                      <a:r>
+                        <a:rPr sz="1050" b="1">
+                          <a:solidFill>
+                            <a:srgbClr val="0B1F3A"/>
+                          </a:solidFill>
+                          <a:latin typeface="Calibri"/>
+                        </a:rPr>
+                        <a:t>0.65 ←</a:t>
+                      </a:r>
+                    </a:p>
+                  </a:txBody>
+                  <a:tcPr marT="12700" marB="12700">
+                    <a:solidFill>
+                      <a:srgbClr val="F5F2EA"/>
+                    </a:solidFill>
+                  </a:tcPr>
+                </a:tc>
+                <a:tc>
+                  <a:txBody>
+                    <a:bodyPr/>
+                    <a:lstStyle/>
+                    <a:p>
+                      <a:pPr algn="ctr"/>
+                      <a:r>
+                        <a:rPr sz="1050" b="0">
+                          <a:solidFill>
+                            <a:srgbClr val="0B1F3A"/>
+                          </a:solidFill>
+                          <a:latin typeface="Calibri"/>
+                        </a:rPr>
+                        <a:t>1.09</a:t>
+                      </a:r>
+                    </a:p>
+                  </a:txBody>
+                  <a:tcPr marT="12700" marB="12700">
+                    <a:solidFill>
+                      <a:srgbClr val="F5F2EA"/>
+                    </a:solidFill>
+                  </a:tcPr>
+                </a:tc>
+                <a:tc>
+                  <a:txBody>
+                    <a:bodyPr/>
+                    <a:lstStyle/>
+                    <a:p>
+                      <a:pPr algn="ctr"/>
+                      <a:r>
+                        <a:rPr sz="1050" b="0">
+                          <a:solidFill>
+                            <a:srgbClr val="0B1F3A"/>
+                          </a:solidFill>
+                          <a:latin typeface="Calibri"/>
+                        </a:rPr>
+                        <a:t>1.09</a:t>
+                      </a:r>
+                    </a:p>
+                  </a:txBody>
+                  <a:tcPr marT="12700" marB="12700">
+                    <a:solidFill>
+                      <a:srgbClr val="F5F2EA"/>
+                    </a:solidFill>
+                  </a:tcPr>
+                </a:tc>
+                <a:tc>
+                  <a:txBody>
+                    <a:bodyPr/>
+                    <a:lstStyle/>
+                    <a:p>
+                      <a:pPr algn="ctr"/>
+                      <a:r>
+                        <a:rPr sz="1050" b="0">
+                          <a:solidFill>
+                            <a:srgbClr val="0B1F3A"/>
+                          </a:solidFill>
+                          <a:latin typeface="Calibri"/>
+                        </a:rPr>
+                        <a:t>1.08</a:t>
+                      </a:r>
+                    </a:p>
+                  </a:txBody>
+                  <a:tcPr marT="12700" marB="12700">
+                    <a:solidFill>
+                      <a:srgbClr val="F5F2EA"/>
+                    </a:solidFill>
+                  </a:tcPr>
+                </a:tc>
+              </a:tr>
+              <a:tr h="502920">
+                <a:tc>
+                  <a:txBody>
+                    <a:bodyPr/>
+                    <a:lstStyle/>
+                    <a:p>
+                      <a:pPr algn="l"/>
+                      <a:r>
+                        <a:rPr sz="1050" b="1">
+                          <a:solidFill>
+                            <a:srgbClr val="0B1F3A"/>
+                          </a:solidFill>
+                          <a:latin typeface="Calibri"/>
+                        </a:rPr>
+                        <a:t>0.75</a:t>
+                      </a:r>
+                    </a:p>
+                  </a:txBody>
+                  <a:tcPr marT="12700" marB="12700">
+                    <a:solidFill>
+                      <a:srgbClr val="FFFFFF"/>
+                    </a:solidFill>
+                  </a:tcPr>
+                </a:tc>
+                <a:tc>
+                  <a:txBody>
+                    <a:bodyPr/>
+                    <a:lstStyle/>
+                    <a:p>
+                      <a:pPr algn="ctr"/>
+                      <a:r>
+                        <a:rPr sz="1050" b="0">
+                          <a:solidFill>
+                            <a:srgbClr val="0B1F3A"/>
+                          </a:solidFill>
+                          <a:latin typeface="Calibri"/>
+                        </a:rPr>
+                        <a:t>1.06</a:t>
+                      </a:r>
+                    </a:p>
+                  </a:txBody>
+                  <a:tcPr marT="12700" marB="12700">
+                    <a:solidFill>
+                      <a:srgbClr val="FFFFFF"/>
+                    </a:solidFill>
+                  </a:tcPr>
+                </a:tc>
+                <a:tc>
+                  <a:txBody>
+                    <a:bodyPr/>
+                    <a:lstStyle/>
+                    <a:p>
+                      <a:pPr algn="ctr"/>
+                      <a:r>
+                        <a:rPr sz="1050" b="0">
+                          <a:solidFill>
+                            <a:srgbClr val="0B1F3A"/>
+                          </a:solidFill>
+                          <a:latin typeface="Calibri"/>
+                        </a:rPr>
+                        <a:t>1.07</a:t>
+                      </a:r>
+                    </a:p>
+                  </a:txBody>
+                  <a:tcPr marT="12700" marB="12700">
+                    <a:solidFill>
+                      <a:srgbClr val="FFFFFF"/>
+                    </a:solidFill>
+                  </a:tcPr>
+                </a:tc>
+                <a:tc>
+                  <a:txBody>
+                    <a:bodyPr/>
+                    <a:lstStyle/>
+                    <a:p>
+                      <a:pPr algn="ctr"/>
+                      <a:r>
+                        <a:rPr sz="1050" b="0">
+                          <a:solidFill>
+                            <a:srgbClr val="0B1F3A"/>
+                          </a:solidFill>
+                          <a:latin typeface="Calibri"/>
+                        </a:rPr>
+                        <a:t>1.07</a:t>
+                      </a:r>
+                    </a:p>
+                  </a:txBody>
+                  <a:tcPr marT="12700" marB="12700">
+                    <a:solidFill>
+                      <a:srgbClr val="FFFFFF"/>
+                    </a:solidFill>
+                  </a:tcPr>
+                </a:tc>
+              </a:tr>
+            </a:tbl>
+          </a:graphicData>
+        </a:graphic>
+      </p:graphicFrame>
+      <p:sp>
+        <p:nvSpPr>
+          <p:cNvPr id="15" name="TextBox 14"/>
+          <p:cNvSpPr txBox="1"/>
+          <p:nvPr/>
+        </p:nvSpPr>
+        <p:spPr>
+          <a:xfrm>
+            <a:off x="6126480" y="4572000"/>
+            <a:ext cx="5577840" cy="1005840"/>
+          </a:xfrm>
+          <a:prstGeom prst="rect">
+            <a:avLst/>
+          </a:prstGeom>
+          <a:noFill/>
+        </p:spPr>
+        <p:txBody>
+          <a:bodyPr wrap="square" anchor="t">
+            <a:spAutoFit/>
+          </a:bodyPr>
+          <a:lstStyle/>
+          <a:p>
+            <a:pPr algn="l">
+              <a:spcAft>
+                <a:spcPts val="400"/>
+              </a:spcAft>
+            </a:pPr>
+            <a:r>
+              <a:rPr sz="1050" b="0">
+                <a:solidFill>
+                  <a:srgbClr val="5A6F8C"/>
+                </a:solidFill>
+                <a:latin typeface="Calibri"/>
+              </a:rPr>
+              <a:t>Sharpe ranges only 1.06–1.09 across nine settings (baseline 55–75%, slope 0.125–0.225). The result doesn't hinge on the exact 0.65 / 0.175 — direct evidence we did not tune these to the backtest.</a:t>
+            </a:r>
+          </a:p>
+        </p:txBody>
+      </p:sp>
+      <p:sp>
+        <p:nvSpPr>
+          <p:cNvPr id="16" name="TextBox 15"/>
+          <p:cNvSpPr txBox="1"/>
+          <p:nvPr/>
+        </p:nvSpPr>
+        <p:spPr>
+          <a:xfrm>
+            <a:off x="502920" y="5577840"/>
+            <a:ext cx="11155680" cy="640080"/>
+          </a:xfrm>
+          <a:prstGeom prst="rect">
+            <a:avLst/>
+          </a:prstGeom>
+          <a:noFill/>
+        </p:spPr>
+        <p:txBody>
+          <a:bodyPr wrap="square">
+            <a:spAutoFit/>
+          </a:bodyPr>
+          <a:lstStyle/>
+          <a:p>
+            <a:pPr>
+              <a:spcAft>
+                <a:spcPts val="400"/>
+              </a:spcAft>
+            </a:pPr>
+            <a:r>
+              <a:rPr sz="1200" b="1">
+                <a:solidFill>
+                  <a:srgbClr val="C9A96E"/>
+                </a:solidFill>
+                <a:latin typeface="Calibri"/>
+              </a:rPr>
+              <a:t>▪  </a:t>
+            </a:r>
+            <a:r>
+              <a:rPr sz="1200" b="1">
+                <a:solidFill>
+                  <a:srgbClr val="0B1F3A"/>
+                </a:solidFill>
+                <a:latin typeface="Calibri"/>
+              </a:rPr>
+              <a:t>Takeaway: </a:t>
+            </a:r>
+            <a:r>
+              <a:rPr sz="1200">
+                <a:solidFill>
+                  <a:srgbClr val="222A38"/>
+                </a:solidFill>
+                <a:latin typeface="Calibri"/>
+              </a:rPr>
+              <a:t>every assumption in the model is either measured against data (ADV) or stress-tested (cost, overlay). None is a hidden knife-edge.</a:t>
             </a:r>
           </a:p>
         </p:txBody>
@@ -7832,7 +10178,7 @@
 </file>
 
 <file path=ppt/slides/slide2.xml><?xml version="1.0" encoding="utf-8"?>
-<p:sld xmlns:a="http://schemas.openxmlformats.org/drawingml/2006/main" xmlns:r="http://schemas.openxmlformats.org/officeDocument/2006/relationships" xmlns:p="http://schemas.openxmlformats.org/presentationml/2006/main">
+<p:sld xmlns:a="http://schemas.openxmlformats.org/drawingml/2006/main" xmlns:p="http://schemas.openxmlformats.org/presentationml/2006/main" xmlns:r="http://schemas.openxmlformats.org/officeDocument/2006/relationships">
   <p:cSld>
     <p:spTree>
       <p:nvGrpSpPr>
@@ -7840,14 +10186,7 @@
         <p:cNvGrpSpPr/>
         <p:nvPr/>
       </p:nvGrpSpPr>
-      <p:grpSpPr>
-        <a:xfrm>
-          <a:off x="0" y="0"/>
-          <a:ext cx="0" cy="0"/>
-          <a:chOff x="0" y="0"/>
-          <a:chExt cx="0" cy="0"/>
-        </a:xfrm>
-      </p:grpSpPr>
+      <p:grpSpPr/>
       <p:sp>
         <p:nvSpPr>
           <p:cNvPr id="2" name="Rectangle 1"/>
@@ -7889,7 +10228,6 @@
           <a:lstStyle/>
           <a:p>
             <a:pPr algn="ctr"/>
-            <a:endParaRPr/>
           </a:p>
         </p:txBody>
       </p:sp>
@@ -7934,7 +10272,6 @@
           <a:lstStyle/>
           <a:p>
             <a:pPr algn="ctr"/>
-            <a:endParaRPr/>
           </a:p>
         </p:txBody>
       </p:sp>
@@ -7979,7 +10316,6 @@
           <a:lstStyle/>
           <a:p>
             <a:pPr algn="ctr"/>
-            <a:endParaRPr/>
           </a:p>
         </p:txBody>
       </p:sp>
@@ -8180,7 +10516,6 @@
           <a:lstStyle/>
           <a:p>
             <a:pPr algn="ctr"/>
-            <a:endParaRPr/>
           </a:p>
         </p:txBody>
       </p:sp>
@@ -8225,7 +10560,6 @@
           <a:lstStyle/>
           <a:p>
             <a:pPr algn="ctr"/>
-            <a:endParaRPr/>
           </a:p>
         </p:txBody>
       </p:sp>
@@ -8387,7 +10721,6 @@
           <a:lstStyle/>
           <a:p>
             <a:pPr algn="ctr"/>
-            <a:endParaRPr/>
           </a:p>
         </p:txBody>
       </p:sp>
@@ -8432,7 +10765,6 @@
           <a:lstStyle/>
           <a:p>
             <a:pPr algn="ctr"/>
-            <a:endParaRPr/>
           </a:p>
         </p:txBody>
       </p:sp>
@@ -8509,7 +10841,7 @@
                 </a:solidFill>
                 <a:latin typeface="Georgia"/>
               </a:rPr>
-              <a:t>1.15</a:t>
+              <a:t>1.09</a:t>
             </a:r>
           </a:p>
         </p:txBody>
@@ -8548,7 +10880,7 @@
                 </a:solidFill>
                 <a:latin typeface="Calibri"/>
               </a:rPr>
-              <a:t>vs S&amp;P 500 0.65</a:t>
+              <a:t>vs S&amp;P 500 0.60</a:t>
             </a:r>
           </a:p>
         </p:txBody>
@@ -8594,7 +10926,6 @@
           <a:lstStyle/>
           <a:p>
             <a:pPr algn="ctr"/>
-            <a:endParaRPr/>
           </a:p>
         </p:txBody>
       </p:sp>
@@ -8639,7 +10970,6 @@
           <a:lstStyle/>
           <a:p>
             <a:pPr algn="ctr"/>
-            <a:endParaRPr/>
           </a:p>
         </p:txBody>
       </p:sp>
@@ -8801,7 +11131,6 @@
           <a:lstStyle/>
           <a:p>
             <a:pPr algn="ctr"/>
-            <a:endParaRPr/>
           </a:p>
         </p:txBody>
       </p:sp>
@@ -8846,7 +11175,6 @@
           <a:lstStyle/>
           <a:p>
             <a:pPr algn="ctr"/>
-            <a:endParaRPr/>
           </a:p>
         </p:txBody>
       </p:sp>
@@ -8923,7 +11251,7 @@
                 </a:solidFill>
                 <a:latin typeface="Georgia"/>
               </a:rPr>
-              <a:t>+6.3%</a:t>
+              <a:t>+5.4%</a:t>
             </a:r>
           </a:p>
         </p:txBody>
@@ -8962,7 +11290,7 @@
                 </a:solidFill>
                 <a:latin typeface="Calibri"/>
               </a:rPr>
-              <a:t>t = 4.8</a:t>
+              <a:t>t = 4.3</a:t>
             </a:r>
           </a:p>
         </p:txBody>
@@ -8995,7 +11323,7 @@
               </a:spcAft>
             </a:pPr>
             <a:r>
-              <a:rPr sz="1400" b="1" dirty="0">
+              <a:rPr sz="1400" b="1">
                 <a:solidFill>
                   <a:srgbClr val="C9A96E"/>
                 </a:solidFill>
@@ -9004,7 +11332,7 @@
               <a:t>▪  </a:t>
             </a:r>
             <a:r>
-              <a:rPr sz="1400" b="1" dirty="0">
+              <a:rPr sz="1400" b="1">
                 <a:solidFill>
                   <a:srgbClr val="0B1F3A"/>
                 </a:solidFill>
@@ -9013,7 +11341,7 @@
               <a:t>What we are: </a:t>
             </a:r>
             <a:r>
-              <a:rPr sz="1400" dirty="0">
+              <a:rPr sz="1400">
                 <a:solidFill>
                   <a:srgbClr val="222A38"/>
                 </a:solidFill>
@@ -9029,7 +11357,7 @@
               </a:spcAft>
             </a:pPr>
             <a:r>
-              <a:rPr sz="1400" b="1" dirty="0">
+              <a:rPr sz="1400" b="1">
                 <a:solidFill>
                   <a:srgbClr val="C9A96E"/>
                 </a:solidFill>
@@ -9038,7 +11366,7 @@
               <a:t>▪  </a:t>
             </a:r>
             <a:r>
-              <a:rPr sz="1400" b="1" dirty="0">
+              <a:rPr sz="1400" b="1">
                 <a:solidFill>
                   <a:srgbClr val="0B1F3A"/>
                 </a:solidFill>
@@ -9047,7 +11375,7 @@
               <a:t>The edge: </a:t>
             </a:r>
             <a:r>
-              <a:rPr sz="1400" dirty="0">
+              <a:rPr sz="1400">
                 <a:solidFill>
                   <a:srgbClr val="222A38"/>
                 </a:solidFill>
@@ -9063,7 +11391,7 @@
               </a:spcAft>
             </a:pPr>
             <a:r>
-              <a:rPr sz="1400" b="1" dirty="0">
+              <a:rPr sz="1400" b="1">
                 <a:solidFill>
                   <a:srgbClr val="C9A96E"/>
                 </a:solidFill>
@@ -9072,7 +11400,7 @@
               <a:t>▪  </a:t>
             </a:r>
             <a:r>
-              <a:rPr sz="1400" b="1" dirty="0">
+              <a:rPr sz="1400" b="1">
                 <a:solidFill>
                   <a:srgbClr val="0B1F3A"/>
                 </a:solidFill>
@@ -9081,13 +11409,13 @@
               <a:t>The result (simulated, 2002–2026): </a:t>
             </a:r>
             <a:r>
-              <a:rPr sz="1400" dirty="0">
+              <a:rPr sz="1400">
                 <a:solidFill>
                   <a:srgbClr val="222A38"/>
                 </a:solidFill>
                 <a:latin typeface="Calibri"/>
               </a:rPr>
-              <a:t>market-beating compounding at ~2/3 of the market's volatility and less than half its drawdown; statistically significant alpha that holds out-of-sample (IS Sharpe 1.16 → OOS 1.14).</a:t>
+              <a:t>market-beating compounding at ~2/3 of the market's volatility and less than half its drawdown; statistically significant alpha that holds out-of-sample (IS Sharpe 1.16 → OOS 1.01).</a:t>
             </a:r>
           </a:p>
           <a:p>
@@ -9097,7 +11425,7 @@
               </a:spcAft>
             </a:pPr>
             <a:r>
-              <a:rPr sz="1400" b="1" dirty="0">
+              <a:rPr sz="1400" b="1">
                 <a:solidFill>
                   <a:srgbClr val="C9A96E"/>
                 </a:solidFill>
@@ -9106,7 +11434,7 @@
               <a:t>▪  </a:t>
             </a:r>
             <a:r>
-              <a:rPr sz="1400" b="1" dirty="0">
+              <a:rPr sz="1400" b="1">
                 <a:solidFill>
                   <a:srgbClr val="0B1F3A"/>
                 </a:solidFill>
@@ -9115,7 +11443,7 @@
               <a:t>Honesty first: </a:t>
             </a:r>
             <a:r>
-              <a:rPr sz="1400" dirty="0">
+              <a:rPr sz="1400">
                 <a:solidFill>
                   <a:srgbClr val="222A38"/>
                 </a:solidFill>
@@ -9135,7 +11463,7 @@
 </file>
 
 <file path=ppt/slides/slide3.xml><?xml version="1.0" encoding="utf-8"?>
-<p:sld xmlns:a="http://schemas.openxmlformats.org/drawingml/2006/main" xmlns:r="http://schemas.openxmlformats.org/officeDocument/2006/relationships" xmlns:p="http://schemas.openxmlformats.org/presentationml/2006/main">
+<p:sld xmlns:a="http://schemas.openxmlformats.org/drawingml/2006/main" xmlns:p="http://schemas.openxmlformats.org/presentationml/2006/main" xmlns:r="http://schemas.openxmlformats.org/officeDocument/2006/relationships">
   <p:cSld>
     <p:spTree>
       <p:nvGrpSpPr>
@@ -9143,14 +11471,7 @@
         <p:cNvGrpSpPr/>
         <p:nvPr/>
       </p:nvGrpSpPr>
-      <p:grpSpPr>
-        <a:xfrm>
-          <a:off x="0" y="0"/>
-          <a:ext cx="0" cy="0"/>
-          <a:chOff x="0" y="0"/>
-          <a:chExt cx="0" cy="0"/>
-        </a:xfrm>
-      </p:grpSpPr>
+      <p:grpSpPr/>
       <p:sp>
         <p:nvSpPr>
           <p:cNvPr id="2" name="Rectangle 1"/>
@@ -9192,7 +11513,6 @@
           <a:lstStyle/>
           <a:p>
             <a:pPr algn="ctr"/>
-            <a:endParaRPr/>
           </a:p>
         </p:txBody>
       </p:sp>
@@ -9237,7 +11557,6 @@
           <a:lstStyle/>
           <a:p>
             <a:pPr algn="ctr"/>
-            <a:endParaRPr/>
           </a:p>
         </p:txBody>
       </p:sp>
@@ -9282,7 +11601,6 @@
           <a:lstStyle/>
           <a:p>
             <a:pPr algn="ctr"/>
-            <a:endParaRPr/>
           </a:p>
         </p:txBody>
       </p:sp>
@@ -9642,7 +11960,6 @@
           <a:lstStyle/>
           <a:p>
             <a:pPr algn="ctr"/>
-            <a:endParaRPr/>
           </a:p>
         </p:txBody>
       </p:sp>
@@ -9704,27 +12021,9 @@
                 <a:tableStyleId>{5C22544A-7EE6-4342-B048-85BDC9FD1C3A}</a:tableStyleId>
               </a:tblPr>
               <a:tblGrid>
-                <a:gridCol w="2490651">
-                  <a:extLst>
-                    <a:ext uri="{9D8B030D-6E8A-4147-A177-3AD203B41FA5}">
-                      <a16:colId xmlns:a16="http://schemas.microsoft.com/office/drawing/2014/main" val="20000"/>
-                    </a:ext>
-                  </a:extLst>
-                </a:gridCol>
-                <a:gridCol w="1132114">
-                  <a:extLst>
-                    <a:ext uri="{9D8B030D-6E8A-4147-A177-3AD203B41FA5}">
-                      <a16:colId xmlns:a16="http://schemas.microsoft.com/office/drawing/2014/main" val="20001"/>
-                    </a:ext>
-                  </a:extLst>
-                </a:gridCol>
-                <a:gridCol w="1132114">
-                  <a:extLst>
-                    <a:ext uri="{9D8B030D-6E8A-4147-A177-3AD203B41FA5}">
-                      <a16:colId xmlns:a16="http://schemas.microsoft.com/office/drawing/2014/main" val="20002"/>
-                    </a:ext>
-                  </a:extLst>
-                </a:gridCol>
+                <a:gridCol w="2490651"/>
+                <a:gridCol w="1132114"/>
+                <a:gridCol w="1132114"/>
               </a:tblGrid>
               <a:tr h="566928">
                 <a:tc>
@@ -9796,11 +12095,6 @@
                     </a:solidFill>
                   </a:tcPr>
                 </a:tc>
-                <a:extLst>
-                  <a:ext uri="{0D108BD9-81ED-4DB2-BD59-A6C34878D82A}">
-                    <a16:rowId xmlns:a16="http://schemas.microsoft.com/office/drawing/2014/main" val="10000"/>
-                  </a:ext>
-                </a:extLst>
               </a:tr>
               <a:tr h="566928">
                 <a:tc>
@@ -9839,7 +12133,7 @@
                           </a:solidFill>
                           <a:latin typeface="Calibri"/>
                         </a:rPr>
-                        <a:t>1.15</a:t>
+                        <a:t>1.09</a:t>
                       </a:r>
                     </a:p>
                   </a:txBody>
@@ -9862,7 +12156,7 @@
                           </a:solidFill>
                           <a:latin typeface="Calibri"/>
                         </a:rPr>
-                        <a:t>0.65</a:t>
+                        <a:t>0.60</a:t>
                       </a:r>
                     </a:p>
                   </a:txBody>
@@ -9872,11 +12166,6 @@
                     </a:solidFill>
                   </a:tcPr>
                 </a:tc>
-                <a:extLst>
-                  <a:ext uri="{0D108BD9-81ED-4DB2-BD59-A6C34878D82A}">
-                    <a16:rowId xmlns:a16="http://schemas.microsoft.com/office/drawing/2014/main" val="10001"/>
-                  </a:ext>
-                </a:extLst>
               </a:tr>
               <a:tr h="566928">
                 <a:tc>
@@ -9948,11 +12237,6 @@
                     </a:solidFill>
                   </a:tcPr>
                 </a:tc>
-                <a:extLst>
-                  <a:ext uri="{0D108BD9-81ED-4DB2-BD59-A6C34878D82A}">
-                    <a16:rowId xmlns:a16="http://schemas.microsoft.com/office/drawing/2014/main" val="10002"/>
-                  </a:ext>
-                </a:extLst>
               </a:tr>
               <a:tr h="566928">
                 <a:tc>
@@ -10024,11 +12308,6 @@
                     </a:solidFill>
                   </a:tcPr>
                 </a:tc>
-                <a:extLst>
-                  <a:ext uri="{0D108BD9-81ED-4DB2-BD59-A6C34878D82A}">
-                    <a16:rowId xmlns:a16="http://schemas.microsoft.com/office/drawing/2014/main" val="10003"/>
-                  </a:ext>
-                </a:extLst>
               </a:tr>
               <a:tr h="566928">
                 <a:tc>
@@ -10100,11 +12379,6 @@
                     </a:solidFill>
                   </a:tcPr>
                 </a:tc>
-                <a:extLst>
-                  <a:ext uri="{0D108BD9-81ED-4DB2-BD59-A6C34878D82A}">
-                    <a16:rowId xmlns:a16="http://schemas.microsoft.com/office/drawing/2014/main" val="10004"/>
-                  </a:ext>
-                </a:extLst>
               </a:tr>
             </a:tbl>
           </a:graphicData>
@@ -10158,7 +12432,7 @@
 </file>
 
 <file path=ppt/slides/slide4.xml><?xml version="1.0" encoding="utf-8"?>
-<p:sld xmlns:a="http://schemas.openxmlformats.org/drawingml/2006/main" xmlns:r="http://schemas.openxmlformats.org/officeDocument/2006/relationships" xmlns:p="http://schemas.openxmlformats.org/presentationml/2006/main">
+<p:sld xmlns:a="http://schemas.openxmlformats.org/drawingml/2006/main" xmlns:p="http://schemas.openxmlformats.org/presentationml/2006/main" xmlns:r="http://schemas.openxmlformats.org/officeDocument/2006/relationships">
   <p:cSld>
     <p:spTree>
       <p:nvGrpSpPr>
@@ -10166,14 +12440,7 @@
         <p:cNvGrpSpPr/>
         <p:nvPr/>
       </p:nvGrpSpPr>
-      <p:grpSpPr>
-        <a:xfrm>
-          <a:off x="0" y="0"/>
-          <a:ext cx="0" cy="0"/>
-          <a:chOff x="0" y="0"/>
-          <a:chExt cx="0" cy="0"/>
-        </a:xfrm>
-      </p:grpSpPr>
+      <p:grpSpPr/>
       <p:sp>
         <p:nvSpPr>
           <p:cNvPr id="2" name="Rectangle 1"/>
@@ -10215,7 +12482,6 @@
           <a:lstStyle/>
           <a:p>
             <a:pPr algn="ctr"/>
-            <a:endParaRPr/>
           </a:p>
         </p:txBody>
       </p:sp>
@@ -10260,7 +12526,6 @@
           <a:lstStyle/>
           <a:p>
             <a:pPr algn="ctr"/>
-            <a:endParaRPr/>
           </a:p>
         </p:txBody>
       </p:sp>
@@ -10305,7 +12570,6 @@
           <a:lstStyle/>
           <a:p>
             <a:pPr algn="ctr"/>
-            <a:endParaRPr/>
           </a:p>
         </p:txBody>
       </p:sp>
@@ -10562,20 +12826,8 @@
                 <a:tableStyleId>{5C22544A-7EE6-4342-B048-85BDC9FD1C3A}</a:tableStyleId>
               </a:tblPr>
               <a:tblGrid>
-                <a:gridCol w="1798320">
-                  <a:extLst>
-                    <a:ext uri="{9D8B030D-6E8A-4147-A177-3AD203B41FA5}">
-                      <a16:colId xmlns:a16="http://schemas.microsoft.com/office/drawing/2014/main" val="20000"/>
-                    </a:ext>
-                  </a:extLst>
-                </a:gridCol>
-                <a:gridCol w="3596640">
-                  <a:extLst>
-                    <a:ext uri="{9D8B030D-6E8A-4147-A177-3AD203B41FA5}">
-                      <a16:colId xmlns:a16="http://schemas.microsoft.com/office/drawing/2014/main" val="20001"/>
-                    </a:ext>
-                  </a:extLst>
-                </a:gridCol>
+                <a:gridCol w="1798320"/>
+                <a:gridCol w="3596640"/>
               </a:tblGrid>
               <a:tr h="475488">
                 <a:tc>
@@ -10624,11 +12876,6 @@
                     </a:solidFill>
                   </a:tcPr>
                 </a:tc>
-                <a:extLst>
-                  <a:ext uri="{0D108BD9-81ED-4DB2-BD59-A6C34878D82A}">
-                    <a16:rowId xmlns:a16="http://schemas.microsoft.com/office/drawing/2014/main" val="10000"/>
-                  </a:ext>
-                </a:extLst>
               </a:tr>
               <a:tr h="475488">
                 <a:tc>
@@ -10677,11 +12924,6 @@
                     </a:solidFill>
                   </a:tcPr>
                 </a:tc>
-                <a:extLst>
-                  <a:ext uri="{0D108BD9-81ED-4DB2-BD59-A6C34878D82A}">
-                    <a16:rowId xmlns:a16="http://schemas.microsoft.com/office/drawing/2014/main" val="10001"/>
-                  </a:ext>
-                </a:extLst>
               </a:tr>
               <a:tr h="475488">
                 <a:tc>
@@ -10730,11 +12972,6 @@
                     </a:solidFill>
                   </a:tcPr>
                 </a:tc>
-                <a:extLst>
-                  <a:ext uri="{0D108BD9-81ED-4DB2-BD59-A6C34878D82A}">
-                    <a16:rowId xmlns:a16="http://schemas.microsoft.com/office/drawing/2014/main" val="10002"/>
-                  </a:ext>
-                </a:extLst>
               </a:tr>
               <a:tr h="475488">
                 <a:tc>
@@ -10783,11 +13020,6 @@
                     </a:solidFill>
                   </a:tcPr>
                 </a:tc>
-                <a:extLst>
-                  <a:ext uri="{0D108BD9-81ED-4DB2-BD59-A6C34878D82A}">
-                    <a16:rowId xmlns:a16="http://schemas.microsoft.com/office/drawing/2014/main" val="10003"/>
-                  </a:ext>
-                </a:extLst>
               </a:tr>
               <a:tr h="475488">
                 <a:tc>
@@ -10836,11 +13068,6 @@
                     </a:solidFill>
                   </a:tcPr>
                 </a:tc>
-                <a:extLst>
-                  <a:ext uri="{0D108BD9-81ED-4DB2-BD59-A6C34878D82A}">
-                    <a16:rowId xmlns:a16="http://schemas.microsoft.com/office/drawing/2014/main" val="10004"/>
-                  </a:ext>
-                </a:extLst>
               </a:tr>
             </a:tbl>
           </a:graphicData>
@@ -10904,27 +13131,9 @@
                 <a:tableStyleId>{5C22544A-7EE6-4342-B048-85BDC9FD1C3A}</a:tableStyleId>
               </a:tblPr>
               <a:tblGrid>
-                <a:gridCol w="2133599">
-                  <a:extLst>
-                    <a:ext uri="{9D8B030D-6E8A-4147-A177-3AD203B41FA5}">
-                      <a16:colId xmlns:a16="http://schemas.microsoft.com/office/drawing/2014/main" val="20000"/>
-                    </a:ext>
-                  </a:extLst>
-                </a:gridCol>
-                <a:gridCol w="1981200">
-                  <a:extLst>
-                    <a:ext uri="{9D8B030D-6E8A-4147-A177-3AD203B41FA5}">
-                      <a16:colId xmlns:a16="http://schemas.microsoft.com/office/drawing/2014/main" val="20001"/>
-                    </a:ext>
-                  </a:extLst>
-                </a:gridCol>
-                <a:gridCol w="1371600">
-                  <a:extLst>
-                    <a:ext uri="{9D8B030D-6E8A-4147-A177-3AD203B41FA5}">
-                      <a16:colId xmlns:a16="http://schemas.microsoft.com/office/drawing/2014/main" val="20002"/>
-                    </a:ext>
-                  </a:extLst>
-                </a:gridCol>
+                <a:gridCol w="2133599"/>
+                <a:gridCol w="1981200"/>
+                <a:gridCol w="1371600"/>
               </a:tblGrid>
               <a:tr h="475488">
                 <a:tc>
@@ -10996,11 +13205,6 @@
                     </a:solidFill>
                   </a:tcPr>
                 </a:tc>
-                <a:extLst>
-                  <a:ext uri="{0D108BD9-81ED-4DB2-BD59-A6C34878D82A}">
-                    <a16:rowId xmlns:a16="http://schemas.microsoft.com/office/drawing/2014/main" val="10000"/>
-                  </a:ext>
-                </a:extLst>
               </a:tr>
               <a:tr h="475488">
                 <a:tc>
@@ -11072,11 +13276,6 @@
                     </a:solidFill>
                   </a:tcPr>
                 </a:tc>
-                <a:extLst>
-                  <a:ext uri="{0D108BD9-81ED-4DB2-BD59-A6C34878D82A}">
-                    <a16:rowId xmlns:a16="http://schemas.microsoft.com/office/drawing/2014/main" val="10001"/>
-                  </a:ext>
-                </a:extLst>
               </a:tr>
               <a:tr h="475488">
                 <a:tc>
@@ -11148,11 +13347,6 @@
                     </a:solidFill>
                   </a:tcPr>
                 </a:tc>
-                <a:extLst>
-                  <a:ext uri="{0D108BD9-81ED-4DB2-BD59-A6C34878D82A}">
-                    <a16:rowId xmlns:a16="http://schemas.microsoft.com/office/drawing/2014/main" val="10002"/>
-                  </a:ext>
-                </a:extLst>
               </a:tr>
               <a:tr h="475488">
                 <a:tc>
@@ -11224,11 +13418,6 @@
                     </a:solidFill>
                   </a:tcPr>
                 </a:tc>
-                <a:extLst>
-                  <a:ext uri="{0D108BD9-81ED-4DB2-BD59-A6C34878D82A}">
-                    <a16:rowId xmlns:a16="http://schemas.microsoft.com/office/drawing/2014/main" val="10003"/>
-                  </a:ext>
-                </a:extLst>
               </a:tr>
               <a:tr h="475488">
                 <a:tc>
@@ -11300,11 +13489,6 @@
                     </a:solidFill>
                   </a:tcPr>
                 </a:tc>
-                <a:extLst>
-                  <a:ext uri="{0D108BD9-81ED-4DB2-BD59-A6C34878D82A}">
-                    <a16:rowId xmlns:a16="http://schemas.microsoft.com/office/drawing/2014/main" val="10004"/>
-                  </a:ext>
-                </a:extLst>
               </a:tr>
             </a:tbl>
           </a:graphicData>
@@ -11351,7 +13535,6 @@
           <a:lstStyle/>
           <a:p>
             <a:pPr algn="ctr"/>
-            <a:endParaRPr/>
           </a:p>
         </p:txBody>
       </p:sp>
@@ -11455,7 +13638,7 @@
 </file>
 
 <file path=ppt/slides/slide5.xml><?xml version="1.0" encoding="utf-8"?>
-<p:sld xmlns:a="http://schemas.openxmlformats.org/drawingml/2006/main" xmlns:r="http://schemas.openxmlformats.org/officeDocument/2006/relationships" xmlns:p="http://schemas.openxmlformats.org/presentationml/2006/main">
+<p:sld xmlns:a="http://schemas.openxmlformats.org/drawingml/2006/main" xmlns:p="http://schemas.openxmlformats.org/presentationml/2006/main" xmlns:r="http://schemas.openxmlformats.org/officeDocument/2006/relationships">
   <p:cSld>
     <p:spTree>
       <p:nvGrpSpPr>
@@ -11463,14 +13646,7 @@
         <p:cNvGrpSpPr/>
         <p:nvPr/>
       </p:nvGrpSpPr>
-      <p:grpSpPr>
-        <a:xfrm>
-          <a:off x="0" y="0"/>
-          <a:ext cx="0" cy="0"/>
-          <a:chOff x="0" y="0"/>
-          <a:chExt cx="0" cy="0"/>
-        </a:xfrm>
-      </p:grpSpPr>
+      <p:grpSpPr/>
       <p:sp>
         <p:nvSpPr>
           <p:cNvPr id="2" name="Rectangle 1"/>
@@ -11512,7 +13688,6 @@
           <a:lstStyle/>
           <a:p>
             <a:pPr algn="ctr"/>
-            <a:endParaRPr/>
           </a:p>
         </p:txBody>
       </p:sp>
@@ -11557,7 +13732,6 @@
           <a:lstStyle/>
           <a:p>
             <a:pPr algn="ctr"/>
-            <a:endParaRPr/>
           </a:p>
         </p:txBody>
       </p:sp>
@@ -11602,7 +13776,6 @@
           <a:lstStyle/>
           <a:p>
             <a:pPr algn="ctr"/>
-            <a:endParaRPr/>
           </a:p>
         </p:txBody>
       </p:sp>
@@ -11803,7 +13976,6 @@
           <a:lstStyle/>
           <a:p>
             <a:pPr algn="ctr"/>
-            <a:endParaRPr/>
           </a:p>
         </p:txBody>
       </p:sp>
@@ -11926,7 +14098,6 @@
           <a:lstStyle/>
           <a:p>
             <a:pPr algn="ctr"/>
-            <a:endParaRPr/>
           </a:p>
         </p:txBody>
       </p:sp>
@@ -12049,7 +14220,6 @@
           <a:lstStyle/>
           <a:p>
             <a:pPr algn="ctr"/>
-            <a:endParaRPr/>
           </a:p>
         </p:txBody>
       </p:sp>
@@ -12270,7 +14440,7 @@
 </file>
 
 <file path=ppt/slides/slide6.xml><?xml version="1.0" encoding="utf-8"?>
-<p:sld xmlns:a="http://schemas.openxmlformats.org/drawingml/2006/main" xmlns:r="http://schemas.openxmlformats.org/officeDocument/2006/relationships" xmlns:p="http://schemas.openxmlformats.org/presentationml/2006/main">
+<p:sld xmlns:a="http://schemas.openxmlformats.org/drawingml/2006/main" xmlns:p="http://schemas.openxmlformats.org/presentationml/2006/main" xmlns:r="http://schemas.openxmlformats.org/officeDocument/2006/relationships">
   <p:cSld>
     <p:spTree>
       <p:nvGrpSpPr>
@@ -12278,14 +14448,7 @@
         <p:cNvGrpSpPr/>
         <p:nvPr/>
       </p:nvGrpSpPr>
-      <p:grpSpPr>
-        <a:xfrm>
-          <a:off x="0" y="0"/>
-          <a:ext cx="0" cy="0"/>
-          <a:chOff x="0" y="0"/>
-          <a:chExt cx="0" cy="0"/>
-        </a:xfrm>
-      </p:grpSpPr>
+      <p:grpSpPr/>
       <p:sp>
         <p:nvSpPr>
           <p:cNvPr id="2" name="Rectangle 1"/>
@@ -12327,7 +14490,6 @@
           <a:lstStyle/>
           <a:p>
             <a:pPr algn="ctr"/>
-            <a:endParaRPr/>
           </a:p>
         </p:txBody>
       </p:sp>
@@ -12372,7 +14534,6 @@
           <a:lstStyle/>
           <a:p>
             <a:pPr algn="ctr"/>
-            <a:endParaRPr/>
           </a:p>
         </p:txBody>
       </p:sp>
@@ -12417,7 +14578,6 @@
           <a:lstStyle/>
           <a:p>
             <a:pPr algn="ctr"/>
-            <a:endParaRPr/>
           </a:p>
         </p:txBody>
       </p:sp>
@@ -12635,20 +14795,8 @@
                 <a:tableStyleId>{5C22544A-7EE6-4342-B048-85BDC9FD1C3A}</a:tableStyleId>
               </a:tblPr>
               <a:tblGrid>
-                <a:gridCol w="3614569">
-                  <a:extLst>
-                    <a:ext uri="{9D8B030D-6E8A-4147-A177-3AD203B41FA5}">
-                      <a16:colId xmlns:a16="http://schemas.microsoft.com/office/drawing/2014/main" val="20000"/>
-                    </a:ext>
-                  </a:extLst>
-                </a:gridCol>
-                <a:gridCol w="1506070">
-                  <a:extLst>
-                    <a:ext uri="{9D8B030D-6E8A-4147-A177-3AD203B41FA5}">
-                      <a16:colId xmlns:a16="http://schemas.microsoft.com/office/drawing/2014/main" val="20001"/>
-                    </a:ext>
-                  </a:extLst>
-                </a:gridCol>
+                <a:gridCol w="3614569"/>
+                <a:gridCol w="1506070"/>
               </a:tblGrid>
               <a:tr h="365760">
                 <a:tc>
@@ -12697,11 +14845,6 @@
                     </a:solidFill>
                   </a:tcPr>
                 </a:tc>
-                <a:extLst>
-                  <a:ext uri="{0D108BD9-81ED-4DB2-BD59-A6C34878D82A}">
-                    <a16:rowId xmlns:a16="http://schemas.microsoft.com/office/drawing/2014/main" val="10000"/>
-                  </a:ext>
-                </a:extLst>
               </a:tr>
               <a:tr h="365760">
                 <a:tc>
@@ -12750,11 +14893,6 @@
                     </a:solidFill>
                   </a:tcPr>
                 </a:tc>
-                <a:extLst>
-                  <a:ext uri="{0D108BD9-81ED-4DB2-BD59-A6C34878D82A}">
-                    <a16:rowId xmlns:a16="http://schemas.microsoft.com/office/drawing/2014/main" val="10001"/>
-                  </a:ext>
-                </a:extLst>
               </a:tr>
               <a:tr h="365760">
                 <a:tc>
@@ -12803,11 +14941,6 @@
                     </a:solidFill>
                   </a:tcPr>
                 </a:tc>
-                <a:extLst>
-                  <a:ext uri="{0D108BD9-81ED-4DB2-BD59-A6C34878D82A}">
-                    <a16:rowId xmlns:a16="http://schemas.microsoft.com/office/drawing/2014/main" val="10002"/>
-                  </a:ext>
-                </a:extLst>
               </a:tr>
               <a:tr h="365760">
                 <a:tc>
@@ -12856,11 +14989,6 @@
                     </a:solidFill>
                   </a:tcPr>
                 </a:tc>
-                <a:extLst>
-                  <a:ext uri="{0D108BD9-81ED-4DB2-BD59-A6C34878D82A}">
-                    <a16:rowId xmlns:a16="http://schemas.microsoft.com/office/drawing/2014/main" val="10003"/>
-                  </a:ext>
-                </a:extLst>
               </a:tr>
               <a:tr h="365760">
                 <a:tc>
@@ -12909,11 +15037,6 @@
                     </a:solidFill>
                   </a:tcPr>
                 </a:tc>
-                <a:extLst>
-                  <a:ext uri="{0D108BD9-81ED-4DB2-BD59-A6C34878D82A}">
-                    <a16:rowId xmlns:a16="http://schemas.microsoft.com/office/drawing/2014/main" val="10004"/>
-                  </a:ext>
-                </a:extLst>
               </a:tr>
               <a:tr h="365760">
                 <a:tc>
@@ -12962,11 +15085,6 @@
                     </a:solidFill>
                   </a:tcPr>
                 </a:tc>
-                <a:extLst>
-                  <a:ext uri="{0D108BD9-81ED-4DB2-BD59-A6C34878D82A}">
-                    <a16:rowId xmlns:a16="http://schemas.microsoft.com/office/drawing/2014/main" val="10005"/>
-                  </a:ext>
-                </a:extLst>
               </a:tr>
               <a:tr h="365760">
                 <a:tc>
@@ -13015,11 +15133,6 @@
                     </a:solidFill>
                   </a:tcPr>
                 </a:tc>
-                <a:extLst>
-                  <a:ext uri="{0D108BD9-81ED-4DB2-BD59-A6C34878D82A}">
-                    <a16:rowId xmlns:a16="http://schemas.microsoft.com/office/drawing/2014/main" val="10006"/>
-                  </a:ext>
-                </a:extLst>
               </a:tr>
               <a:tr h="365760">
                 <a:tc>
@@ -13068,11 +15181,6 @@
                     </a:solidFill>
                   </a:tcPr>
                 </a:tc>
-                <a:extLst>
-                  <a:ext uri="{0D108BD9-81ED-4DB2-BD59-A6C34878D82A}">
-                    <a16:rowId xmlns:a16="http://schemas.microsoft.com/office/drawing/2014/main" val="10007"/>
-                  </a:ext>
-                </a:extLst>
               </a:tr>
               <a:tr h="365760">
                 <a:tc>
@@ -13121,11 +15229,6 @@
                     </a:solidFill>
                   </a:tcPr>
                 </a:tc>
-                <a:extLst>
-                  <a:ext uri="{0D108BD9-81ED-4DB2-BD59-A6C34878D82A}">
-                    <a16:rowId xmlns:a16="http://schemas.microsoft.com/office/drawing/2014/main" val="10008"/>
-                  </a:ext>
-                </a:extLst>
               </a:tr>
             </a:tbl>
           </a:graphicData>
@@ -13372,7 +15475,7 @@
 </file>
 
 <file path=ppt/slides/slide7.xml><?xml version="1.0" encoding="utf-8"?>
-<p:sld xmlns:a="http://schemas.openxmlformats.org/drawingml/2006/main" xmlns:r="http://schemas.openxmlformats.org/officeDocument/2006/relationships" xmlns:p="http://schemas.openxmlformats.org/presentationml/2006/main">
+<p:sld xmlns:a="http://schemas.openxmlformats.org/drawingml/2006/main" xmlns:p="http://schemas.openxmlformats.org/presentationml/2006/main" xmlns:r="http://schemas.openxmlformats.org/officeDocument/2006/relationships">
   <p:cSld>
     <p:spTree>
       <p:nvGrpSpPr>
@@ -13380,14 +15483,7 @@
         <p:cNvGrpSpPr/>
         <p:nvPr/>
       </p:nvGrpSpPr>
-      <p:grpSpPr>
-        <a:xfrm>
-          <a:off x="0" y="0"/>
-          <a:ext cx="0" cy="0"/>
-          <a:chOff x="0" y="0"/>
-          <a:chExt cx="0" cy="0"/>
-        </a:xfrm>
-      </p:grpSpPr>
+      <p:grpSpPr/>
       <p:sp>
         <p:nvSpPr>
           <p:cNvPr id="2" name="Rectangle 1"/>
@@ -13429,7 +15525,6 @@
           <a:lstStyle/>
           <a:p>
             <a:pPr algn="ctr"/>
-            <a:endParaRPr/>
           </a:p>
         </p:txBody>
       </p:sp>
@@ -13474,7 +15569,6 @@
           <a:lstStyle/>
           <a:p>
             <a:pPr algn="ctr"/>
-            <a:endParaRPr/>
           </a:p>
         </p:txBody>
       </p:sp>
@@ -13519,7 +15613,6 @@
           <a:lstStyle/>
           <a:p>
             <a:pPr algn="ctr"/>
-            <a:endParaRPr/>
           </a:p>
         </p:txBody>
       </p:sp>
@@ -13720,7 +15813,6 @@
           <a:lstStyle/>
           <a:p>
             <a:pPr algn="ctr"/>
-            <a:endParaRPr/>
           </a:p>
         </p:txBody>
       </p:sp>
@@ -13765,7 +15857,6 @@
           <a:lstStyle/>
           <a:p>
             <a:pPr algn="ctr"/>
-            <a:endParaRPr/>
           </a:p>
         </p:txBody>
       </p:sp>
@@ -13927,7 +16018,6 @@
           <a:lstStyle/>
           <a:p>
             <a:pPr algn="ctr"/>
-            <a:endParaRPr/>
           </a:p>
         </p:txBody>
       </p:sp>
@@ -13972,7 +16062,6 @@
           <a:lstStyle/>
           <a:p>
             <a:pPr algn="ctr"/>
-            <a:endParaRPr/>
           </a:p>
         </p:txBody>
       </p:sp>
@@ -14134,7 +16223,6 @@
           <a:lstStyle/>
           <a:p>
             <a:pPr algn="ctr"/>
-            <a:endParaRPr/>
           </a:p>
         </p:txBody>
       </p:sp>
@@ -14179,7 +16267,6 @@
           <a:lstStyle/>
           <a:p>
             <a:pPr algn="ctr"/>
-            <a:endParaRPr/>
           </a:p>
         </p:txBody>
       </p:sp>
@@ -14256,7 +16343,7 @@
                 </a:solidFill>
                 <a:latin typeface="Georgia"/>
               </a:rPr>
-              <a:t>0.64</a:t>
+              <a:t>0.69</a:t>
             </a:r>
           </a:p>
         </p:txBody>
@@ -14341,7 +16428,6 @@
           <a:lstStyle/>
           <a:p>
             <a:pPr algn="ctr"/>
-            <a:endParaRPr/>
           </a:p>
         </p:txBody>
       </p:sp>
@@ -14386,7 +16472,6 @@
           <a:lstStyle/>
           <a:p>
             <a:pPr algn="ctr"/>
-            <a:endParaRPr/>
           </a:p>
         </p:txBody>
       </p:sp>
@@ -14463,7 +16548,7 @@
                 </a:solidFill>
                 <a:latin typeface="Georgia"/>
               </a:rPr>
-              <a:t>1.74</a:t>
+              <a:t>1.63</a:t>
             </a:r>
           </a:p>
         </p:txBody>
@@ -14593,7 +16678,7 @@
                 </a:solidFill>
                 <a:latin typeface="Calibri"/>
               </a:rPr>
-              <a:t>controlled exposures (market β 0.64, momentum +0.26); alpha measured against FF5+Momentum with Newey-West standard errors.</a:t>
+              <a:t>controlled exposures (market β 0.69, momentum +0.27); alpha measured against FF5+Momentum with Newey-West standard errors.</a:t>
             </a:r>
           </a:p>
           <a:p>
@@ -14675,7 +16760,7 @@
 </file>
 
 <file path=ppt/slides/slide8.xml><?xml version="1.0" encoding="utf-8"?>
-<p:sld xmlns:a="http://schemas.openxmlformats.org/drawingml/2006/main" xmlns:r="http://schemas.openxmlformats.org/officeDocument/2006/relationships" xmlns:p="http://schemas.openxmlformats.org/presentationml/2006/main">
+<p:sld xmlns:a="http://schemas.openxmlformats.org/drawingml/2006/main" xmlns:p="http://schemas.openxmlformats.org/presentationml/2006/main" xmlns:r="http://schemas.openxmlformats.org/officeDocument/2006/relationships">
   <p:cSld>
     <p:spTree>
       <p:nvGrpSpPr>
@@ -14683,14 +16768,7 @@
         <p:cNvGrpSpPr/>
         <p:nvPr/>
       </p:nvGrpSpPr>
-      <p:grpSpPr>
-        <a:xfrm>
-          <a:off x="0" y="0"/>
-          <a:ext cx="0" cy="0"/>
-          <a:chOff x="0" y="0"/>
-          <a:chExt cx="0" cy="0"/>
-        </a:xfrm>
-      </p:grpSpPr>
+      <p:grpSpPr/>
       <p:sp>
         <p:nvSpPr>
           <p:cNvPr id="2" name="Rectangle 1"/>
@@ -14732,7 +16810,6 @@
           <a:lstStyle/>
           <a:p>
             <a:pPr algn="ctr"/>
-            <a:endParaRPr/>
           </a:p>
         </p:txBody>
       </p:sp>
@@ -14777,7 +16854,6 @@
           <a:lstStyle/>
           <a:p>
             <a:pPr algn="ctr"/>
-            <a:endParaRPr/>
           </a:p>
         </p:txBody>
       </p:sp>
@@ -14822,7 +16898,6 @@
           <a:lstStyle/>
           <a:p>
             <a:pPr algn="ctr"/>
-            <a:endParaRPr/>
           </a:p>
         </p:txBody>
       </p:sp>
@@ -15064,34 +17139,10 @@
                 <a:tableStyleId>{5C22544A-7EE6-4342-B048-85BDC9FD1C3A}</a:tableStyleId>
               </a:tblPr>
               <a:tblGrid>
-                <a:gridCol w="1432560">
-                  <a:extLst>
-                    <a:ext uri="{9D8B030D-6E8A-4147-A177-3AD203B41FA5}">
-                      <a16:colId xmlns:a16="http://schemas.microsoft.com/office/drawing/2014/main" val="20000"/>
-                    </a:ext>
-                  </a:extLst>
-                </a:gridCol>
-                <a:gridCol w="955040">
-                  <a:extLst>
-                    <a:ext uri="{9D8B030D-6E8A-4147-A177-3AD203B41FA5}">
-                      <a16:colId xmlns:a16="http://schemas.microsoft.com/office/drawing/2014/main" val="20001"/>
-                    </a:ext>
-                  </a:extLst>
-                </a:gridCol>
-                <a:gridCol w="859536">
-                  <a:extLst>
-                    <a:ext uri="{9D8B030D-6E8A-4147-A177-3AD203B41FA5}">
-                      <a16:colId xmlns:a16="http://schemas.microsoft.com/office/drawing/2014/main" val="20002"/>
-                    </a:ext>
-                  </a:extLst>
-                </a:gridCol>
-                <a:gridCol w="1050544">
-                  <a:extLst>
-                    <a:ext uri="{9D8B030D-6E8A-4147-A177-3AD203B41FA5}">
-                      <a16:colId xmlns:a16="http://schemas.microsoft.com/office/drawing/2014/main" val="20003"/>
-                    </a:ext>
-                  </a:extLst>
-                </a:gridCol>
+                <a:gridCol w="1432560"/>
+                <a:gridCol w="955040"/>
+                <a:gridCol w="859536"/>
+                <a:gridCol w="1050544"/>
               </a:tblGrid>
               <a:tr h="475488">
                 <a:tc>
@@ -15100,7 +17151,15 @@
                     <a:lstStyle/>
                     <a:p>
                       <a:pPr algn="l"/>
-                      <a:endParaRPr/>
+                      <a:r>
+                        <a:rPr sz="1050" b="1">
+                          <a:solidFill>
+                            <a:srgbClr val="FFFFFF"/>
+                          </a:solidFill>
+                          <a:latin typeface="Calibri"/>
+                        </a:rPr>
+                        <a:t/>
+                      </a:r>
                     </a:p>
                   </a:txBody>
                   <a:tcPr marT="25400" marB="25400">
@@ -15178,11 +17237,6 @@
                     </a:solidFill>
                   </a:tcPr>
                 </a:tc>
-                <a:extLst>
-                  <a:ext uri="{0D108BD9-81ED-4DB2-BD59-A6C34878D82A}">
-                    <a16:rowId xmlns:a16="http://schemas.microsoft.com/office/drawing/2014/main" val="10000"/>
-                  </a:ext>
-                </a:extLst>
               </a:tr>
               <a:tr h="475488">
                 <a:tc>
@@ -15244,7 +17298,7 @@
                           </a:solidFill>
                           <a:latin typeface="Calibri"/>
                         </a:rPr>
-                        <a:t>1.15</a:t>
+                        <a:t>1.09</a:t>
                       </a:r>
                     </a:p>
                   </a:txBody>
@@ -15277,11 +17331,6 @@
                     </a:solidFill>
                   </a:tcPr>
                 </a:tc>
-                <a:extLst>
-                  <a:ext uri="{0D108BD9-81ED-4DB2-BD59-A6C34878D82A}">
-                    <a16:rowId xmlns:a16="http://schemas.microsoft.com/office/drawing/2014/main" val="10001"/>
-                  </a:ext>
-                </a:extLst>
               </a:tr>
               <a:tr h="475488">
                 <a:tc>
@@ -15376,11 +17425,6 @@
                     </a:solidFill>
                   </a:tcPr>
                 </a:tc>
-                <a:extLst>
-                  <a:ext uri="{0D108BD9-81ED-4DB2-BD59-A6C34878D82A}">
-                    <a16:rowId xmlns:a16="http://schemas.microsoft.com/office/drawing/2014/main" val="10002"/>
-                  </a:ext>
-                </a:extLst>
               </a:tr>
               <a:tr h="475488">
                 <a:tc>
@@ -15442,7 +17486,7 @@
                           </a:solidFill>
                           <a:latin typeface="Calibri"/>
                         </a:rPr>
-                        <a:t>1.14</a:t>
+                        <a:t>1.01</a:t>
                       </a:r>
                     </a:p>
                   </a:txBody>
@@ -15475,11 +17519,6 @@
                     </a:solidFill>
                   </a:tcPr>
                 </a:tc>
-                <a:extLst>
-                  <a:ext uri="{0D108BD9-81ED-4DB2-BD59-A6C34878D82A}">
-                    <a16:rowId xmlns:a16="http://schemas.microsoft.com/office/drawing/2014/main" val="10003"/>
-                  </a:ext>
-                </a:extLst>
               </a:tr>
               <a:tr h="475488">
                 <a:tc>
@@ -15541,7 +17580,7 @@
                           </a:solidFill>
                           <a:latin typeface="Calibri"/>
                         </a:rPr>
-                        <a:t>0.65</a:t>
+                        <a:t>0.60</a:t>
                       </a:r>
                     </a:p>
                   </a:txBody>
@@ -15558,7 +17597,7 @@
                     <a:p>
                       <a:pPr algn="ctr"/>
                       <a:r>
-                        <a:rPr sz="1050" b="0" dirty="0">
+                        <a:rPr sz="1050" b="0">
                           <a:solidFill>
                             <a:srgbClr val="0B1F3A"/>
                           </a:solidFill>
@@ -15574,11 +17613,6 @@
                     </a:solidFill>
                   </a:tcPr>
                 </a:tc>
-                <a:extLst>
-                  <a:ext uri="{0D108BD9-81ED-4DB2-BD59-A6C34878D82A}">
-                    <a16:rowId xmlns:a16="http://schemas.microsoft.com/office/drawing/2014/main" val="10004"/>
-                  </a:ext>
-                </a:extLst>
               </a:tr>
             </a:tbl>
           </a:graphicData>
@@ -15592,7 +17626,7 @@
         </p:nvSpPr>
         <p:spPr>
           <a:xfrm>
-            <a:off x="7406640" y="4242816"/>
+            <a:off x="7406640" y="4023360"/>
             <a:ext cx="4297680" cy="1828800"/>
           </a:xfrm>
           <a:prstGeom prst="rect">
@@ -15612,13 +17646,13 @@
               </a:spcAft>
             </a:pPr>
             <a:r>
-              <a:rPr sz="1300" b="1" dirty="0">
+              <a:rPr sz="1300" b="1">
                 <a:solidFill>
                   <a:srgbClr val="2E7D5B"/>
                 </a:solidFill>
                 <a:latin typeface="Calibri"/>
               </a:rPr>
-              <a:t>Alpha +6.3% / yr (t=4.8)</a:t>
+              <a:t>Alpha +5.4% / yr (t=4.3)</a:t>
             </a:r>
           </a:p>
           <a:p>
@@ -15628,7 +17662,7 @@
               </a:spcAft>
             </a:pPr>
             <a:r>
-              <a:rPr sz="1300" b="0" dirty="0">
+              <a:rPr sz="1300" b="0">
                 <a:solidFill>
                   <a:srgbClr val="5A6F8C"/>
                 </a:solidFill>
@@ -15644,7 +17678,7 @@
               </a:spcAft>
             </a:pPr>
             <a:r>
-              <a:rPr sz="1300" b="0" dirty="0">
+              <a:rPr sz="1300" b="0">
                 <a:solidFill>
                   <a:srgbClr val="5A6F8C"/>
                 </a:solidFill>
@@ -15660,13 +17694,13 @@
               </a:spcAft>
             </a:pPr>
             <a:r>
-              <a:rPr sz="1300" b="0" dirty="0">
+              <a:rPr sz="1300" b="0">
                 <a:solidFill>
                   <a:srgbClr val="0B1F3A"/>
                 </a:solidFill>
                 <a:latin typeface="Calibri"/>
               </a:rPr>
-              <a:t>Out-of-sample Sharpe (1.14) ≥ in-sample (1.16): no overfitting decay.</a:t>
+              <a:t>Out-of-sample Sharpe 1.01 vs 1.16 in-sample — a modest step-down, not the collapse overfitting produces; still well above the market OOS.</a:t>
             </a:r>
           </a:p>
         </p:txBody>
@@ -15719,7 +17753,7 @@
 </file>
 
 <file path=ppt/slides/slide9.xml><?xml version="1.0" encoding="utf-8"?>
-<p:sld xmlns:a="http://schemas.openxmlformats.org/drawingml/2006/main" xmlns:r="http://schemas.openxmlformats.org/officeDocument/2006/relationships" xmlns:p="http://schemas.openxmlformats.org/presentationml/2006/main">
+<p:sld xmlns:a="http://schemas.openxmlformats.org/drawingml/2006/main" xmlns:p="http://schemas.openxmlformats.org/presentationml/2006/main" xmlns:r="http://schemas.openxmlformats.org/officeDocument/2006/relationships">
   <p:cSld>
     <p:spTree>
       <p:nvGrpSpPr>
@@ -15727,14 +17761,7 @@
         <p:cNvGrpSpPr/>
         <p:nvPr/>
       </p:nvGrpSpPr>
-      <p:grpSpPr>
-        <a:xfrm>
-          <a:off x="0" y="0"/>
-          <a:ext cx="0" cy="0"/>
-          <a:chOff x="0" y="0"/>
-          <a:chExt cx="0" cy="0"/>
-        </a:xfrm>
-      </p:grpSpPr>
+      <p:grpSpPr/>
       <p:sp>
         <p:nvSpPr>
           <p:cNvPr id="2" name="Rectangle 1"/>
@@ -15776,7 +17803,6 @@
           <a:lstStyle/>
           <a:p>
             <a:pPr algn="ctr"/>
-            <a:endParaRPr/>
           </a:p>
         </p:txBody>
       </p:sp>
@@ -15821,7 +17847,6 @@
           <a:lstStyle/>
           <a:p>
             <a:pPr algn="ctr"/>
-            <a:endParaRPr/>
           </a:p>
         </p:txBody>
       </p:sp>
@@ -15866,7 +17891,6 @@
           <a:lstStyle/>
           <a:p>
             <a:pPr algn="ctr"/>
-            <a:endParaRPr/>
           </a:p>
         </p:txBody>
       </p:sp>
@@ -16045,20 +18069,8 @@
                 <a:tableStyleId>{5C22544A-7EE6-4342-B048-85BDC9FD1C3A}</a:tableStyleId>
               </a:tblPr>
               <a:tblGrid>
-                <a:gridCol w="3346703">
-                  <a:extLst>
-                    <a:ext uri="{9D8B030D-6E8A-4147-A177-3AD203B41FA5}">
-                      <a16:colId xmlns:a16="http://schemas.microsoft.com/office/drawing/2014/main" val="20000"/>
-                    </a:ext>
-                  </a:extLst>
-                </a:gridCol>
-                <a:gridCol w="7808975">
-                  <a:extLst>
-                    <a:ext uri="{9D8B030D-6E8A-4147-A177-3AD203B41FA5}">
-                      <a16:colId xmlns:a16="http://schemas.microsoft.com/office/drawing/2014/main" val="20001"/>
-                    </a:ext>
-                  </a:extLst>
-                </a:gridCol>
+                <a:gridCol w="3346703"/>
+                <a:gridCol w="7808975"/>
               </a:tblGrid>
               <a:tr h="530351">
                 <a:tc>
@@ -16107,11 +18119,6 @@
                     </a:solidFill>
                   </a:tcPr>
                 </a:tc>
-                <a:extLst>
-                  <a:ext uri="{0D108BD9-81ED-4DB2-BD59-A6C34878D82A}">
-                    <a16:rowId xmlns:a16="http://schemas.microsoft.com/office/drawing/2014/main" val="10000"/>
-                  </a:ext>
-                </a:extLst>
               </a:tr>
               <a:tr h="530351">
                 <a:tc>
@@ -16160,11 +18167,6 @@
                     </a:solidFill>
                   </a:tcPr>
                 </a:tc>
-                <a:extLst>
-                  <a:ext uri="{0D108BD9-81ED-4DB2-BD59-A6C34878D82A}">
-                    <a16:rowId xmlns:a16="http://schemas.microsoft.com/office/drawing/2014/main" val="10001"/>
-                  </a:ext>
-                </a:extLst>
               </a:tr>
               <a:tr h="530351">
                 <a:tc>
@@ -16213,11 +18215,6 @@
                     </a:solidFill>
                   </a:tcPr>
                 </a:tc>
-                <a:extLst>
-                  <a:ext uri="{0D108BD9-81ED-4DB2-BD59-A6C34878D82A}">
-                    <a16:rowId xmlns:a16="http://schemas.microsoft.com/office/drawing/2014/main" val="10002"/>
-                  </a:ext>
-                </a:extLst>
               </a:tr>
               <a:tr h="530351">
                 <a:tc>
@@ -16266,11 +18263,6 @@
                     </a:solidFill>
                   </a:tcPr>
                 </a:tc>
-                <a:extLst>
-                  <a:ext uri="{0D108BD9-81ED-4DB2-BD59-A6C34878D82A}">
-                    <a16:rowId xmlns:a16="http://schemas.microsoft.com/office/drawing/2014/main" val="10003"/>
-                  </a:ext>
-                </a:extLst>
               </a:tr>
               <a:tr h="530351">
                 <a:tc>
@@ -16309,7 +18301,7 @@
                           </a:solidFill>
                           <a:latin typeface="Calibri"/>
                         </a:rPr>
-                        <a:t>Train/test split (2002–15 vs 2016–26); OOS Sharpe ≥ IS; standard enhancements tested and rejected.</a:t>
+                        <a:t>Train/test split (2002–15 vs 2016–26); OOS Sharpe close to IS (no collapse); standard enhancements tested and rejected.</a:t>
                       </a:r>
                     </a:p>
                   </a:txBody>
@@ -16319,11 +18311,6 @@
                     </a:solidFill>
                   </a:tcPr>
                 </a:tc>
-                <a:extLst>
-                  <a:ext uri="{0D108BD9-81ED-4DB2-BD59-A6C34878D82A}">
-                    <a16:rowId xmlns:a16="http://schemas.microsoft.com/office/drawing/2014/main" val="10004"/>
-                  </a:ext>
-                </a:extLst>
               </a:tr>
               <a:tr h="530351">
                 <a:tc>
@@ -16362,7 +18349,7 @@
                           </a:solidFill>
                           <a:latin typeface="Calibri"/>
                         </a:rPr>
-                        <a:t>Sharpe 1.15 with full methodology; deflated-Sharpe and factor regression in the appendix.</a:t>
+                        <a:t>Sharpe 1.09 with full methodology; deflated-Sharpe and factor regression in the appendix.</a:t>
                       </a:r>
                     </a:p>
                   </a:txBody>
@@ -16372,11 +18359,6 @@
                     </a:solidFill>
                   </a:tcPr>
                 </a:tc>
-                <a:extLst>
-                  <a:ext uri="{0D108BD9-81ED-4DB2-BD59-A6C34878D82A}">
-                    <a16:rowId xmlns:a16="http://schemas.microsoft.com/office/drawing/2014/main" val="10005"/>
-                  </a:ext>
-                </a:extLst>
               </a:tr>
               <a:tr h="530357">
                 <a:tc>
@@ -16425,11 +18407,6 @@
                     </a:solidFill>
                   </a:tcPr>
                 </a:tc>
-                <a:extLst>
-                  <a:ext uri="{0D108BD9-81ED-4DB2-BD59-A6C34878D82A}">
-                    <a16:rowId xmlns:a16="http://schemas.microsoft.com/office/drawing/2014/main" val="10006"/>
-                  </a:ext>
-                </a:extLst>
               </a:tr>
             </a:tbl>
           </a:graphicData>

--- a/GSD2T_Pitch_Deck.pptx
+++ b/GSD2T_Pitch_Deck.pptx
@@ -5420,7 +5420,7 @@
         <p:spPr>
           <a:xfrm>
             <a:off x="502920" y="3017520"/>
-            <a:ext cx="11155680" cy="2743200"/>
+            <a:ext cx="5577840" cy="2926080"/>
           </a:xfrm>
           <a:prstGeom prst="rect">
             <a:avLst/>
@@ -5435,11 +5435,11 @@
           <a:p>
             <a:pPr>
               <a:spcAft>
-                <a:spcPts val="1000"/>
+                <a:spcPts val="800"/>
               </a:spcAft>
             </a:pPr>
             <a:r>
-              <a:rPr sz="1400" b="1">
+              <a:rPr sz="1250" b="1">
                 <a:solidFill>
                   <a:srgbClr val="C9A96E"/>
                 </a:solidFill>
@@ -5448,7 +5448,7 @@
               <a:t>▪  </a:t>
             </a:r>
             <a:r>
-              <a:rPr sz="1400" b="1">
+              <a:rPr sz="1250" b="1">
                 <a:solidFill>
                   <a:srgbClr val="0B1F3A"/>
                 </a:solidFill>
@@ -5457,23 +5457,23 @@
               <a:t>Basis: </a:t>
             </a:r>
             <a:r>
-              <a:rPr sz="1400">
+              <a:rPr sz="1250">
                 <a:solidFill>
                   <a:srgbClr val="222A38"/>
                 </a:solidFill>
                 <a:latin typeface="Calibri"/>
               </a:rPr>
-              <a:t>5% of average daily volume over 2 days per name, across ~111 holdings. ADV $150M (measured median) to $300M ADV per name — cross-checked against actual volume data, not assumed.</a:t>
+              <a:t>5% of ADV over 2 days per name, ~111 holdings. ADV $150M (measured median) to $300M ADV per name — cross-checked against actual volume data, not assumed.</a:t>
             </a:r>
           </a:p>
           <a:p>
             <a:pPr>
               <a:spcAft>
-                <a:spcPts val="1000"/>
+                <a:spcPts val="800"/>
               </a:spcAft>
             </a:pPr>
             <a:r>
-              <a:rPr sz="1400" b="1">
+              <a:rPr sz="1250" b="1">
                 <a:solidFill>
                   <a:srgbClr val="C9A96E"/>
                 </a:solidFill>
@@ -5482,32 +5482,32 @@
               <a:t>▪  </a:t>
             </a:r>
             <a:r>
-              <a:rPr sz="1400" b="1">
+              <a:rPr sz="1250" b="1">
                 <a:solidFill>
                   <a:srgbClr val="0B1F3A"/>
                 </a:solidFill>
                 <a:latin typeface="Calibri"/>
               </a:rPr>
-              <a:t>Implication: </a:t>
-            </a:r>
-            <a:r>
-              <a:rPr sz="1400">
+              <a:t>Curve, not just a number: </a:t>
+            </a:r>
+            <a:r>
+              <a:rPr sz="1250">
                 <a:solidFill>
                   <a:srgbClr val="222A38"/>
                 </a:solidFill>
                 <a:latin typeface="Calibri"/>
               </a:rPr>
-              <a:t>the full $100M deploys immediately in daily-liquid names; we never approach our own market impact.</a:t>
+              <a:t>net Sharpe holds above the market well past the raise; it degrades only gradually (sub-linear square-root impact).</a:t>
             </a:r>
           </a:p>
           <a:p>
             <a:pPr>
               <a:spcAft>
-                <a:spcPts val="1000"/>
+                <a:spcPts val="800"/>
               </a:spcAft>
             </a:pPr>
             <a:r>
-              <a:rPr sz="1400" b="1">
+              <a:rPr sz="1250" b="1">
                 <a:solidFill>
                   <a:srgbClr val="C9A96E"/>
                 </a:solidFill>
@@ -5516,7 +5516,7 @@
               <a:t>▪  </a:t>
             </a:r>
             <a:r>
-              <a:rPr sz="1400" b="1">
+              <a:rPr sz="1250" b="1">
                 <a:solidFill>
                   <a:srgbClr val="0B1F3A"/>
                 </a:solidFill>
@@ -5525,17 +5525,41 @@
               <a:t>Defensive sleeve: </a:t>
             </a:r>
             <a:r>
-              <a:rPr sz="1400">
+              <a:rPr sz="1250">
                 <a:solidFill>
                   <a:srgbClr val="222A38"/>
                 </a:solidFill>
                 <a:latin typeface="Calibri"/>
               </a:rPr>
-              <a:t>held in the most liquid ETFs on earth (Treasuries, gold) — no capacity constraint.</a:t>
-            </a:r>
-          </a:p>
-        </p:txBody>
-      </p:sp>
+              <a:t>held in the most liquid ETFs on earth — no capacity constraint.</a:t>
+            </a:r>
+          </a:p>
+        </p:txBody>
+      </p:sp>
+      <p:pic>
+        <p:nvPicPr>
+          <p:cNvPr id="30" name="Picture 29" descr="fig_capacity_curve.png"/>
+          <p:cNvPicPr>
+            <a:picLocks noChangeAspect="1"/>
+          </p:cNvPicPr>
+          <p:nvPr/>
+        </p:nvPicPr>
+        <p:blipFill>
+          <a:blip r:embed="rId2"/>
+          <a:stretch>
+            <a:fillRect/>
+          </a:stretch>
+        </p:blipFill>
+        <p:spPr>
+          <a:xfrm>
+            <a:off x="6263640" y="2926080"/>
+            <a:ext cx="5486400" cy="3077737"/>
+          </a:xfrm>
+          <a:prstGeom prst="rect">
+            <a:avLst/>
+          </a:prstGeom>
+        </p:spPr>
+      </p:pic>
     </p:spTree>
   </p:cSld>
   <p:clrMapOvr>
@@ -14417,7 +14441,7 @@
                 </a:solidFill>
                 <a:latin typeface="Calibri"/>
               </a:rPr>
-              <a:t>It generalises: </a:t>
+              <a:t>Robust, not a fluke: </a:t>
             </a:r>
             <a:r>
               <a:rPr sz="1300">
@@ -14426,7 +14450,7 @@
                 </a:solidFill>
                 <a:latin typeface="Calibri"/>
               </a:rPr>
-              <a:t>the same engine gives ~1.0 Sharpe on the Dow 30 and the tech sub-universe — evidence of a real effect, not a single-market fit.</a:t>
+              <a:t>the edge is a parameter plateau, survives the survivorship correction, and holds under cost and overlay stress-tests — a real effect, not a curve-fit.</a:t>
             </a:r>
           </a:p>
         </p:txBody>
@@ -16616,11 +16640,11 @@
           <a:p>
             <a:pPr>
               <a:spcAft>
-                <a:spcPts val="900"/>
+                <a:spcPts val="700"/>
               </a:spcAft>
             </a:pPr>
             <a:r>
-              <a:rPr sz="1350" b="1">
+              <a:rPr sz="1300" b="1">
                 <a:solidFill>
                   <a:srgbClr val="C9A96E"/>
                 </a:solidFill>
@@ -16629,7 +16653,7 @@
               <a:t>▪  </a:t>
             </a:r>
             <a:r>
-              <a:rPr sz="1350" b="1">
+              <a:rPr sz="1300" b="1">
                 <a:solidFill>
                   <a:srgbClr val="0B1F3A"/>
                 </a:solidFill>
@@ -16638,7 +16662,7 @@
               <a:t>Primary control — the macro overlay: </a:t>
             </a:r>
             <a:r>
-              <a:rPr sz="1350">
+              <a:rPr sz="1300">
                 <a:solidFill>
                   <a:srgbClr val="222A38"/>
                 </a:solidFill>
@@ -16650,11 +16674,11 @@
           <a:p>
             <a:pPr>
               <a:spcAft>
-                <a:spcPts val="900"/>
+                <a:spcPts val="700"/>
               </a:spcAft>
             </a:pPr>
             <a:r>
-              <a:rPr sz="1350" b="1">
+              <a:rPr sz="1300" b="1">
                 <a:solidFill>
                   <a:srgbClr val="C9A96E"/>
                 </a:solidFill>
@@ -16663,7 +16687,7 @@
               <a:t>▪  </a:t>
             </a:r>
             <a:r>
-              <a:rPr sz="1350" b="1">
+              <a:rPr sz="1300" b="1">
                 <a:solidFill>
                   <a:srgbClr val="0B1F3A"/>
                 </a:solidFill>
@@ -16672,7 +16696,7 @@
               <a:t>Factor discipline: </a:t>
             </a:r>
             <a:r>
-              <a:rPr sz="1350">
+              <a:rPr sz="1300">
                 <a:solidFill>
                   <a:srgbClr val="222A38"/>
                 </a:solidFill>
@@ -16684,11 +16708,11 @@
           <a:p>
             <a:pPr>
               <a:spcAft>
-                <a:spcPts val="900"/>
+                <a:spcPts val="700"/>
               </a:spcAft>
             </a:pPr>
             <a:r>
-              <a:rPr sz="1350" b="1">
+              <a:rPr sz="1300" b="1">
                 <a:solidFill>
                   <a:srgbClr val="C9A96E"/>
                 </a:solidFill>
@@ -16697,7 +16721,7 @@
               <a:t>▪  </a:t>
             </a:r>
             <a:r>
-              <a:rPr sz="1350" b="1">
+              <a:rPr sz="1300" b="1">
                 <a:solidFill>
                   <a:srgbClr val="0B1F3A"/>
                 </a:solidFill>
@@ -16706,7 +16730,7 @@
               <a:t>Diversification &amp; limits: </a:t>
             </a:r>
             <a:r>
-              <a:rPr sz="1350">
+              <a:rPr sz="1300">
                 <a:solidFill>
                   <a:srgbClr val="222A38"/>
                 </a:solidFill>
@@ -16718,11 +16742,11 @@
           <a:p>
             <a:pPr>
               <a:spcAft>
-                <a:spcPts val="900"/>
+                <a:spcPts val="700"/>
               </a:spcAft>
             </a:pPr>
             <a:r>
-              <a:rPr sz="1350" b="1">
+              <a:rPr sz="1300" b="1">
                 <a:solidFill>
                   <a:srgbClr val="C9A96E"/>
                 </a:solidFill>
@@ -16731,7 +16755,7 @@
               <a:t>▪  </a:t>
             </a:r>
             <a:r>
-              <a:rPr sz="1350" b="1">
+              <a:rPr sz="1300" b="1">
                 <a:solidFill>
                   <a:srgbClr val="0B1F3A"/>
                 </a:solidFill>
@@ -16740,13 +16764,47 @@
               <a:t>Defensive convexity: </a:t>
             </a:r>
             <a:r>
-              <a:rPr sz="1350">
+              <a:rPr sz="1300">
                 <a:solidFill>
                   <a:srgbClr val="222A38"/>
                 </a:solidFill>
                 <a:latin typeface="Calibri"/>
               </a:rPr>
               <a:t>the risk-off sleeve (Treasuries + gold) tends to rise when equities fall, cushioning crises further.</a:t>
+            </a:r>
+          </a:p>
+          <a:p>
+            <a:pPr>
+              <a:spcAft>
+                <a:spcPts val="700"/>
+              </a:spcAft>
+            </a:pPr>
+            <a:r>
+              <a:rPr sz="1300" b="1">
+                <a:solidFill>
+                  <a:srgbClr val="C9A96E"/>
+                </a:solidFill>
+                <a:latin typeface="Calibri"/>
+              </a:rPr>
+              <a:t>▪  </a:t>
+            </a:r>
+            <a:r>
+              <a:rPr sz="1300" b="1">
+                <a:solidFill>
+                  <a:srgbClr val="0B1F3A"/>
+                </a:solidFill>
+                <a:latin typeface="Calibri"/>
+              </a:rPr>
+              <a:t>Coherent tail measure: </a:t>
+            </a:r>
+            <a:r>
+              <a:rPr sz="1300">
+                <a:solidFill>
+                  <a:srgbClr val="222A38"/>
+                </a:solidFill>
+                <a:latin typeface="Calibri"/>
+              </a:rPr>
+              <a:t>monthly 95% expected shortfall (CVaR) 6.7% vs the market's 9.6% — we report ES, not Gaussian VaR.</a:t>
             </a:r>
           </a:p>
         </p:txBody>

--- a/GSD2T_Pitch_Deck.pptx
+++ b/GSD2T_Pitch_Deck.pptx
@@ -5,25 +5,25 @@
     <p:sldMasterId id="2147483648" r:id="rId1"/>
   </p:sldMasterIdLst>
   <p:sldIdLst>
-    <p:sldId id="256" r:id="rId7"/>
-    <p:sldId id="257" r:id="rId8"/>
-    <p:sldId id="258" r:id="rId9"/>
-    <p:sldId id="259" r:id="rId10"/>
-    <p:sldId id="260" r:id="rId11"/>
-    <p:sldId id="261" r:id="rId12"/>
-    <p:sldId id="262" r:id="rId13"/>
-    <p:sldId id="263" r:id="rId14"/>
-    <p:sldId id="264" r:id="rId15"/>
-    <p:sldId id="265" r:id="rId16"/>
-    <p:sldId id="266" r:id="rId17"/>
-    <p:sldId id="267" r:id="rId18"/>
-    <p:sldId id="268" r:id="rId19"/>
-    <p:sldId id="269" r:id="rId20"/>
-    <p:sldId id="270" r:id="rId21"/>
-    <p:sldId id="271" r:id="rId22"/>
-    <p:sldId id="272" r:id="rId23"/>
+    <p:sldId id="256" r:id="rId2"/>
+    <p:sldId id="257" r:id="rId3"/>
+    <p:sldId id="258" r:id="rId4"/>
+    <p:sldId id="259" r:id="rId5"/>
+    <p:sldId id="260" r:id="rId6"/>
+    <p:sldId id="261" r:id="rId7"/>
+    <p:sldId id="262" r:id="rId8"/>
+    <p:sldId id="263" r:id="rId9"/>
+    <p:sldId id="264" r:id="rId10"/>
+    <p:sldId id="265" r:id="rId11"/>
+    <p:sldId id="266" r:id="rId12"/>
+    <p:sldId id="267" r:id="rId13"/>
+    <p:sldId id="268" r:id="rId14"/>
+    <p:sldId id="269" r:id="rId15"/>
+    <p:sldId id="270" r:id="rId16"/>
+    <p:sldId id="271" r:id="rId17"/>
+    <p:sldId id="272" r:id="rId18"/>
   </p:sldIdLst>
-  <p:sldSz cx="12191695" cy="6858000" type="screen4x3"/>
+  <p:sldSz cx="12192000" cy="6858000"/>
   <p:notesSz cx="6858000" cy="9144000"/>
   <p:defaultTextStyle>
     <a:defPPr>
@@ -120,6 +120,22 @@
       </a:defRPr>
     </a:lvl9pPr>
   </p:defaultTextStyle>
+  <p:extLst>
+    <p:ext uri="{EFAFB233-063F-42B5-8137-9DF3F51BA10A}">
+      <p15:sldGuideLst xmlns:p15="http://schemas.microsoft.com/office/powerpoint/2012/main">
+        <p15:guide id="1" orient="horz" pos="2160">
+          <p15:clr>
+            <a:srgbClr val="A4A3A4"/>
+          </p15:clr>
+        </p15:guide>
+        <p15:guide id="2" pos="2880">
+          <p15:clr>
+            <a:srgbClr val="A4A3A4"/>
+          </p15:clr>
+        </p15:guide>
+      </p15:sldGuideLst>
+    </p:ext>
+  </p:extLst>
 </p:presentation>
 </file>
 
@@ -161,10 +177,9 @@
           <a:lstStyle/>
           <a:p>
             <a:r>
-              <a:rPr lang="en-US" smtClean="0"/>
+              <a:rPr lang="en-US"/>
               <a:t>Click to edit Master title style</a:t>
             </a:r>
-            <a:endParaRPr lang="en-US"/>
           </a:p>
         </p:txBody>
       </p:sp>
@@ -280,10 +295,9 @@
           </a:lstStyle>
           <a:p>
             <a:r>
-              <a:rPr lang="en-US" smtClean="0"/>
+              <a:rPr lang="en-US"/>
               <a:t>Click to edit Master subtitle style</a:t>
             </a:r>
-            <a:endParaRPr lang="en-US"/>
           </a:p>
         </p:txBody>
       </p:sp>
@@ -304,7 +318,7 @@
           <a:p>
             <a:fld id="{5BCAD085-E8A6-8845-BD4E-CB4CCA059FC4}" type="datetimeFigureOut">
               <a:rPr lang="en-US" smtClean="0"/>
-              <a:t>1/27/13</a:t>
+              <a:t>6/7/26</a:t>
             </a:fld>
             <a:endParaRPr lang="en-US"/>
           </a:p>
@@ -398,10 +412,9 @@
           <a:lstStyle/>
           <a:p>
             <a:r>
-              <a:rPr lang="en-US" smtClean="0"/>
+              <a:rPr lang="en-US"/>
               <a:t>Click to edit Master title style</a:t>
             </a:r>
-            <a:endParaRPr lang="en-US"/>
           </a:p>
         </p:txBody>
       </p:sp>
@@ -422,38 +435,37 @@
           <a:p>
             <a:pPr lvl="0"/>
             <a:r>
-              <a:rPr lang="en-US" smtClean="0"/>
+              <a:rPr lang="en-US"/>
               <a:t>Click to edit Master text styles</a:t>
             </a:r>
           </a:p>
           <a:p>
             <a:pPr lvl="1"/>
             <a:r>
-              <a:rPr lang="en-US" smtClean="0"/>
+              <a:rPr lang="en-US"/>
               <a:t>Second level</a:t>
             </a:r>
           </a:p>
           <a:p>
             <a:pPr lvl="2"/>
             <a:r>
-              <a:rPr lang="en-US" smtClean="0"/>
+              <a:rPr lang="en-US"/>
               <a:t>Third level</a:t>
             </a:r>
           </a:p>
           <a:p>
             <a:pPr lvl="3"/>
             <a:r>
-              <a:rPr lang="en-US" smtClean="0"/>
+              <a:rPr lang="en-US"/>
               <a:t>Fourth level</a:t>
             </a:r>
           </a:p>
           <a:p>
             <a:pPr lvl="4"/>
             <a:r>
-              <a:rPr lang="en-US" smtClean="0"/>
+              <a:rPr lang="en-US"/>
               <a:t>Fifth level</a:t>
             </a:r>
-            <a:endParaRPr lang="en-US"/>
           </a:p>
         </p:txBody>
       </p:sp>
@@ -474,7 +486,7 @@
           <a:p>
             <a:fld id="{5BCAD085-E8A6-8845-BD4E-CB4CCA059FC4}" type="datetimeFigureOut">
               <a:rPr lang="en-US" smtClean="0"/>
-              <a:t>1/27/13</a:t>
+              <a:t>6/7/26</a:t>
             </a:fld>
             <a:endParaRPr lang="en-US"/>
           </a:p>
@@ -573,10 +585,9 @@
           <a:lstStyle/>
           <a:p>
             <a:r>
-              <a:rPr lang="en-US" smtClean="0"/>
+              <a:rPr lang="en-US"/>
               <a:t>Click to edit Master title style</a:t>
             </a:r>
-            <a:endParaRPr lang="en-US"/>
           </a:p>
         </p:txBody>
       </p:sp>
@@ -602,38 +613,37 @@
           <a:p>
             <a:pPr lvl="0"/>
             <a:r>
-              <a:rPr lang="en-US" smtClean="0"/>
+              <a:rPr lang="en-US"/>
               <a:t>Click to edit Master text styles</a:t>
             </a:r>
           </a:p>
           <a:p>
             <a:pPr lvl="1"/>
             <a:r>
-              <a:rPr lang="en-US" smtClean="0"/>
+              <a:rPr lang="en-US"/>
               <a:t>Second level</a:t>
             </a:r>
           </a:p>
           <a:p>
             <a:pPr lvl="2"/>
             <a:r>
-              <a:rPr lang="en-US" smtClean="0"/>
+              <a:rPr lang="en-US"/>
               <a:t>Third level</a:t>
             </a:r>
           </a:p>
           <a:p>
             <a:pPr lvl="3"/>
             <a:r>
-              <a:rPr lang="en-US" smtClean="0"/>
+              <a:rPr lang="en-US"/>
               <a:t>Fourth level</a:t>
             </a:r>
           </a:p>
           <a:p>
             <a:pPr lvl="4"/>
             <a:r>
-              <a:rPr lang="en-US" smtClean="0"/>
+              <a:rPr lang="en-US"/>
               <a:t>Fifth level</a:t>
             </a:r>
-            <a:endParaRPr lang="en-US"/>
           </a:p>
         </p:txBody>
       </p:sp>
@@ -654,7 +664,7 @@
           <a:p>
             <a:fld id="{5BCAD085-E8A6-8845-BD4E-CB4CCA059FC4}" type="datetimeFigureOut">
               <a:rPr lang="en-US" smtClean="0"/>
-              <a:t>1/27/13</a:t>
+              <a:t>6/7/26</a:t>
             </a:fld>
             <a:endParaRPr lang="en-US"/>
           </a:p>
@@ -748,10 +758,9 @@
           <a:lstStyle/>
           <a:p>
             <a:r>
-              <a:rPr lang="en-US" smtClean="0"/>
+              <a:rPr lang="en-US"/>
               <a:t>Click to edit Master title style</a:t>
             </a:r>
-            <a:endParaRPr lang="en-US"/>
           </a:p>
         </p:txBody>
       </p:sp>
@@ -772,38 +781,37 @@
           <a:p>
             <a:pPr lvl="0"/>
             <a:r>
-              <a:rPr lang="en-US" smtClean="0"/>
+              <a:rPr lang="en-US"/>
               <a:t>Click to edit Master text styles</a:t>
             </a:r>
           </a:p>
           <a:p>
             <a:pPr lvl="1"/>
             <a:r>
-              <a:rPr lang="en-US" smtClean="0"/>
+              <a:rPr lang="en-US"/>
               <a:t>Second level</a:t>
             </a:r>
           </a:p>
           <a:p>
             <a:pPr lvl="2"/>
             <a:r>
-              <a:rPr lang="en-US" smtClean="0"/>
+              <a:rPr lang="en-US"/>
               <a:t>Third level</a:t>
             </a:r>
           </a:p>
           <a:p>
             <a:pPr lvl="3"/>
             <a:r>
-              <a:rPr lang="en-US" smtClean="0"/>
+              <a:rPr lang="en-US"/>
               <a:t>Fourth level</a:t>
             </a:r>
           </a:p>
           <a:p>
             <a:pPr lvl="4"/>
             <a:r>
-              <a:rPr lang="en-US" smtClean="0"/>
+              <a:rPr lang="en-US"/>
               <a:t>Fifth level</a:t>
             </a:r>
-            <a:endParaRPr lang="en-US"/>
           </a:p>
         </p:txBody>
       </p:sp>
@@ -824,7 +832,7 @@
           <a:p>
             <a:fld id="{5BCAD085-E8A6-8845-BD4E-CB4CCA059FC4}" type="datetimeFigureOut">
               <a:rPr lang="en-US" smtClean="0"/>
-              <a:t>1/27/13</a:t>
+              <a:t>6/7/26</a:t>
             </a:fld>
             <a:endParaRPr lang="en-US"/>
           </a:p>
@@ -927,10 +935,9 @@
           </a:lstStyle>
           <a:p>
             <a:r>
-              <a:rPr lang="en-US" smtClean="0"/>
+              <a:rPr lang="en-US"/>
               <a:t>Click to edit Master title style</a:t>
             </a:r>
-            <a:endParaRPr lang="en-US"/>
           </a:p>
         </p:txBody>
       </p:sp>
@@ -1047,7 +1054,7 @@
           <a:p>
             <a:pPr lvl="0"/>
             <a:r>
-              <a:rPr lang="en-US" smtClean="0"/>
+              <a:rPr lang="en-US"/>
               <a:t>Click to edit Master text styles</a:t>
             </a:r>
           </a:p>
@@ -1070,7 +1077,7 @@
           <a:p>
             <a:fld id="{5BCAD085-E8A6-8845-BD4E-CB4CCA059FC4}" type="datetimeFigureOut">
               <a:rPr lang="en-US" smtClean="0"/>
-              <a:t>1/27/13</a:t>
+              <a:t>6/7/26</a:t>
             </a:fld>
             <a:endParaRPr lang="en-US"/>
           </a:p>
@@ -1164,10 +1171,9 @@
           <a:lstStyle/>
           <a:p>
             <a:r>
-              <a:rPr lang="en-US" smtClean="0"/>
+              <a:rPr lang="en-US"/>
               <a:t>Click to edit Master title style</a:t>
             </a:r>
-            <a:endParaRPr lang="en-US"/>
           </a:p>
         </p:txBody>
       </p:sp>
@@ -1221,38 +1227,37 @@
           <a:p>
             <a:pPr lvl="0"/>
             <a:r>
-              <a:rPr lang="en-US" smtClean="0"/>
+              <a:rPr lang="en-US"/>
               <a:t>Click to edit Master text styles</a:t>
             </a:r>
           </a:p>
           <a:p>
             <a:pPr lvl="1"/>
             <a:r>
-              <a:rPr lang="en-US" smtClean="0"/>
+              <a:rPr lang="en-US"/>
               <a:t>Second level</a:t>
             </a:r>
           </a:p>
           <a:p>
             <a:pPr lvl="2"/>
             <a:r>
-              <a:rPr lang="en-US" smtClean="0"/>
+              <a:rPr lang="en-US"/>
               <a:t>Third level</a:t>
             </a:r>
           </a:p>
           <a:p>
             <a:pPr lvl="3"/>
             <a:r>
-              <a:rPr lang="en-US" smtClean="0"/>
+              <a:rPr lang="en-US"/>
               <a:t>Fourth level</a:t>
             </a:r>
           </a:p>
           <a:p>
             <a:pPr lvl="4"/>
             <a:r>
-              <a:rPr lang="en-US" smtClean="0"/>
+              <a:rPr lang="en-US"/>
               <a:t>Fifth level</a:t>
             </a:r>
-            <a:endParaRPr lang="en-US"/>
           </a:p>
         </p:txBody>
       </p:sp>
@@ -1306,38 +1311,37 @@
           <a:p>
             <a:pPr lvl="0"/>
             <a:r>
-              <a:rPr lang="en-US" smtClean="0"/>
+              <a:rPr lang="en-US"/>
               <a:t>Click to edit Master text styles</a:t>
             </a:r>
           </a:p>
           <a:p>
             <a:pPr lvl="1"/>
             <a:r>
-              <a:rPr lang="en-US" smtClean="0"/>
+              <a:rPr lang="en-US"/>
               <a:t>Second level</a:t>
             </a:r>
           </a:p>
           <a:p>
             <a:pPr lvl="2"/>
             <a:r>
-              <a:rPr lang="en-US" smtClean="0"/>
+              <a:rPr lang="en-US"/>
               <a:t>Third level</a:t>
             </a:r>
           </a:p>
           <a:p>
             <a:pPr lvl="3"/>
             <a:r>
-              <a:rPr lang="en-US" smtClean="0"/>
+              <a:rPr lang="en-US"/>
               <a:t>Fourth level</a:t>
             </a:r>
           </a:p>
           <a:p>
             <a:pPr lvl="4"/>
             <a:r>
-              <a:rPr lang="en-US" smtClean="0"/>
+              <a:rPr lang="en-US"/>
               <a:t>Fifth level</a:t>
             </a:r>
-            <a:endParaRPr lang="en-US"/>
           </a:p>
         </p:txBody>
       </p:sp>
@@ -1358,7 +1362,7 @@
           <a:p>
             <a:fld id="{5BCAD085-E8A6-8845-BD4E-CB4CCA059FC4}" type="datetimeFigureOut">
               <a:rPr lang="en-US" smtClean="0"/>
-              <a:t>1/27/13</a:t>
+              <a:t>6/7/26</a:t>
             </a:fld>
             <a:endParaRPr lang="en-US"/>
           </a:p>
@@ -1456,10 +1460,9 @@
           </a:lstStyle>
           <a:p>
             <a:r>
-              <a:rPr lang="en-US" smtClean="0"/>
+              <a:rPr lang="en-US"/>
               <a:t>Click to edit Master title style</a:t>
             </a:r>
-            <a:endParaRPr lang="en-US"/>
           </a:p>
         </p:txBody>
       </p:sp>
@@ -1522,7 +1525,7 @@
           <a:p>
             <a:pPr lvl="0"/>
             <a:r>
-              <a:rPr lang="en-US" smtClean="0"/>
+              <a:rPr lang="en-US"/>
               <a:t>Click to edit Master text styles</a:t>
             </a:r>
           </a:p>
@@ -1578,38 +1581,37 @@
           <a:p>
             <a:pPr lvl="0"/>
             <a:r>
-              <a:rPr lang="en-US" smtClean="0"/>
+              <a:rPr lang="en-US"/>
               <a:t>Click to edit Master text styles</a:t>
             </a:r>
           </a:p>
           <a:p>
             <a:pPr lvl="1"/>
             <a:r>
-              <a:rPr lang="en-US" smtClean="0"/>
+              <a:rPr lang="en-US"/>
               <a:t>Second level</a:t>
             </a:r>
           </a:p>
           <a:p>
             <a:pPr lvl="2"/>
             <a:r>
-              <a:rPr lang="en-US" smtClean="0"/>
+              <a:rPr lang="en-US"/>
               <a:t>Third level</a:t>
             </a:r>
           </a:p>
           <a:p>
             <a:pPr lvl="3"/>
             <a:r>
-              <a:rPr lang="en-US" smtClean="0"/>
+              <a:rPr lang="en-US"/>
               <a:t>Fourth level</a:t>
             </a:r>
           </a:p>
           <a:p>
             <a:pPr lvl="4"/>
             <a:r>
-              <a:rPr lang="en-US" smtClean="0"/>
+              <a:rPr lang="en-US"/>
               <a:t>Fifth level</a:t>
             </a:r>
-            <a:endParaRPr lang="en-US"/>
           </a:p>
         </p:txBody>
       </p:sp>
@@ -1672,7 +1674,7 @@
           <a:p>
             <a:pPr lvl="0"/>
             <a:r>
-              <a:rPr lang="en-US" smtClean="0"/>
+              <a:rPr lang="en-US"/>
               <a:t>Click to edit Master text styles</a:t>
             </a:r>
           </a:p>
@@ -1728,38 +1730,37 @@
           <a:p>
             <a:pPr lvl="0"/>
             <a:r>
-              <a:rPr lang="en-US" smtClean="0"/>
+              <a:rPr lang="en-US"/>
               <a:t>Click to edit Master text styles</a:t>
             </a:r>
           </a:p>
           <a:p>
             <a:pPr lvl="1"/>
             <a:r>
-              <a:rPr lang="en-US" smtClean="0"/>
+              <a:rPr lang="en-US"/>
               <a:t>Second level</a:t>
             </a:r>
           </a:p>
           <a:p>
             <a:pPr lvl="2"/>
             <a:r>
-              <a:rPr lang="en-US" smtClean="0"/>
+              <a:rPr lang="en-US"/>
               <a:t>Third level</a:t>
             </a:r>
           </a:p>
           <a:p>
             <a:pPr lvl="3"/>
             <a:r>
-              <a:rPr lang="en-US" smtClean="0"/>
+              <a:rPr lang="en-US"/>
               <a:t>Fourth level</a:t>
             </a:r>
           </a:p>
           <a:p>
             <a:pPr lvl="4"/>
             <a:r>
-              <a:rPr lang="en-US" smtClean="0"/>
+              <a:rPr lang="en-US"/>
               <a:t>Fifth level</a:t>
             </a:r>
-            <a:endParaRPr lang="en-US"/>
           </a:p>
         </p:txBody>
       </p:sp>
@@ -1780,7 +1781,7 @@
           <a:p>
             <a:fld id="{5BCAD085-E8A6-8845-BD4E-CB4CCA059FC4}" type="datetimeFigureOut">
               <a:rPr lang="en-US" smtClean="0"/>
-              <a:t>1/27/13</a:t>
+              <a:t>6/7/26</a:t>
             </a:fld>
             <a:endParaRPr lang="en-US"/>
           </a:p>
@@ -1874,10 +1875,9 @@
           <a:lstStyle/>
           <a:p>
             <a:r>
-              <a:rPr lang="en-US" smtClean="0"/>
+              <a:rPr lang="en-US"/>
               <a:t>Click to edit Master title style</a:t>
             </a:r>
-            <a:endParaRPr lang="en-US"/>
           </a:p>
         </p:txBody>
       </p:sp>
@@ -1898,7 +1898,7 @@
           <a:p>
             <a:fld id="{5BCAD085-E8A6-8845-BD4E-CB4CCA059FC4}" type="datetimeFigureOut">
               <a:rPr lang="en-US" smtClean="0"/>
-              <a:t>1/27/13</a:t>
+              <a:t>6/7/26</a:t>
             </a:fld>
             <a:endParaRPr lang="en-US"/>
           </a:p>
@@ -1993,7 +1993,7 @@
           <a:p>
             <a:fld id="{5BCAD085-E8A6-8845-BD4E-CB4CCA059FC4}" type="datetimeFigureOut">
               <a:rPr lang="en-US" smtClean="0"/>
-              <a:t>1/27/13</a:t>
+              <a:t>6/7/26</a:t>
             </a:fld>
             <a:endParaRPr lang="en-US"/>
           </a:p>
@@ -2096,10 +2096,9 @@
           </a:lstStyle>
           <a:p>
             <a:r>
-              <a:rPr lang="en-US" smtClean="0"/>
+              <a:rPr lang="en-US"/>
               <a:t>Click to edit Master title style</a:t>
             </a:r>
-            <a:endParaRPr lang="en-US"/>
           </a:p>
         </p:txBody>
       </p:sp>
@@ -2153,38 +2152,37 @@
           <a:p>
             <a:pPr lvl="0"/>
             <a:r>
-              <a:rPr lang="en-US" smtClean="0"/>
+              <a:rPr lang="en-US"/>
               <a:t>Click to edit Master text styles</a:t>
             </a:r>
           </a:p>
           <a:p>
             <a:pPr lvl="1"/>
             <a:r>
-              <a:rPr lang="en-US" smtClean="0"/>
+              <a:rPr lang="en-US"/>
               <a:t>Second level</a:t>
             </a:r>
           </a:p>
           <a:p>
             <a:pPr lvl="2"/>
             <a:r>
-              <a:rPr lang="en-US" smtClean="0"/>
+              <a:rPr lang="en-US"/>
               <a:t>Third level</a:t>
             </a:r>
           </a:p>
           <a:p>
             <a:pPr lvl="3"/>
             <a:r>
-              <a:rPr lang="en-US" smtClean="0"/>
+              <a:rPr lang="en-US"/>
               <a:t>Fourth level</a:t>
             </a:r>
           </a:p>
           <a:p>
             <a:pPr lvl="4"/>
             <a:r>
-              <a:rPr lang="en-US" smtClean="0"/>
+              <a:rPr lang="en-US"/>
               <a:t>Fifth level</a:t>
             </a:r>
-            <a:endParaRPr lang="en-US"/>
           </a:p>
         </p:txBody>
       </p:sp>
@@ -2247,7 +2245,7 @@
           <a:p>
             <a:pPr lvl="0"/>
             <a:r>
-              <a:rPr lang="en-US" smtClean="0"/>
+              <a:rPr lang="en-US"/>
               <a:t>Click to edit Master text styles</a:t>
             </a:r>
           </a:p>
@@ -2270,7 +2268,7 @@
           <a:p>
             <a:fld id="{5BCAD085-E8A6-8845-BD4E-CB4CCA059FC4}" type="datetimeFigureOut">
               <a:rPr lang="en-US" smtClean="0"/>
-              <a:t>1/27/13</a:t>
+              <a:t>6/7/26</a:t>
             </a:fld>
             <a:endParaRPr lang="en-US"/>
           </a:p>
@@ -2373,10 +2371,9 @@
           </a:lstStyle>
           <a:p>
             <a:r>
-              <a:rPr lang="en-US" smtClean="0"/>
+              <a:rPr lang="en-US"/>
               <a:t>Click to edit Master title style</a:t>
             </a:r>
-            <a:endParaRPr lang="en-US"/>
           </a:p>
         </p:txBody>
       </p:sp>
@@ -2500,7 +2497,7 @@
           <a:p>
             <a:pPr lvl="0"/>
             <a:r>
-              <a:rPr lang="en-US" smtClean="0"/>
+              <a:rPr lang="en-US"/>
               <a:t>Click to edit Master text styles</a:t>
             </a:r>
           </a:p>
@@ -2523,7 +2520,7 @@
           <a:p>
             <a:fld id="{5BCAD085-E8A6-8845-BD4E-CB4CCA059FC4}" type="datetimeFigureOut">
               <a:rPr lang="en-US" smtClean="0"/>
-              <a:t>1/27/13</a:t>
+              <a:t>6/7/26</a:t>
             </a:fld>
             <a:endParaRPr lang="en-US"/>
           </a:p>
@@ -2632,10 +2629,9 @@
           <a:lstStyle/>
           <a:p>
             <a:r>
-              <a:rPr lang="en-US" smtClean="0"/>
+              <a:rPr lang="en-US"/>
               <a:t>Click to edit Master title style</a:t>
             </a:r>
-            <a:endParaRPr lang="en-US"/>
           </a:p>
         </p:txBody>
       </p:sp>
@@ -2666,38 +2662,37 @@
           <a:p>
             <a:pPr lvl="0"/>
             <a:r>
-              <a:rPr lang="en-US" smtClean="0"/>
+              <a:rPr lang="en-US"/>
               <a:t>Click to edit Master text styles</a:t>
             </a:r>
           </a:p>
           <a:p>
             <a:pPr lvl="1"/>
             <a:r>
-              <a:rPr lang="en-US" smtClean="0"/>
+              <a:rPr lang="en-US"/>
               <a:t>Second level</a:t>
             </a:r>
           </a:p>
           <a:p>
             <a:pPr lvl="2"/>
             <a:r>
-              <a:rPr lang="en-US" smtClean="0"/>
+              <a:rPr lang="en-US"/>
               <a:t>Third level</a:t>
             </a:r>
           </a:p>
           <a:p>
             <a:pPr lvl="3"/>
             <a:r>
-              <a:rPr lang="en-US" smtClean="0"/>
+              <a:rPr lang="en-US"/>
               <a:t>Fourth level</a:t>
             </a:r>
           </a:p>
           <a:p>
             <a:pPr lvl="4"/>
             <a:r>
-              <a:rPr lang="en-US" smtClean="0"/>
+              <a:rPr lang="en-US"/>
               <a:t>Fifth level</a:t>
             </a:r>
-            <a:endParaRPr lang="en-US"/>
           </a:p>
         </p:txBody>
       </p:sp>
@@ -2736,7 +2731,7 @@
           <a:p>
             <a:fld id="{5BCAD085-E8A6-8845-BD4E-CB4CCA059FC4}" type="datetimeFigureOut">
               <a:rPr lang="en-US" smtClean="0"/>
-              <a:t>1/27/13</a:t>
+              <a:t>6/7/26</a:t>
             </a:fld>
             <a:endParaRPr lang="en-US"/>
           </a:p>
@@ -3095,7 +3090,7 @@
 </file>
 
 <file path=ppt/slides/slide1.xml><?xml version="1.0" encoding="utf-8"?>
-<p:sld xmlns:a="http://schemas.openxmlformats.org/drawingml/2006/main" xmlns:p="http://schemas.openxmlformats.org/presentationml/2006/main" xmlns:r="http://schemas.openxmlformats.org/officeDocument/2006/relationships">
+<p:sld xmlns:a="http://schemas.openxmlformats.org/drawingml/2006/main" xmlns:r="http://schemas.openxmlformats.org/officeDocument/2006/relationships" xmlns:p="http://schemas.openxmlformats.org/presentationml/2006/main">
   <p:cSld>
     <p:spTree>
       <p:nvGrpSpPr>
@@ -3103,7 +3098,14 @@
         <p:cNvGrpSpPr/>
         <p:nvPr/>
       </p:nvGrpSpPr>
-      <p:grpSpPr/>
+      <p:grpSpPr>
+        <a:xfrm>
+          <a:off x="0" y="0"/>
+          <a:ext cx="0" cy="0"/>
+          <a:chOff x="0" y="0"/>
+          <a:chExt cx="0" cy="0"/>
+        </a:xfrm>
+      </p:grpSpPr>
       <p:sp>
         <p:nvSpPr>
           <p:cNvPr id="2" name="Rectangle 1"/>
@@ -3145,6 +3147,7 @@
           <a:lstStyle/>
           <a:p>
             <a:pPr algn="ctr"/>
+            <a:endParaRPr/>
           </a:p>
         </p:txBody>
       </p:sp>
@@ -3189,6 +3192,7 @@
           <a:lstStyle/>
           <a:p>
             <a:pPr algn="ctr"/>
+            <a:endParaRPr/>
           </a:p>
         </p:txBody>
       </p:sp>
@@ -3244,16 +3248,7 @@
                 </a:solidFill>
                 <a:latin typeface="Georgia"/>
               </a:rPr>
-              <a:t>T  </a:t>
-            </a:r>
-            <a:r>
-              <a:rPr sz="4600" b="1">
-                <a:solidFill>
-                  <a:srgbClr val="FFFFFF"/>
-                </a:solidFill>
-                <a:latin typeface="Georgia"/>
-              </a:rPr>
-              <a:t>Asset Management</a:t>
+              <a:t>T  Asset Management</a:t>
             </a:r>
           </a:p>
         </p:txBody>
@@ -3384,7 +3379,7 @@
 </file>
 
 <file path=ppt/slides/slide10.xml><?xml version="1.0" encoding="utf-8"?>
-<p:sld xmlns:a="http://schemas.openxmlformats.org/drawingml/2006/main" xmlns:p="http://schemas.openxmlformats.org/presentationml/2006/main" xmlns:r="http://schemas.openxmlformats.org/officeDocument/2006/relationships">
+<p:sld xmlns:a="http://schemas.openxmlformats.org/drawingml/2006/main" xmlns:r="http://schemas.openxmlformats.org/officeDocument/2006/relationships" xmlns:p="http://schemas.openxmlformats.org/presentationml/2006/main">
   <p:cSld>
     <p:spTree>
       <p:nvGrpSpPr>
@@ -3392,7 +3387,14 @@
         <p:cNvGrpSpPr/>
         <p:nvPr/>
       </p:nvGrpSpPr>
-      <p:grpSpPr/>
+      <p:grpSpPr>
+        <a:xfrm>
+          <a:off x="0" y="0"/>
+          <a:ext cx="0" cy="0"/>
+          <a:chOff x="0" y="0"/>
+          <a:chExt cx="0" cy="0"/>
+        </a:xfrm>
+      </p:grpSpPr>
       <p:sp>
         <p:nvSpPr>
           <p:cNvPr id="2" name="Rectangle 1"/>
@@ -3434,6 +3436,7 @@
           <a:lstStyle/>
           <a:p>
             <a:pPr algn="ctr"/>
+            <a:endParaRPr/>
           </a:p>
         </p:txBody>
       </p:sp>
@@ -3478,6 +3481,7 @@
           <a:lstStyle/>
           <a:p>
             <a:pPr algn="ctr"/>
+            <a:endParaRPr/>
           </a:p>
         </p:txBody>
       </p:sp>
@@ -3522,6 +3526,7 @@
           <a:lstStyle/>
           <a:p>
             <a:pPr algn="ctr"/>
+            <a:endParaRPr/>
           </a:p>
         </p:txBody>
       </p:sp>
@@ -3839,7 +3844,7 @@
 </file>
 
 <file path=ppt/slides/slide11.xml><?xml version="1.0" encoding="utf-8"?>
-<p:sld xmlns:a="http://schemas.openxmlformats.org/drawingml/2006/main" xmlns:p="http://schemas.openxmlformats.org/presentationml/2006/main" xmlns:r="http://schemas.openxmlformats.org/officeDocument/2006/relationships">
+<p:sld xmlns:a="http://schemas.openxmlformats.org/drawingml/2006/main" xmlns:r="http://schemas.openxmlformats.org/officeDocument/2006/relationships" xmlns:p="http://schemas.openxmlformats.org/presentationml/2006/main">
   <p:cSld>
     <p:spTree>
       <p:nvGrpSpPr>
@@ -3847,7 +3852,14 @@
         <p:cNvGrpSpPr/>
         <p:nvPr/>
       </p:nvGrpSpPr>
-      <p:grpSpPr/>
+      <p:grpSpPr>
+        <a:xfrm>
+          <a:off x="0" y="0"/>
+          <a:ext cx="0" cy="0"/>
+          <a:chOff x="0" y="0"/>
+          <a:chExt cx="0" cy="0"/>
+        </a:xfrm>
+      </p:grpSpPr>
       <p:sp>
         <p:nvSpPr>
           <p:cNvPr id="2" name="Rectangle 1"/>
@@ -3889,6 +3901,7 @@
           <a:lstStyle/>
           <a:p>
             <a:pPr algn="ctr"/>
+            <a:endParaRPr/>
           </a:p>
         </p:txBody>
       </p:sp>
@@ -3933,6 +3946,7 @@
           <a:lstStyle/>
           <a:p>
             <a:pPr algn="ctr"/>
+            <a:endParaRPr/>
           </a:p>
         </p:txBody>
       </p:sp>
@@ -3977,6 +3991,7 @@
           <a:lstStyle/>
           <a:p>
             <a:pPr algn="ctr"/>
+            <a:endParaRPr/>
           </a:p>
         </p:txBody>
       </p:sp>
@@ -4294,7 +4309,7 @@
 </file>
 
 <file path=ppt/slides/slide12.xml><?xml version="1.0" encoding="utf-8"?>
-<p:sld xmlns:a="http://schemas.openxmlformats.org/drawingml/2006/main" xmlns:p="http://schemas.openxmlformats.org/presentationml/2006/main" xmlns:r="http://schemas.openxmlformats.org/officeDocument/2006/relationships">
+<p:sld xmlns:a="http://schemas.openxmlformats.org/drawingml/2006/main" xmlns:r="http://schemas.openxmlformats.org/officeDocument/2006/relationships" xmlns:p="http://schemas.openxmlformats.org/presentationml/2006/main">
   <p:cSld>
     <p:spTree>
       <p:nvGrpSpPr>
@@ -4302,7 +4317,14 @@
         <p:cNvGrpSpPr/>
         <p:nvPr/>
       </p:nvGrpSpPr>
-      <p:grpSpPr/>
+      <p:grpSpPr>
+        <a:xfrm>
+          <a:off x="0" y="0"/>
+          <a:ext cx="0" cy="0"/>
+          <a:chOff x="0" y="0"/>
+          <a:chExt cx="0" cy="0"/>
+        </a:xfrm>
+      </p:grpSpPr>
       <p:sp>
         <p:nvSpPr>
           <p:cNvPr id="2" name="Rectangle 1"/>
@@ -4344,6 +4366,7 @@
           <a:lstStyle/>
           <a:p>
             <a:pPr algn="ctr"/>
+            <a:endParaRPr/>
           </a:p>
         </p:txBody>
       </p:sp>
@@ -4388,6 +4411,7 @@
           <a:lstStyle/>
           <a:p>
             <a:pPr algn="ctr"/>
+            <a:endParaRPr/>
           </a:p>
         </p:txBody>
       </p:sp>
@@ -4432,6 +4456,7 @@
           <a:lstStyle/>
           <a:p>
             <a:pPr algn="ctr"/>
+            <a:endParaRPr/>
           </a:p>
         </p:txBody>
       </p:sp>
@@ -4632,6 +4657,7 @@
           <a:lstStyle/>
           <a:p>
             <a:pPr algn="ctr"/>
+            <a:endParaRPr/>
           </a:p>
         </p:txBody>
       </p:sp>
@@ -4676,6 +4702,7 @@
           <a:lstStyle/>
           <a:p>
             <a:pPr algn="ctr"/>
+            <a:endParaRPr/>
           </a:p>
         </p:txBody>
       </p:sp>
@@ -4837,6 +4864,7 @@
           <a:lstStyle/>
           <a:p>
             <a:pPr algn="ctr"/>
+            <a:endParaRPr/>
           </a:p>
         </p:txBody>
       </p:sp>
@@ -4881,6 +4909,7 @@
           <a:lstStyle/>
           <a:p>
             <a:pPr algn="ctr"/>
+            <a:endParaRPr/>
           </a:p>
         </p:txBody>
       </p:sp>
@@ -5042,6 +5071,7 @@
           <a:lstStyle/>
           <a:p>
             <a:pPr algn="ctr"/>
+            <a:endParaRPr/>
           </a:p>
         </p:txBody>
       </p:sp>
@@ -5086,6 +5116,7 @@
           <a:lstStyle/>
           <a:p>
             <a:pPr algn="ctr"/>
+            <a:endParaRPr/>
           </a:p>
         </p:txBody>
       </p:sp>
@@ -5247,6 +5278,7 @@
           <a:lstStyle/>
           <a:p>
             <a:pPr algn="ctr"/>
+            <a:endParaRPr/>
           </a:p>
         </p:txBody>
       </p:sp>
@@ -5291,6 +5323,7 @@
           <a:lstStyle/>
           <a:p>
             <a:pPr algn="ctr"/>
+            <a:endParaRPr/>
           </a:p>
         </p:txBody>
       </p:sp>
@@ -5569,7 +5602,7 @@
 </file>
 
 <file path=ppt/slides/slide13.xml><?xml version="1.0" encoding="utf-8"?>
-<p:sld xmlns:a="http://schemas.openxmlformats.org/drawingml/2006/main" xmlns:p="http://schemas.openxmlformats.org/presentationml/2006/main" xmlns:r="http://schemas.openxmlformats.org/officeDocument/2006/relationships">
+<p:sld xmlns:a="http://schemas.openxmlformats.org/drawingml/2006/main" xmlns:r="http://schemas.openxmlformats.org/officeDocument/2006/relationships" xmlns:p="http://schemas.openxmlformats.org/presentationml/2006/main">
   <p:cSld>
     <p:spTree>
       <p:nvGrpSpPr>
@@ -5577,7 +5610,14 @@
         <p:cNvGrpSpPr/>
         <p:nvPr/>
       </p:nvGrpSpPr>
-      <p:grpSpPr/>
+      <p:grpSpPr>
+        <a:xfrm>
+          <a:off x="0" y="0"/>
+          <a:ext cx="0" cy="0"/>
+          <a:chOff x="0" y="0"/>
+          <a:chExt cx="0" cy="0"/>
+        </a:xfrm>
+      </p:grpSpPr>
       <p:sp>
         <p:nvSpPr>
           <p:cNvPr id="2" name="Rectangle 1"/>
@@ -5619,6 +5659,7 @@
           <a:lstStyle/>
           <a:p>
             <a:pPr algn="ctr"/>
+            <a:endParaRPr/>
           </a:p>
         </p:txBody>
       </p:sp>
@@ -5663,6 +5704,7 @@
           <a:lstStyle/>
           <a:p>
             <a:pPr algn="ctr"/>
+            <a:endParaRPr/>
           </a:p>
         </p:txBody>
       </p:sp>
@@ -5707,6 +5749,7 @@
           <a:lstStyle/>
           <a:p>
             <a:pPr algn="ctr"/>
+            <a:endParaRPr/>
           </a:p>
         </p:txBody>
       </p:sp>
@@ -5924,8 +5967,20 @@
                 <a:tableStyleId>{5C22544A-7EE6-4342-B048-85BDC9FD1C3A}</a:tableStyleId>
               </a:tblPr>
               <a:tblGrid>
-                <a:gridCol w="2037805"/>
-                <a:gridCol w="3448594"/>
+                <a:gridCol w="2037805">
+                  <a:extLst>
+                    <a:ext uri="{9D8B030D-6E8A-4147-A177-3AD203B41FA5}">
+                      <a16:colId xmlns:a16="http://schemas.microsoft.com/office/drawing/2014/main" val="20000"/>
+                    </a:ext>
+                  </a:extLst>
+                </a:gridCol>
+                <a:gridCol w="3448594">
+                  <a:extLst>
+                    <a:ext uri="{9D8B030D-6E8A-4147-A177-3AD203B41FA5}">
+                      <a16:colId xmlns:a16="http://schemas.microsoft.com/office/drawing/2014/main" val="20001"/>
+                    </a:ext>
+                  </a:extLst>
+                </a:gridCol>
               </a:tblGrid>
               <a:tr h="502920">
                 <a:tc>
@@ -5974,6 +6029,11 @@
                     </a:solidFill>
                   </a:tcPr>
                 </a:tc>
+                <a:extLst>
+                  <a:ext uri="{0D108BD9-81ED-4DB2-BD59-A6C34878D82A}">
+                    <a16:rowId xmlns:a16="http://schemas.microsoft.com/office/drawing/2014/main" val="10000"/>
+                  </a:ext>
+                </a:extLst>
               </a:tr>
               <a:tr h="502920">
                 <a:tc>
@@ -6022,6 +6082,11 @@
                     </a:solidFill>
                   </a:tcPr>
                 </a:tc>
+                <a:extLst>
+                  <a:ext uri="{0D108BD9-81ED-4DB2-BD59-A6C34878D82A}">
+                    <a16:rowId xmlns:a16="http://schemas.microsoft.com/office/drawing/2014/main" val="10001"/>
+                  </a:ext>
+                </a:extLst>
               </a:tr>
               <a:tr h="502920">
                 <a:tc>
@@ -6070,6 +6135,11 @@
                     </a:solidFill>
                   </a:tcPr>
                 </a:tc>
+                <a:extLst>
+                  <a:ext uri="{0D108BD9-81ED-4DB2-BD59-A6C34878D82A}">
+                    <a16:rowId xmlns:a16="http://schemas.microsoft.com/office/drawing/2014/main" val="10002"/>
+                  </a:ext>
+                </a:extLst>
               </a:tr>
               <a:tr h="502920">
                 <a:tc>
@@ -6118,6 +6188,11 @@
                     </a:solidFill>
                   </a:tcPr>
                 </a:tc>
+                <a:extLst>
+                  <a:ext uri="{0D108BD9-81ED-4DB2-BD59-A6C34878D82A}">
+                    <a16:rowId xmlns:a16="http://schemas.microsoft.com/office/drawing/2014/main" val="10003"/>
+                  </a:ext>
+                </a:extLst>
               </a:tr>
               <a:tr h="502920">
                 <a:tc>
@@ -6166,6 +6241,11 @@
                     </a:solidFill>
                   </a:tcPr>
                 </a:tc>
+                <a:extLst>
+                  <a:ext uri="{0D108BD9-81ED-4DB2-BD59-A6C34878D82A}">
+                    <a16:rowId xmlns:a16="http://schemas.microsoft.com/office/drawing/2014/main" val="10004"/>
+                  </a:ext>
+                </a:extLst>
               </a:tr>
               <a:tr h="502920">
                 <a:tc>
@@ -6214,6 +6294,11 @@
                     </a:solidFill>
                   </a:tcPr>
                 </a:tc>
+                <a:extLst>
+                  <a:ext uri="{0D108BD9-81ED-4DB2-BD59-A6C34878D82A}">
+                    <a16:rowId xmlns:a16="http://schemas.microsoft.com/office/drawing/2014/main" val="10005"/>
+                  </a:ext>
+                </a:extLst>
               </a:tr>
             </a:tbl>
           </a:graphicData>
@@ -6277,10 +6362,34 @@
                 <a:tableStyleId>{5C22544A-7EE6-4342-B048-85BDC9FD1C3A}</a:tableStyleId>
               </a:tblPr>
               <a:tblGrid>
-                <a:gridCol w="1908313"/>
-                <a:gridCol w="1192695"/>
-                <a:gridCol w="1192695"/>
-                <a:gridCol w="1192695"/>
+                <a:gridCol w="1908313">
+                  <a:extLst>
+                    <a:ext uri="{9D8B030D-6E8A-4147-A177-3AD203B41FA5}">
+                      <a16:colId xmlns:a16="http://schemas.microsoft.com/office/drawing/2014/main" val="20000"/>
+                    </a:ext>
+                  </a:extLst>
+                </a:gridCol>
+                <a:gridCol w="1192695">
+                  <a:extLst>
+                    <a:ext uri="{9D8B030D-6E8A-4147-A177-3AD203B41FA5}">
+                      <a16:colId xmlns:a16="http://schemas.microsoft.com/office/drawing/2014/main" val="20001"/>
+                    </a:ext>
+                  </a:extLst>
+                </a:gridCol>
+                <a:gridCol w="1192695">
+                  <a:extLst>
+                    <a:ext uri="{9D8B030D-6E8A-4147-A177-3AD203B41FA5}">
+                      <a16:colId xmlns:a16="http://schemas.microsoft.com/office/drawing/2014/main" val="20002"/>
+                    </a:ext>
+                  </a:extLst>
+                </a:gridCol>
+                <a:gridCol w="1192695">
+                  <a:extLst>
+                    <a:ext uri="{9D8B030D-6E8A-4147-A177-3AD203B41FA5}">
+                      <a16:colId xmlns:a16="http://schemas.microsoft.com/office/drawing/2014/main" val="20003"/>
+                    </a:ext>
+                  </a:extLst>
+                </a:gridCol>
               </a:tblGrid>
               <a:tr h="502920">
                 <a:tc>
@@ -6289,15 +6398,7 @@
                     <a:lstStyle/>
                     <a:p>
                       <a:pPr algn="l"/>
-                      <a:r>
-                        <a:rPr sz="1100" b="1">
-                          <a:solidFill>
-                            <a:srgbClr val="FFFFFF"/>
-                          </a:solidFill>
-                          <a:latin typeface="Calibri"/>
-                        </a:rPr>
-                        <a:t/>
-                      </a:r>
+                      <a:endParaRPr/>
                     </a:p>
                   </a:txBody>
                   <a:tcPr marT="25400" marB="25400">
@@ -6375,6 +6476,11 @@
                     </a:solidFill>
                   </a:tcPr>
                 </a:tc>
+                <a:extLst>
+                  <a:ext uri="{0D108BD9-81ED-4DB2-BD59-A6C34878D82A}">
+                    <a16:rowId xmlns:a16="http://schemas.microsoft.com/office/drawing/2014/main" val="10000"/>
+                  </a:ext>
+                </a:extLst>
               </a:tr>
               <a:tr h="502920">
                 <a:tc>
@@ -6469,6 +6575,11 @@
                     </a:solidFill>
                   </a:tcPr>
                 </a:tc>
+                <a:extLst>
+                  <a:ext uri="{0D108BD9-81ED-4DB2-BD59-A6C34878D82A}">
+                    <a16:rowId xmlns:a16="http://schemas.microsoft.com/office/drawing/2014/main" val="10001"/>
+                  </a:ext>
+                </a:extLst>
               </a:tr>
               <a:tr h="502920">
                 <a:tc>
@@ -6563,6 +6674,11 @@
                     </a:solidFill>
                   </a:tcPr>
                 </a:tc>
+                <a:extLst>
+                  <a:ext uri="{0D108BD9-81ED-4DB2-BD59-A6C34878D82A}">
+                    <a16:rowId xmlns:a16="http://schemas.microsoft.com/office/drawing/2014/main" val="10002"/>
+                  </a:ext>
+                </a:extLst>
               </a:tr>
               <a:tr h="502920">
                 <a:tc>
@@ -6657,6 +6773,11 @@
                     </a:solidFill>
                   </a:tcPr>
                 </a:tc>
+                <a:extLst>
+                  <a:ext uri="{0D108BD9-81ED-4DB2-BD59-A6C34878D82A}">
+                    <a16:rowId xmlns:a16="http://schemas.microsoft.com/office/drawing/2014/main" val="10003"/>
+                  </a:ext>
+                </a:extLst>
               </a:tr>
             </a:tbl>
           </a:graphicData>
@@ -6670,7 +6791,7 @@
         </p:nvSpPr>
         <p:spPr>
           <a:xfrm>
-            <a:off x="502920" y="4023360"/>
+            <a:off x="502920" y="4617720"/>
             <a:ext cx="11155680" cy="1828800"/>
           </a:xfrm>
           <a:prstGeom prst="rect">
@@ -6796,7 +6917,7 @@
 </file>
 
 <file path=ppt/slides/slide14.xml><?xml version="1.0" encoding="utf-8"?>
-<p:sld xmlns:a="http://schemas.openxmlformats.org/drawingml/2006/main" xmlns:p="http://schemas.openxmlformats.org/presentationml/2006/main" xmlns:r="http://schemas.openxmlformats.org/officeDocument/2006/relationships">
+<p:sld xmlns:a="http://schemas.openxmlformats.org/drawingml/2006/main" xmlns:r="http://schemas.openxmlformats.org/officeDocument/2006/relationships" xmlns:p="http://schemas.openxmlformats.org/presentationml/2006/main">
   <p:cSld>
     <p:spTree>
       <p:nvGrpSpPr>
@@ -6804,7 +6925,14 @@
         <p:cNvGrpSpPr/>
         <p:nvPr/>
       </p:nvGrpSpPr>
-      <p:grpSpPr/>
+      <p:grpSpPr>
+        <a:xfrm>
+          <a:off x="0" y="0"/>
+          <a:ext cx="0" cy="0"/>
+          <a:chOff x="0" y="0"/>
+          <a:chExt cx="0" cy="0"/>
+        </a:xfrm>
+      </p:grpSpPr>
       <p:sp>
         <p:nvSpPr>
           <p:cNvPr id="2" name="Rectangle 1"/>
@@ -6846,6 +6974,7 @@
           <a:lstStyle/>
           <a:p>
             <a:pPr algn="ctr"/>
+            <a:endParaRPr/>
           </a:p>
         </p:txBody>
       </p:sp>
@@ -6890,6 +7019,7 @@
           <a:lstStyle/>
           <a:p>
             <a:pPr algn="ctr"/>
+            <a:endParaRPr/>
           </a:p>
         </p:txBody>
       </p:sp>
@@ -6934,6 +7064,7 @@
           <a:lstStyle/>
           <a:p>
             <a:pPr algn="ctr"/>
+            <a:endParaRPr/>
           </a:p>
         </p:txBody>
       </p:sp>
@@ -7261,7 +7392,7 @@
 </file>
 
 <file path=ppt/slides/slide15.xml><?xml version="1.0" encoding="utf-8"?>
-<p:sld xmlns:a="http://schemas.openxmlformats.org/drawingml/2006/main" xmlns:p="http://schemas.openxmlformats.org/presentationml/2006/main" xmlns:r="http://schemas.openxmlformats.org/officeDocument/2006/relationships">
+<p:sld xmlns:a="http://schemas.openxmlformats.org/drawingml/2006/main" xmlns:r="http://schemas.openxmlformats.org/officeDocument/2006/relationships" xmlns:p="http://schemas.openxmlformats.org/presentationml/2006/main">
   <p:cSld>
     <p:spTree>
       <p:nvGrpSpPr>
@@ -7269,7 +7400,14 @@
         <p:cNvGrpSpPr/>
         <p:nvPr/>
       </p:nvGrpSpPr>
-      <p:grpSpPr/>
+      <p:grpSpPr>
+        <a:xfrm>
+          <a:off x="0" y="0"/>
+          <a:ext cx="0" cy="0"/>
+          <a:chOff x="0" y="0"/>
+          <a:chExt cx="0" cy="0"/>
+        </a:xfrm>
+      </p:grpSpPr>
       <p:sp>
         <p:nvSpPr>
           <p:cNvPr id="2" name="Rectangle 1"/>
@@ -7311,6 +7449,7 @@
           <a:lstStyle/>
           <a:p>
             <a:pPr algn="ctr"/>
+            <a:endParaRPr/>
           </a:p>
         </p:txBody>
       </p:sp>
@@ -7355,6 +7494,7 @@
           <a:lstStyle/>
           <a:p>
             <a:pPr algn="ctr"/>
+            <a:endParaRPr/>
           </a:p>
         </p:txBody>
       </p:sp>
@@ -7718,7 +7858,7 @@
 </file>
 
 <file path=ppt/slides/slide16.xml><?xml version="1.0" encoding="utf-8"?>
-<p:sld xmlns:a="http://schemas.openxmlformats.org/drawingml/2006/main" xmlns:p="http://schemas.openxmlformats.org/presentationml/2006/main" xmlns:r="http://schemas.openxmlformats.org/officeDocument/2006/relationships">
+<p:sld xmlns:a="http://schemas.openxmlformats.org/drawingml/2006/main" xmlns:r="http://schemas.openxmlformats.org/officeDocument/2006/relationships" xmlns:p="http://schemas.openxmlformats.org/presentationml/2006/main">
   <p:cSld>
     <p:spTree>
       <p:nvGrpSpPr>
@@ -7726,7 +7866,14 @@
         <p:cNvGrpSpPr/>
         <p:nvPr/>
       </p:nvGrpSpPr>
-      <p:grpSpPr/>
+      <p:grpSpPr>
+        <a:xfrm>
+          <a:off x="0" y="0"/>
+          <a:ext cx="0" cy="0"/>
+          <a:chOff x="0" y="0"/>
+          <a:chExt cx="0" cy="0"/>
+        </a:xfrm>
+      </p:grpSpPr>
       <p:sp>
         <p:nvSpPr>
           <p:cNvPr id="2" name="Rectangle 1"/>
@@ -7768,6 +7915,7 @@
           <a:lstStyle/>
           <a:p>
             <a:pPr algn="ctr"/>
+            <a:endParaRPr/>
           </a:p>
         </p:txBody>
       </p:sp>
@@ -7812,6 +7960,7 @@
           <a:lstStyle/>
           <a:p>
             <a:pPr algn="ctr"/>
+            <a:endParaRPr/>
           </a:p>
         </p:txBody>
       </p:sp>
@@ -7856,6 +8005,7 @@
           <a:lstStyle/>
           <a:p>
             <a:pPr algn="ctr"/>
+            <a:endParaRPr/>
           </a:p>
         </p:txBody>
       </p:sp>
@@ -8073,10 +8223,34 @@
                 <a:tableStyleId>{5C22544A-7EE6-4342-B048-85BDC9FD1C3A}</a:tableStyleId>
               </a:tblPr>
               <a:tblGrid>
-                <a:gridCol w="3057993"/>
-                <a:gridCol w="1656413"/>
-                <a:gridCol w="1783829"/>
-                <a:gridCol w="1274163"/>
+                <a:gridCol w="3057993">
+                  <a:extLst>
+                    <a:ext uri="{9D8B030D-6E8A-4147-A177-3AD203B41FA5}">
+                      <a16:colId xmlns:a16="http://schemas.microsoft.com/office/drawing/2014/main" val="20000"/>
+                    </a:ext>
+                  </a:extLst>
+                </a:gridCol>
+                <a:gridCol w="1656413">
+                  <a:extLst>
+                    <a:ext uri="{9D8B030D-6E8A-4147-A177-3AD203B41FA5}">
+                      <a16:colId xmlns:a16="http://schemas.microsoft.com/office/drawing/2014/main" val="20001"/>
+                    </a:ext>
+                  </a:extLst>
+                </a:gridCol>
+                <a:gridCol w="1783829">
+                  <a:extLst>
+                    <a:ext uri="{9D8B030D-6E8A-4147-A177-3AD203B41FA5}">
+                      <a16:colId xmlns:a16="http://schemas.microsoft.com/office/drawing/2014/main" val="20002"/>
+                    </a:ext>
+                  </a:extLst>
+                </a:gridCol>
+                <a:gridCol w="1274163">
+                  <a:extLst>
+                    <a:ext uri="{9D8B030D-6E8A-4147-A177-3AD203B41FA5}">
+                      <a16:colId xmlns:a16="http://schemas.microsoft.com/office/drawing/2014/main" val="20003"/>
+                    </a:ext>
+                  </a:extLst>
+                </a:gridCol>
               </a:tblGrid>
               <a:tr h="548640">
                 <a:tc>
@@ -8174,6 +8348,11 @@
                     </a:solidFill>
                   </a:tcPr>
                 </a:tc>
+                <a:extLst>
+                  <a:ext uri="{0D108BD9-81ED-4DB2-BD59-A6C34878D82A}">
+                    <a16:rowId xmlns:a16="http://schemas.microsoft.com/office/drawing/2014/main" val="10000"/>
+                  </a:ext>
+                </a:extLst>
               </a:tr>
               <a:tr h="548640">
                 <a:tc>
@@ -8268,6 +8447,11 @@
                     </a:solidFill>
                   </a:tcPr>
                 </a:tc>
+                <a:extLst>
+                  <a:ext uri="{0D108BD9-81ED-4DB2-BD59-A6C34878D82A}">
+                    <a16:rowId xmlns:a16="http://schemas.microsoft.com/office/drawing/2014/main" val="10001"/>
+                  </a:ext>
+                </a:extLst>
               </a:tr>
               <a:tr h="548640">
                 <a:tc>
@@ -8362,6 +8546,11 @@
                     </a:solidFill>
                   </a:tcPr>
                 </a:tc>
+                <a:extLst>
+                  <a:ext uri="{0D108BD9-81ED-4DB2-BD59-A6C34878D82A}">
+                    <a16:rowId xmlns:a16="http://schemas.microsoft.com/office/drawing/2014/main" val="10002"/>
+                  </a:ext>
+                </a:extLst>
               </a:tr>
               <a:tr h="548640">
                 <a:tc>
@@ -8456,6 +8645,11 @@
                     </a:solidFill>
                   </a:tcPr>
                 </a:tc>
+                <a:extLst>
+                  <a:ext uri="{0D108BD9-81ED-4DB2-BD59-A6C34878D82A}">
+                    <a16:rowId xmlns:a16="http://schemas.microsoft.com/office/drawing/2014/main" val="10003"/>
+                  </a:ext>
+                </a:extLst>
               </a:tr>
               <a:tr h="548640">
                 <a:tc>
@@ -8550,6 +8744,11 @@
                     </a:solidFill>
                   </a:tcPr>
                 </a:tc>
+                <a:extLst>
+                  <a:ext uri="{0D108BD9-81ED-4DB2-BD59-A6C34878D82A}">
+                    <a16:rowId xmlns:a16="http://schemas.microsoft.com/office/drawing/2014/main" val="10004"/>
+                  </a:ext>
+                </a:extLst>
               </a:tr>
             </a:tbl>
           </a:graphicData>
@@ -8742,7 +8941,7 @@
 </file>
 
 <file path=ppt/slides/slide17.xml><?xml version="1.0" encoding="utf-8"?>
-<p:sld xmlns:a="http://schemas.openxmlformats.org/drawingml/2006/main" xmlns:p="http://schemas.openxmlformats.org/presentationml/2006/main" xmlns:r="http://schemas.openxmlformats.org/officeDocument/2006/relationships">
+<p:sld xmlns:a="http://schemas.openxmlformats.org/drawingml/2006/main" xmlns:r="http://schemas.openxmlformats.org/officeDocument/2006/relationships" xmlns:p="http://schemas.openxmlformats.org/presentationml/2006/main">
   <p:cSld>
     <p:spTree>
       <p:nvGrpSpPr>
@@ -8750,7 +8949,14 @@
         <p:cNvGrpSpPr/>
         <p:nvPr/>
       </p:nvGrpSpPr>
-      <p:grpSpPr/>
+      <p:grpSpPr>
+        <a:xfrm>
+          <a:off x="0" y="0"/>
+          <a:ext cx="0" cy="0"/>
+          <a:chOff x="0" y="0"/>
+          <a:chExt cx="0" cy="0"/>
+        </a:xfrm>
+      </p:grpSpPr>
       <p:sp>
         <p:nvSpPr>
           <p:cNvPr id="2" name="Rectangle 1"/>
@@ -8792,6 +8998,7 @@
           <a:lstStyle/>
           <a:p>
             <a:pPr algn="ctr"/>
+            <a:endParaRPr/>
           </a:p>
         </p:txBody>
       </p:sp>
@@ -8836,6 +9043,7 @@
           <a:lstStyle/>
           <a:p>
             <a:pPr algn="ctr"/>
+            <a:endParaRPr/>
           </a:p>
         </p:txBody>
       </p:sp>
@@ -8880,6 +9088,7 @@
           <a:lstStyle/>
           <a:p>
             <a:pPr algn="ctr"/>
+            <a:endParaRPr/>
           </a:p>
         </p:txBody>
       </p:sp>
@@ -9136,10 +9345,34 @@
                 <a:tableStyleId>{5C22544A-7EE6-4342-B048-85BDC9FD1C3A}</a:tableStyleId>
               </a:tblPr>
               <a:tblGrid>
-                <a:gridCol w="1885220"/>
-                <a:gridCol w="1108953"/>
-                <a:gridCol w="1108953"/>
-                <a:gridCol w="1108953"/>
+                <a:gridCol w="1885220">
+                  <a:extLst>
+                    <a:ext uri="{9D8B030D-6E8A-4147-A177-3AD203B41FA5}">
+                      <a16:colId xmlns:a16="http://schemas.microsoft.com/office/drawing/2014/main" val="20000"/>
+                    </a:ext>
+                  </a:extLst>
+                </a:gridCol>
+                <a:gridCol w="1108953">
+                  <a:extLst>
+                    <a:ext uri="{9D8B030D-6E8A-4147-A177-3AD203B41FA5}">
+                      <a16:colId xmlns:a16="http://schemas.microsoft.com/office/drawing/2014/main" val="20001"/>
+                    </a:ext>
+                  </a:extLst>
+                </a:gridCol>
+                <a:gridCol w="1108953">
+                  <a:extLst>
+                    <a:ext uri="{9D8B030D-6E8A-4147-A177-3AD203B41FA5}">
+                      <a16:colId xmlns:a16="http://schemas.microsoft.com/office/drawing/2014/main" val="20002"/>
+                    </a:ext>
+                  </a:extLst>
+                </a:gridCol>
+                <a:gridCol w="1108953">
+                  <a:extLst>
+                    <a:ext uri="{9D8B030D-6E8A-4147-A177-3AD203B41FA5}">
+                      <a16:colId xmlns:a16="http://schemas.microsoft.com/office/drawing/2014/main" val="20003"/>
+                    </a:ext>
+                  </a:extLst>
+                </a:gridCol>
               </a:tblGrid>
               <a:tr h="502920">
                 <a:tc>
@@ -9234,6 +9467,11 @@
                     </a:solidFill>
                   </a:tcPr>
                 </a:tc>
+                <a:extLst>
+                  <a:ext uri="{0D108BD9-81ED-4DB2-BD59-A6C34878D82A}">
+                    <a16:rowId xmlns:a16="http://schemas.microsoft.com/office/drawing/2014/main" val="10000"/>
+                  </a:ext>
+                </a:extLst>
               </a:tr>
               <a:tr h="502920">
                 <a:tc>
@@ -9328,6 +9566,11 @@
                     </a:solidFill>
                   </a:tcPr>
                 </a:tc>
+                <a:extLst>
+                  <a:ext uri="{0D108BD9-81ED-4DB2-BD59-A6C34878D82A}">
+                    <a16:rowId xmlns:a16="http://schemas.microsoft.com/office/drawing/2014/main" val="10001"/>
+                  </a:ext>
+                </a:extLst>
               </a:tr>
               <a:tr h="502920">
                 <a:tc>
@@ -9422,6 +9665,11 @@
                     </a:solidFill>
                   </a:tcPr>
                 </a:tc>
+                <a:extLst>
+                  <a:ext uri="{0D108BD9-81ED-4DB2-BD59-A6C34878D82A}">
+                    <a16:rowId xmlns:a16="http://schemas.microsoft.com/office/drawing/2014/main" val="10002"/>
+                  </a:ext>
+                </a:extLst>
               </a:tr>
               <a:tr h="502920">
                 <a:tc>
@@ -9516,6 +9764,11 @@
                     </a:solidFill>
                   </a:tcPr>
                 </a:tc>
+                <a:extLst>
+                  <a:ext uri="{0D108BD9-81ED-4DB2-BD59-A6C34878D82A}">
+                    <a16:rowId xmlns:a16="http://schemas.microsoft.com/office/drawing/2014/main" val="10003"/>
+                  </a:ext>
+                </a:extLst>
               </a:tr>
               <a:tr h="502920">
                 <a:tc>
@@ -9610,6 +9863,11 @@
                     </a:solidFill>
                   </a:tcPr>
                 </a:tc>
+                <a:extLst>
+                  <a:ext uri="{0D108BD9-81ED-4DB2-BD59-A6C34878D82A}">
+                    <a16:rowId xmlns:a16="http://schemas.microsoft.com/office/drawing/2014/main" val="10004"/>
+                  </a:ext>
+                </a:extLst>
               </a:tr>
             </a:tbl>
           </a:graphicData>
@@ -9712,10 +9970,34 @@
                 <a:tableStyleId>{5C22544A-7EE6-4342-B048-85BDC9FD1C3A}</a:tableStyleId>
               </a:tblPr>
               <a:tblGrid>
-                <a:gridCol w="1774767"/>
-                <a:gridCol w="1267690"/>
-                <a:gridCol w="1267690"/>
-                <a:gridCol w="1267690"/>
+                <a:gridCol w="1774767">
+                  <a:extLst>
+                    <a:ext uri="{9D8B030D-6E8A-4147-A177-3AD203B41FA5}">
+                      <a16:colId xmlns:a16="http://schemas.microsoft.com/office/drawing/2014/main" val="20000"/>
+                    </a:ext>
+                  </a:extLst>
+                </a:gridCol>
+                <a:gridCol w="1267690">
+                  <a:extLst>
+                    <a:ext uri="{9D8B030D-6E8A-4147-A177-3AD203B41FA5}">
+                      <a16:colId xmlns:a16="http://schemas.microsoft.com/office/drawing/2014/main" val="20001"/>
+                    </a:ext>
+                  </a:extLst>
+                </a:gridCol>
+                <a:gridCol w="1267690">
+                  <a:extLst>
+                    <a:ext uri="{9D8B030D-6E8A-4147-A177-3AD203B41FA5}">
+                      <a16:colId xmlns:a16="http://schemas.microsoft.com/office/drawing/2014/main" val="20002"/>
+                    </a:ext>
+                  </a:extLst>
+                </a:gridCol>
+                <a:gridCol w="1267690">
+                  <a:extLst>
+                    <a:ext uri="{9D8B030D-6E8A-4147-A177-3AD203B41FA5}">
+                      <a16:colId xmlns:a16="http://schemas.microsoft.com/office/drawing/2014/main" val="20003"/>
+                    </a:ext>
+                  </a:extLst>
+                </a:gridCol>
               </a:tblGrid>
               <a:tr h="502920">
                 <a:tc>
@@ -9810,6 +10092,11 @@
                     </a:solidFill>
                   </a:tcPr>
                 </a:tc>
+                <a:extLst>
+                  <a:ext uri="{0D108BD9-81ED-4DB2-BD59-A6C34878D82A}">
+                    <a16:rowId xmlns:a16="http://schemas.microsoft.com/office/drawing/2014/main" val="10000"/>
+                  </a:ext>
+                </a:extLst>
               </a:tr>
               <a:tr h="502920">
                 <a:tc>
@@ -9904,6 +10191,11 @@
                     </a:solidFill>
                   </a:tcPr>
                 </a:tc>
+                <a:extLst>
+                  <a:ext uri="{0D108BD9-81ED-4DB2-BD59-A6C34878D82A}">
+                    <a16:rowId xmlns:a16="http://schemas.microsoft.com/office/drawing/2014/main" val="10001"/>
+                  </a:ext>
+                </a:extLst>
               </a:tr>
               <a:tr h="502920">
                 <a:tc>
@@ -9998,6 +10290,11 @@
                     </a:solidFill>
                   </a:tcPr>
                 </a:tc>
+                <a:extLst>
+                  <a:ext uri="{0D108BD9-81ED-4DB2-BD59-A6C34878D82A}">
+                    <a16:rowId xmlns:a16="http://schemas.microsoft.com/office/drawing/2014/main" val="10002"/>
+                  </a:ext>
+                </a:extLst>
               </a:tr>
               <a:tr h="502920">
                 <a:tc>
@@ -10092,6 +10389,11 @@
                     </a:solidFill>
                   </a:tcPr>
                 </a:tc>
+                <a:extLst>
+                  <a:ext uri="{0D108BD9-81ED-4DB2-BD59-A6C34878D82A}">
+                    <a16:rowId xmlns:a16="http://schemas.microsoft.com/office/drawing/2014/main" val="10003"/>
+                  </a:ext>
+                </a:extLst>
               </a:tr>
             </a:tbl>
           </a:graphicData>
@@ -10202,7 +10504,7 @@
 </file>
 
 <file path=ppt/slides/slide2.xml><?xml version="1.0" encoding="utf-8"?>
-<p:sld xmlns:a="http://schemas.openxmlformats.org/drawingml/2006/main" xmlns:p="http://schemas.openxmlformats.org/presentationml/2006/main" xmlns:r="http://schemas.openxmlformats.org/officeDocument/2006/relationships">
+<p:sld xmlns:a="http://schemas.openxmlformats.org/drawingml/2006/main" xmlns:r="http://schemas.openxmlformats.org/officeDocument/2006/relationships" xmlns:p="http://schemas.openxmlformats.org/presentationml/2006/main">
   <p:cSld>
     <p:spTree>
       <p:nvGrpSpPr>
@@ -10210,7 +10512,14 @@
         <p:cNvGrpSpPr/>
         <p:nvPr/>
       </p:nvGrpSpPr>
-      <p:grpSpPr/>
+      <p:grpSpPr>
+        <a:xfrm>
+          <a:off x="0" y="0"/>
+          <a:ext cx="0" cy="0"/>
+          <a:chOff x="0" y="0"/>
+          <a:chExt cx="0" cy="0"/>
+        </a:xfrm>
+      </p:grpSpPr>
       <p:sp>
         <p:nvSpPr>
           <p:cNvPr id="2" name="Rectangle 1"/>
@@ -10252,6 +10561,7 @@
           <a:lstStyle/>
           <a:p>
             <a:pPr algn="ctr"/>
+            <a:endParaRPr/>
           </a:p>
         </p:txBody>
       </p:sp>
@@ -10296,6 +10606,7 @@
           <a:lstStyle/>
           <a:p>
             <a:pPr algn="ctr"/>
+            <a:endParaRPr/>
           </a:p>
         </p:txBody>
       </p:sp>
@@ -10340,6 +10651,7 @@
           <a:lstStyle/>
           <a:p>
             <a:pPr algn="ctr"/>
+            <a:endParaRPr/>
           </a:p>
         </p:txBody>
       </p:sp>
@@ -10540,6 +10852,7 @@
           <a:lstStyle/>
           <a:p>
             <a:pPr algn="ctr"/>
+            <a:endParaRPr/>
           </a:p>
         </p:txBody>
       </p:sp>
@@ -10584,6 +10897,7 @@
           <a:lstStyle/>
           <a:p>
             <a:pPr algn="ctr"/>
+            <a:endParaRPr/>
           </a:p>
         </p:txBody>
       </p:sp>
@@ -10745,6 +11059,7 @@
           <a:lstStyle/>
           <a:p>
             <a:pPr algn="ctr"/>
+            <a:endParaRPr/>
           </a:p>
         </p:txBody>
       </p:sp>
@@ -10789,6 +11104,7 @@
           <a:lstStyle/>
           <a:p>
             <a:pPr algn="ctr"/>
+            <a:endParaRPr/>
           </a:p>
         </p:txBody>
       </p:sp>
@@ -10950,6 +11266,7 @@
           <a:lstStyle/>
           <a:p>
             <a:pPr algn="ctr"/>
+            <a:endParaRPr/>
           </a:p>
         </p:txBody>
       </p:sp>
@@ -10994,6 +11311,7 @@
           <a:lstStyle/>
           <a:p>
             <a:pPr algn="ctr"/>
+            <a:endParaRPr/>
           </a:p>
         </p:txBody>
       </p:sp>
@@ -11155,6 +11473,7 @@
           <a:lstStyle/>
           <a:p>
             <a:pPr algn="ctr"/>
+            <a:endParaRPr/>
           </a:p>
         </p:txBody>
       </p:sp>
@@ -11199,6 +11518,7 @@
           <a:lstStyle/>
           <a:p>
             <a:pPr algn="ctr"/>
+            <a:endParaRPr/>
           </a:p>
         </p:txBody>
       </p:sp>
@@ -11487,7 +11807,7 @@
 </file>
 
 <file path=ppt/slides/slide3.xml><?xml version="1.0" encoding="utf-8"?>
-<p:sld xmlns:a="http://schemas.openxmlformats.org/drawingml/2006/main" xmlns:p="http://schemas.openxmlformats.org/presentationml/2006/main" xmlns:r="http://schemas.openxmlformats.org/officeDocument/2006/relationships">
+<p:sld xmlns:a="http://schemas.openxmlformats.org/drawingml/2006/main" xmlns:r="http://schemas.openxmlformats.org/officeDocument/2006/relationships" xmlns:p="http://schemas.openxmlformats.org/presentationml/2006/main">
   <p:cSld>
     <p:spTree>
       <p:nvGrpSpPr>
@@ -11495,7 +11815,14 @@
         <p:cNvGrpSpPr/>
         <p:nvPr/>
       </p:nvGrpSpPr>
-      <p:grpSpPr/>
+      <p:grpSpPr>
+        <a:xfrm>
+          <a:off x="0" y="0"/>
+          <a:ext cx="0" cy="0"/>
+          <a:chOff x="0" y="0"/>
+          <a:chExt cx="0" cy="0"/>
+        </a:xfrm>
+      </p:grpSpPr>
       <p:sp>
         <p:nvSpPr>
           <p:cNvPr id="2" name="Rectangle 1"/>
@@ -11537,6 +11864,7 @@
           <a:lstStyle/>
           <a:p>
             <a:pPr algn="ctr"/>
+            <a:endParaRPr/>
           </a:p>
         </p:txBody>
       </p:sp>
@@ -11581,6 +11909,7 @@
           <a:lstStyle/>
           <a:p>
             <a:pPr algn="ctr"/>
+            <a:endParaRPr/>
           </a:p>
         </p:txBody>
       </p:sp>
@@ -11625,6 +11954,7 @@
           <a:lstStyle/>
           <a:p>
             <a:pPr algn="ctr"/>
+            <a:endParaRPr/>
           </a:p>
         </p:txBody>
       </p:sp>
@@ -11984,6 +12314,7 @@
           <a:lstStyle/>
           <a:p>
             <a:pPr algn="ctr"/>
+            <a:endParaRPr/>
           </a:p>
         </p:txBody>
       </p:sp>
@@ -12045,9 +12376,27 @@
                 <a:tableStyleId>{5C22544A-7EE6-4342-B048-85BDC9FD1C3A}</a:tableStyleId>
               </a:tblPr>
               <a:tblGrid>
-                <a:gridCol w="2490651"/>
-                <a:gridCol w="1132114"/>
-                <a:gridCol w="1132114"/>
+                <a:gridCol w="2490651">
+                  <a:extLst>
+                    <a:ext uri="{9D8B030D-6E8A-4147-A177-3AD203B41FA5}">
+                      <a16:colId xmlns:a16="http://schemas.microsoft.com/office/drawing/2014/main" val="20000"/>
+                    </a:ext>
+                  </a:extLst>
+                </a:gridCol>
+                <a:gridCol w="1132114">
+                  <a:extLst>
+                    <a:ext uri="{9D8B030D-6E8A-4147-A177-3AD203B41FA5}">
+                      <a16:colId xmlns:a16="http://schemas.microsoft.com/office/drawing/2014/main" val="20001"/>
+                    </a:ext>
+                  </a:extLst>
+                </a:gridCol>
+                <a:gridCol w="1132114">
+                  <a:extLst>
+                    <a:ext uri="{9D8B030D-6E8A-4147-A177-3AD203B41FA5}">
+                      <a16:colId xmlns:a16="http://schemas.microsoft.com/office/drawing/2014/main" val="20002"/>
+                    </a:ext>
+                  </a:extLst>
+                </a:gridCol>
               </a:tblGrid>
               <a:tr h="566928">
                 <a:tc>
@@ -12119,6 +12468,11 @@
                     </a:solidFill>
                   </a:tcPr>
                 </a:tc>
+                <a:extLst>
+                  <a:ext uri="{0D108BD9-81ED-4DB2-BD59-A6C34878D82A}">
+                    <a16:rowId xmlns:a16="http://schemas.microsoft.com/office/drawing/2014/main" val="10000"/>
+                  </a:ext>
+                </a:extLst>
               </a:tr>
               <a:tr h="566928">
                 <a:tc>
@@ -12190,6 +12544,11 @@
                     </a:solidFill>
                   </a:tcPr>
                 </a:tc>
+                <a:extLst>
+                  <a:ext uri="{0D108BD9-81ED-4DB2-BD59-A6C34878D82A}">
+                    <a16:rowId xmlns:a16="http://schemas.microsoft.com/office/drawing/2014/main" val="10001"/>
+                  </a:ext>
+                </a:extLst>
               </a:tr>
               <a:tr h="566928">
                 <a:tc>
@@ -12261,6 +12620,11 @@
                     </a:solidFill>
                   </a:tcPr>
                 </a:tc>
+                <a:extLst>
+                  <a:ext uri="{0D108BD9-81ED-4DB2-BD59-A6C34878D82A}">
+                    <a16:rowId xmlns:a16="http://schemas.microsoft.com/office/drawing/2014/main" val="10002"/>
+                  </a:ext>
+                </a:extLst>
               </a:tr>
               <a:tr h="566928">
                 <a:tc>
@@ -12332,6 +12696,11 @@
                     </a:solidFill>
                   </a:tcPr>
                 </a:tc>
+                <a:extLst>
+                  <a:ext uri="{0D108BD9-81ED-4DB2-BD59-A6C34878D82A}">
+                    <a16:rowId xmlns:a16="http://schemas.microsoft.com/office/drawing/2014/main" val="10003"/>
+                  </a:ext>
+                </a:extLst>
               </a:tr>
               <a:tr h="566928">
                 <a:tc>
@@ -12403,6 +12772,11 @@
                     </a:solidFill>
                   </a:tcPr>
                 </a:tc>
+                <a:extLst>
+                  <a:ext uri="{0D108BD9-81ED-4DB2-BD59-A6C34878D82A}">
+                    <a16:rowId xmlns:a16="http://schemas.microsoft.com/office/drawing/2014/main" val="10004"/>
+                  </a:ext>
+                </a:extLst>
               </a:tr>
             </a:tbl>
           </a:graphicData>
@@ -12456,7 +12830,7 @@
 </file>
 
 <file path=ppt/slides/slide4.xml><?xml version="1.0" encoding="utf-8"?>
-<p:sld xmlns:a="http://schemas.openxmlformats.org/drawingml/2006/main" xmlns:p="http://schemas.openxmlformats.org/presentationml/2006/main" xmlns:r="http://schemas.openxmlformats.org/officeDocument/2006/relationships">
+<p:sld xmlns:a="http://schemas.openxmlformats.org/drawingml/2006/main" xmlns:r="http://schemas.openxmlformats.org/officeDocument/2006/relationships" xmlns:p="http://schemas.openxmlformats.org/presentationml/2006/main">
   <p:cSld>
     <p:spTree>
       <p:nvGrpSpPr>
@@ -12464,7 +12838,14 @@
         <p:cNvGrpSpPr/>
         <p:nvPr/>
       </p:nvGrpSpPr>
-      <p:grpSpPr/>
+      <p:grpSpPr>
+        <a:xfrm>
+          <a:off x="0" y="0"/>
+          <a:ext cx="0" cy="0"/>
+          <a:chOff x="0" y="0"/>
+          <a:chExt cx="0" cy="0"/>
+        </a:xfrm>
+      </p:grpSpPr>
       <p:sp>
         <p:nvSpPr>
           <p:cNvPr id="2" name="Rectangle 1"/>
@@ -12506,6 +12887,7 @@
           <a:lstStyle/>
           <a:p>
             <a:pPr algn="ctr"/>
+            <a:endParaRPr/>
           </a:p>
         </p:txBody>
       </p:sp>
@@ -12550,6 +12932,7 @@
           <a:lstStyle/>
           <a:p>
             <a:pPr algn="ctr"/>
+            <a:endParaRPr/>
           </a:p>
         </p:txBody>
       </p:sp>
@@ -12594,6 +12977,7 @@
           <a:lstStyle/>
           <a:p>
             <a:pPr algn="ctr"/>
+            <a:endParaRPr/>
           </a:p>
         </p:txBody>
       </p:sp>
@@ -12850,8 +13234,20 @@
                 <a:tableStyleId>{5C22544A-7EE6-4342-B048-85BDC9FD1C3A}</a:tableStyleId>
               </a:tblPr>
               <a:tblGrid>
-                <a:gridCol w="1798320"/>
-                <a:gridCol w="3596640"/>
+                <a:gridCol w="1798320">
+                  <a:extLst>
+                    <a:ext uri="{9D8B030D-6E8A-4147-A177-3AD203B41FA5}">
+                      <a16:colId xmlns:a16="http://schemas.microsoft.com/office/drawing/2014/main" val="20000"/>
+                    </a:ext>
+                  </a:extLst>
+                </a:gridCol>
+                <a:gridCol w="3596640">
+                  <a:extLst>
+                    <a:ext uri="{9D8B030D-6E8A-4147-A177-3AD203B41FA5}">
+                      <a16:colId xmlns:a16="http://schemas.microsoft.com/office/drawing/2014/main" val="20001"/>
+                    </a:ext>
+                  </a:extLst>
+                </a:gridCol>
               </a:tblGrid>
               <a:tr h="475488">
                 <a:tc>
@@ -12900,6 +13296,11 @@
                     </a:solidFill>
                   </a:tcPr>
                 </a:tc>
+                <a:extLst>
+                  <a:ext uri="{0D108BD9-81ED-4DB2-BD59-A6C34878D82A}">
+                    <a16:rowId xmlns:a16="http://schemas.microsoft.com/office/drawing/2014/main" val="10000"/>
+                  </a:ext>
+                </a:extLst>
               </a:tr>
               <a:tr h="475488">
                 <a:tc>
@@ -12948,6 +13349,11 @@
                     </a:solidFill>
                   </a:tcPr>
                 </a:tc>
+                <a:extLst>
+                  <a:ext uri="{0D108BD9-81ED-4DB2-BD59-A6C34878D82A}">
+                    <a16:rowId xmlns:a16="http://schemas.microsoft.com/office/drawing/2014/main" val="10001"/>
+                  </a:ext>
+                </a:extLst>
               </a:tr>
               <a:tr h="475488">
                 <a:tc>
@@ -12996,6 +13402,11 @@
                     </a:solidFill>
                   </a:tcPr>
                 </a:tc>
+                <a:extLst>
+                  <a:ext uri="{0D108BD9-81ED-4DB2-BD59-A6C34878D82A}">
+                    <a16:rowId xmlns:a16="http://schemas.microsoft.com/office/drawing/2014/main" val="10002"/>
+                  </a:ext>
+                </a:extLst>
               </a:tr>
               <a:tr h="475488">
                 <a:tc>
@@ -13044,6 +13455,11 @@
                     </a:solidFill>
                   </a:tcPr>
                 </a:tc>
+                <a:extLst>
+                  <a:ext uri="{0D108BD9-81ED-4DB2-BD59-A6C34878D82A}">
+                    <a16:rowId xmlns:a16="http://schemas.microsoft.com/office/drawing/2014/main" val="10003"/>
+                  </a:ext>
+                </a:extLst>
               </a:tr>
               <a:tr h="475488">
                 <a:tc>
@@ -13092,6 +13508,11 @@
                     </a:solidFill>
                   </a:tcPr>
                 </a:tc>
+                <a:extLst>
+                  <a:ext uri="{0D108BD9-81ED-4DB2-BD59-A6C34878D82A}">
+                    <a16:rowId xmlns:a16="http://schemas.microsoft.com/office/drawing/2014/main" val="10004"/>
+                  </a:ext>
+                </a:extLst>
               </a:tr>
             </a:tbl>
           </a:graphicData>
@@ -13155,9 +13576,27 @@
                 <a:tableStyleId>{5C22544A-7EE6-4342-B048-85BDC9FD1C3A}</a:tableStyleId>
               </a:tblPr>
               <a:tblGrid>
-                <a:gridCol w="2133599"/>
-                <a:gridCol w="1981200"/>
-                <a:gridCol w="1371600"/>
+                <a:gridCol w="2133599">
+                  <a:extLst>
+                    <a:ext uri="{9D8B030D-6E8A-4147-A177-3AD203B41FA5}">
+                      <a16:colId xmlns:a16="http://schemas.microsoft.com/office/drawing/2014/main" val="20000"/>
+                    </a:ext>
+                  </a:extLst>
+                </a:gridCol>
+                <a:gridCol w="1981200">
+                  <a:extLst>
+                    <a:ext uri="{9D8B030D-6E8A-4147-A177-3AD203B41FA5}">
+                      <a16:colId xmlns:a16="http://schemas.microsoft.com/office/drawing/2014/main" val="20001"/>
+                    </a:ext>
+                  </a:extLst>
+                </a:gridCol>
+                <a:gridCol w="1371600">
+                  <a:extLst>
+                    <a:ext uri="{9D8B030D-6E8A-4147-A177-3AD203B41FA5}">
+                      <a16:colId xmlns:a16="http://schemas.microsoft.com/office/drawing/2014/main" val="20002"/>
+                    </a:ext>
+                  </a:extLst>
+                </a:gridCol>
               </a:tblGrid>
               <a:tr h="475488">
                 <a:tc>
@@ -13229,6 +13668,11 @@
                     </a:solidFill>
                   </a:tcPr>
                 </a:tc>
+                <a:extLst>
+                  <a:ext uri="{0D108BD9-81ED-4DB2-BD59-A6C34878D82A}">
+                    <a16:rowId xmlns:a16="http://schemas.microsoft.com/office/drawing/2014/main" val="10000"/>
+                  </a:ext>
+                </a:extLst>
               </a:tr>
               <a:tr h="475488">
                 <a:tc>
@@ -13300,6 +13744,11 @@
                     </a:solidFill>
                   </a:tcPr>
                 </a:tc>
+                <a:extLst>
+                  <a:ext uri="{0D108BD9-81ED-4DB2-BD59-A6C34878D82A}">
+                    <a16:rowId xmlns:a16="http://schemas.microsoft.com/office/drawing/2014/main" val="10001"/>
+                  </a:ext>
+                </a:extLst>
               </a:tr>
               <a:tr h="475488">
                 <a:tc>
@@ -13371,6 +13820,11 @@
                     </a:solidFill>
                   </a:tcPr>
                 </a:tc>
+                <a:extLst>
+                  <a:ext uri="{0D108BD9-81ED-4DB2-BD59-A6C34878D82A}">
+                    <a16:rowId xmlns:a16="http://schemas.microsoft.com/office/drawing/2014/main" val="10002"/>
+                  </a:ext>
+                </a:extLst>
               </a:tr>
               <a:tr h="475488">
                 <a:tc>
@@ -13442,6 +13896,11 @@
                     </a:solidFill>
                   </a:tcPr>
                 </a:tc>
+                <a:extLst>
+                  <a:ext uri="{0D108BD9-81ED-4DB2-BD59-A6C34878D82A}">
+                    <a16:rowId xmlns:a16="http://schemas.microsoft.com/office/drawing/2014/main" val="10003"/>
+                  </a:ext>
+                </a:extLst>
               </a:tr>
               <a:tr h="475488">
                 <a:tc>
@@ -13513,6 +13972,11 @@
                     </a:solidFill>
                   </a:tcPr>
                 </a:tc>
+                <a:extLst>
+                  <a:ext uri="{0D108BD9-81ED-4DB2-BD59-A6C34878D82A}">
+                    <a16:rowId xmlns:a16="http://schemas.microsoft.com/office/drawing/2014/main" val="10004"/>
+                  </a:ext>
+                </a:extLst>
               </a:tr>
             </a:tbl>
           </a:graphicData>
@@ -13559,6 +14023,7 @@
           <a:lstStyle/>
           <a:p>
             <a:pPr algn="ctr"/>
+            <a:endParaRPr/>
           </a:p>
         </p:txBody>
       </p:sp>
@@ -13662,7 +14127,7 @@
 </file>
 
 <file path=ppt/slides/slide5.xml><?xml version="1.0" encoding="utf-8"?>
-<p:sld xmlns:a="http://schemas.openxmlformats.org/drawingml/2006/main" xmlns:p="http://schemas.openxmlformats.org/presentationml/2006/main" xmlns:r="http://schemas.openxmlformats.org/officeDocument/2006/relationships">
+<p:sld xmlns:a="http://schemas.openxmlformats.org/drawingml/2006/main" xmlns:r="http://schemas.openxmlformats.org/officeDocument/2006/relationships" xmlns:p="http://schemas.openxmlformats.org/presentationml/2006/main">
   <p:cSld>
     <p:spTree>
       <p:nvGrpSpPr>
@@ -13670,7 +14135,14 @@
         <p:cNvGrpSpPr/>
         <p:nvPr/>
       </p:nvGrpSpPr>
-      <p:grpSpPr/>
+      <p:grpSpPr>
+        <a:xfrm>
+          <a:off x="0" y="0"/>
+          <a:ext cx="0" cy="0"/>
+          <a:chOff x="0" y="0"/>
+          <a:chExt cx="0" cy="0"/>
+        </a:xfrm>
+      </p:grpSpPr>
       <p:sp>
         <p:nvSpPr>
           <p:cNvPr id="2" name="Rectangle 1"/>
@@ -13712,6 +14184,7 @@
           <a:lstStyle/>
           <a:p>
             <a:pPr algn="ctr"/>
+            <a:endParaRPr/>
           </a:p>
         </p:txBody>
       </p:sp>
@@ -13756,6 +14229,7 @@
           <a:lstStyle/>
           <a:p>
             <a:pPr algn="ctr"/>
+            <a:endParaRPr/>
           </a:p>
         </p:txBody>
       </p:sp>
@@ -13800,6 +14274,7 @@
           <a:lstStyle/>
           <a:p>
             <a:pPr algn="ctr"/>
+            <a:endParaRPr/>
           </a:p>
         </p:txBody>
       </p:sp>
@@ -14000,6 +14475,7 @@
           <a:lstStyle/>
           <a:p>
             <a:pPr algn="ctr"/>
+            <a:endParaRPr/>
           </a:p>
         </p:txBody>
       </p:sp>
@@ -14122,6 +14598,7 @@
           <a:lstStyle/>
           <a:p>
             <a:pPr algn="ctr"/>
+            <a:endParaRPr/>
           </a:p>
         </p:txBody>
       </p:sp>
@@ -14244,6 +14721,7 @@
           <a:lstStyle/>
           <a:p>
             <a:pPr algn="ctr"/>
+            <a:endParaRPr/>
           </a:p>
         </p:txBody>
       </p:sp>
@@ -14464,7 +14942,7 @@
 </file>
 
 <file path=ppt/slides/slide6.xml><?xml version="1.0" encoding="utf-8"?>
-<p:sld xmlns:a="http://schemas.openxmlformats.org/drawingml/2006/main" xmlns:p="http://schemas.openxmlformats.org/presentationml/2006/main" xmlns:r="http://schemas.openxmlformats.org/officeDocument/2006/relationships">
+<p:sld xmlns:a="http://schemas.openxmlformats.org/drawingml/2006/main" xmlns:r="http://schemas.openxmlformats.org/officeDocument/2006/relationships" xmlns:p="http://schemas.openxmlformats.org/presentationml/2006/main">
   <p:cSld>
     <p:spTree>
       <p:nvGrpSpPr>
@@ -14472,7 +14950,14 @@
         <p:cNvGrpSpPr/>
         <p:nvPr/>
       </p:nvGrpSpPr>
-      <p:grpSpPr/>
+      <p:grpSpPr>
+        <a:xfrm>
+          <a:off x="0" y="0"/>
+          <a:ext cx="0" cy="0"/>
+          <a:chOff x="0" y="0"/>
+          <a:chExt cx="0" cy="0"/>
+        </a:xfrm>
+      </p:grpSpPr>
       <p:sp>
         <p:nvSpPr>
           <p:cNvPr id="2" name="Rectangle 1"/>
@@ -14514,6 +14999,7 @@
           <a:lstStyle/>
           <a:p>
             <a:pPr algn="ctr"/>
+            <a:endParaRPr/>
           </a:p>
         </p:txBody>
       </p:sp>
@@ -14558,6 +15044,7 @@
           <a:lstStyle/>
           <a:p>
             <a:pPr algn="ctr"/>
+            <a:endParaRPr/>
           </a:p>
         </p:txBody>
       </p:sp>
@@ -14602,6 +15089,7 @@
           <a:lstStyle/>
           <a:p>
             <a:pPr algn="ctr"/>
+            <a:endParaRPr/>
           </a:p>
         </p:txBody>
       </p:sp>
@@ -14819,8 +15307,20 @@
                 <a:tableStyleId>{5C22544A-7EE6-4342-B048-85BDC9FD1C3A}</a:tableStyleId>
               </a:tblPr>
               <a:tblGrid>
-                <a:gridCol w="3614569"/>
-                <a:gridCol w="1506070"/>
+                <a:gridCol w="3614569">
+                  <a:extLst>
+                    <a:ext uri="{9D8B030D-6E8A-4147-A177-3AD203B41FA5}">
+                      <a16:colId xmlns:a16="http://schemas.microsoft.com/office/drawing/2014/main" val="20000"/>
+                    </a:ext>
+                  </a:extLst>
+                </a:gridCol>
+                <a:gridCol w="1506070">
+                  <a:extLst>
+                    <a:ext uri="{9D8B030D-6E8A-4147-A177-3AD203B41FA5}">
+                      <a16:colId xmlns:a16="http://schemas.microsoft.com/office/drawing/2014/main" val="20001"/>
+                    </a:ext>
+                  </a:extLst>
+                </a:gridCol>
               </a:tblGrid>
               <a:tr h="365760">
                 <a:tc>
@@ -14869,6 +15369,11 @@
                     </a:solidFill>
                   </a:tcPr>
                 </a:tc>
+                <a:extLst>
+                  <a:ext uri="{0D108BD9-81ED-4DB2-BD59-A6C34878D82A}">
+                    <a16:rowId xmlns:a16="http://schemas.microsoft.com/office/drawing/2014/main" val="10000"/>
+                  </a:ext>
+                </a:extLst>
               </a:tr>
               <a:tr h="365760">
                 <a:tc>
@@ -14917,6 +15422,11 @@
                     </a:solidFill>
                   </a:tcPr>
                 </a:tc>
+                <a:extLst>
+                  <a:ext uri="{0D108BD9-81ED-4DB2-BD59-A6C34878D82A}">
+                    <a16:rowId xmlns:a16="http://schemas.microsoft.com/office/drawing/2014/main" val="10001"/>
+                  </a:ext>
+                </a:extLst>
               </a:tr>
               <a:tr h="365760">
                 <a:tc>
@@ -14965,6 +15475,11 @@
                     </a:solidFill>
                   </a:tcPr>
                 </a:tc>
+                <a:extLst>
+                  <a:ext uri="{0D108BD9-81ED-4DB2-BD59-A6C34878D82A}">
+                    <a16:rowId xmlns:a16="http://schemas.microsoft.com/office/drawing/2014/main" val="10002"/>
+                  </a:ext>
+                </a:extLst>
               </a:tr>
               <a:tr h="365760">
                 <a:tc>
@@ -15013,6 +15528,11 @@
                     </a:solidFill>
                   </a:tcPr>
                 </a:tc>
+                <a:extLst>
+                  <a:ext uri="{0D108BD9-81ED-4DB2-BD59-A6C34878D82A}">
+                    <a16:rowId xmlns:a16="http://schemas.microsoft.com/office/drawing/2014/main" val="10003"/>
+                  </a:ext>
+                </a:extLst>
               </a:tr>
               <a:tr h="365760">
                 <a:tc>
@@ -15061,6 +15581,11 @@
                     </a:solidFill>
                   </a:tcPr>
                 </a:tc>
+                <a:extLst>
+                  <a:ext uri="{0D108BD9-81ED-4DB2-BD59-A6C34878D82A}">
+                    <a16:rowId xmlns:a16="http://schemas.microsoft.com/office/drawing/2014/main" val="10004"/>
+                  </a:ext>
+                </a:extLst>
               </a:tr>
               <a:tr h="365760">
                 <a:tc>
@@ -15109,6 +15634,11 @@
                     </a:solidFill>
                   </a:tcPr>
                 </a:tc>
+                <a:extLst>
+                  <a:ext uri="{0D108BD9-81ED-4DB2-BD59-A6C34878D82A}">
+                    <a16:rowId xmlns:a16="http://schemas.microsoft.com/office/drawing/2014/main" val="10005"/>
+                  </a:ext>
+                </a:extLst>
               </a:tr>
               <a:tr h="365760">
                 <a:tc>
@@ -15157,6 +15687,11 @@
                     </a:solidFill>
                   </a:tcPr>
                 </a:tc>
+                <a:extLst>
+                  <a:ext uri="{0D108BD9-81ED-4DB2-BD59-A6C34878D82A}">
+                    <a16:rowId xmlns:a16="http://schemas.microsoft.com/office/drawing/2014/main" val="10006"/>
+                  </a:ext>
+                </a:extLst>
               </a:tr>
               <a:tr h="365760">
                 <a:tc>
@@ -15205,6 +15740,11 @@
                     </a:solidFill>
                   </a:tcPr>
                 </a:tc>
+                <a:extLst>
+                  <a:ext uri="{0D108BD9-81ED-4DB2-BD59-A6C34878D82A}">
+                    <a16:rowId xmlns:a16="http://schemas.microsoft.com/office/drawing/2014/main" val="10007"/>
+                  </a:ext>
+                </a:extLst>
               </a:tr>
               <a:tr h="365760">
                 <a:tc>
@@ -15253,6 +15793,11 @@
                     </a:solidFill>
                   </a:tcPr>
                 </a:tc>
+                <a:extLst>
+                  <a:ext uri="{0D108BD9-81ED-4DB2-BD59-A6C34878D82A}">
+                    <a16:rowId xmlns:a16="http://schemas.microsoft.com/office/drawing/2014/main" val="10008"/>
+                  </a:ext>
+                </a:extLst>
               </a:tr>
             </a:tbl>
           </a:graphicData>
@@ -15499,7 +16044,7 @@
 </file>
 
 <file path=ppt/slides/slide7.xml><?xml version="1.0" encoding="utf-8"?>
-<p:sld xmlns:a="http://schemas.openxmlformats.org/drawingml/2006/main" xmlns:p="http://schemas.openxmlformats.org/presentationml/2006/main" xmlns:r="http://schemas.openxmlformats.org/officeDocument/2006/relationships">
+<p:sld xmlns:a="http://schemas.openxmlformats.org/drawingml/2006/main" xmlns:r="http://schemas.openxmlformats.org/officeDocument/2006/relationships" xmlns:p="http://schemas.openxmlformats.org/presentationml/2006/main">
   <p:cSld>
     <p:spTree>
       <p:nvGrpSpPr>
@@ -15507,7 +16052,14 @@
         <p:cNvGrpSpPr/>
         <p:nvPr/>
       </p:nvGrpSpPr>
-      <p:grpSpPr/>
+      <p:grpSpPr>
+        <a:xfrm>
+          <a:off x="0" y="0"/>
+          <a:ext cx="0" cy="0"/>
+          <a:chOff x="0" y="0"/>
+          <a:chExt cx="0" cy="0"/>
+        </a:xfrm>
+      </p:grpSpPr>
       <p:sp>
         <p:nvSpPr>
           <p:cNvPr id="2" name="Rectangle 1"/>
@@ -15549,6 +16101,7 @@
           <a:lstStyle/>
           <a:p>
             <a:pPr algn="ctr"/>
+            <a:endParaRPr/>
           </a:p>
         </p:txBody>
       </p:sp>
@@ -15593,6 +16146,7 @@
           <a:lstStyle/>
           <a:p>
             <a:pPr algn="ctr"/>
+            <a:endParaRPr/>
           </a:p>
         </p:txBody>
       </p:sp>
@@ -15637,6 +16191,7 @@
           <a:lstStyle/>
           <a:p>
             <a:pPr algn="ctr"/>
+            <a:endParaRPr/>
           </a:p>
         </p:txBody>
       </p:sp>
@@ -15837,6 +16392,7 @@
           <a:lstStyle/>
           <a:p>
             <a:pPr algn="ctr"/>
+            <a:endParaRPr/>
           </a:p>
         </p:txBody>
       </p:sp>
@@ -15881,6 +16437,7 @@
           <a:lstStyle/>
           <a:p>
             <a:pPr algn="ctr"/>
+            <a:endParaRPr/>
           </a:p>
         </p:txBody>
       </p:sp>
@@ -16042,6 +16599,7 @@
           <a:lstStyle/>
           <a:p>
             <a:pPr algn="ctr"/>
+            <a:endParaRPr/>
           </a:p>
         </p:txBody>
       </p:sp>
@@ -16086,6 +16644,7 @@
           <a:lstStyle/>
           <a:p>
             <a:pPr algn="ctr"/>
+            <a:endParaRPr/>
           </a:p>
         </p:txBody>
       </p:sp>
@@ -16247,6 +16806,7 @@
           <a:lstStyle/>
           <a:p>
             <a:pPr algn="ctr"/>
+            <a:endParaRPr/>
           </a:p>
         </p:txBody>
       </p:sp>
@@ -16291,6 +16851,7 @@
           <a:lstStyle/>
           <a:p>
             <a:pPr algn="ctr"/>
+            <a:endParaRPr/>
           </a:p>
         </p:txBody>
       </p:sp>
@@ -16452,6 +17013,7 @@
           <a:lstStyle/>
           <a:p>
             <a:pPr algn="ctr"/>
+            <a:endParaRPr/>
           </a:p>
         </p:txBody>
       </p:sp>
@@ -16496,6 +17058,7 @@
           <a:lstStyle/>
           <a:p>
             <a:pPr algn="ctr"/>
+            <a:endParaRPr/>
           </a:p>
         </p:txBody>
       </p:sp>
@@ -16818,7 +17381,7 @@
 </file>
 
 <file path=ppt/slides/slide8.xml><?xml version="1.0" encoding="utf-8"?>
-<p:sld xmlns:a="http://schemas.openxmlformats.org/drawingml/2006/main" xmlns:p="http://schemas.openxmlformats.org/presentationml/2006/main" xmlns:r="http://schemas.openxmlformats.org/officeDocument/2006/relationships">
+<p:sld xmlns:a="http://schemas.openxmlformats.org/drawingml/2006/main" xmlns:r="http://schemas.openxmlformats.org/officeDocument/2006/relationships" xmlns:p="http://schemas.openxmlformats.org/presentationml/2006/main">
   <p:cSld>
     <p:spTree>
       <p:nvGrpSpPr>
@@ -16826,7 +17389,14 @@
         <p:cNvGrpSpPr/>
         <p:nvPr/>
       </p:nvGrpSpPr>
-      <p:grpSpPr/>
+      <p:grpSpPr>
+        <a:xfrm>
+          <a:off x="0" y="0"/>
+          <a:ext cx="0" cy="0"/>
+          <a:chOff x="0" y="0"/>
+          <a:chExt cx="0" cy="0"/>
+        </a:xfrm>
+      </p:grpSpPr>
       <p:sp>
         <p:nvSpPr>
           <p:cNvPr id="2" name="Rectangle 1"/>
@@ -16868,6 +17438,7 @@
           <a:lstStyle/>
           <a:p>
             <a:pPr algn="ctr"/>
+            <a:endParaRPr/>
           </a:p>
         </p:txBody>
       </p:sp>
@@ -16912,6 +17483,7 @@
           <a:lstStyle/>
           <a:p>
             <a:pPr algn="ctr"/>
+            <a:endParaRPr/>
           </a:p>
         </p:txBody>
       </p:sp>
@@ -16956,6 +17528,7 @@
           <a:lstStyle/>
           <a:p>
             <a:pPr algn="ctr"/>
+            <a:endParaRPr/>
           </a:p>
         </p:txBody>
       </p:sp>
@@ -17197,10 +17770,34 @@
                 <a:tableStyleId>{5C22544A-7EE6-4342-B048-85BDC9FD1C3A}</a:tableStyleId>
               </a:tblPr>
               <a:tblGrid>
-                <a:gridCol w="1432560"/>
-                <a:gridCol w="955040"/>
-                <a:gridCol w="859536"/>
-                <a:gridCol w="1050544"/>
+                <a:gridCol w="1432560">
+                  <a:extLst>
+                    <a:ext uri="{9D8B030D-6E8A-4147-A177-3AD203B41FA5}">
+                      <a16:colId xmlns:a16="http://schemas.microsoft.com/office/drawing/2014/main" val="20000"/>
+                    </a:ext>
+                  </a:extLst>
+                </a:gridCol>
+                <a:gridCol w="955040">
+                  <a:extLst>
+                    <a:ext uri="{9D8B030D-6E8A-4147-A177-3AD203B41FA5}">
+                      <a16:colId xmlns:a16="http://schemas.microsoft.com/office/drawing/2014/main" val="20001"/>
+                    </a:ext>
+                  </a:extLst>
+                </a:gridCol>
+                <a:gridCol w="859536">
+                  <a:extLst>
+                    <a:ext uri="{9D8B030D-6E8A-4147-A177-3AD203B41FA5}">
+                      <a16:colId xmlns:a16="http://schemas.microsoft.com/office/drawing/2014/main" val="20002"/>
+                    </a:ext>
+                  </a:extLst>
+                </a:gridCol>
+                <a:gridCol w="1050544">
+                  <a:extLst>
+                    <a:ext uri="{9D8B030D-6E8A-4147-A177-3AD203B41FA5}">
+                      <a16:colId xmlns:a16="http://schemas.microsoft.com/office/drawing/2014/main" val="20003"/>
+                    </a:ext>
+                  </a:extLst>
+                </a:gridCol>
               </a:tblGrid>
               <a:tr h="475488">
                 <a:tc>
@@ -17209,15 +17806,7 @@
                     <a:lstStyle/>
                     <a:p>
                       <a:pPr algn="l"/>
-                      <a:r>
-                        <a:rPr sz="1050" b="1">
-                          <a:solidFill>
-                            <a:srgbClr val="FFFFFF"/>
-                          </a:solidFill>
-                          <a:latin typeface="Calibri"/>
-                        </a:rPr>
-                        <a:t/>
-                      </a:r>
+                      <a:endParaRPr/>
                     </a:p>
                   </a:txBody>
                   <a:tcPr marT="25400" marB="25400">
@@ -17295,6 +17884,11 @@
                     </a:solidFill>
                   </a:tcPr>
                 </a:tc>
+                <a:extLst>
+                  <a:ext uri="{0D108BD9-81ED-4DB2-BD59-A6C34878D82A}">
+                    <a16:rowId xmlns:a16="http://schemas.microsoft.com/office/drawing/2014/main" val="10000"/>
+                  </a:ext>
+                </a:extLst>
               </a:tr>
               <a:tr h="475488">
                 <a:tc>
@@ -17389,6 +17983,11 @@
                     </a:solidFill>
                   </a:tcPr>
                 </a:tc>
+                <a:extLst>
+                  <a:ext uri="{0D108BD9-81ED-4DB2-BD59-A6C34878D82A}">
+                    <a16:rowId xmlns:a16="http://schemas.microsoft.com/office/drawing/2014/main" val="10001"/>
+                  </a:ext>
+                </a:extLst>
               </a:tr>
               <a:tr h="475488">
                 <a:tc>
@@ -17483,6 +18082,11 @@
                     </a:solidFill>
                   </a:tcPr>
                 </a:tc>
+                <a:extLst>
+                  <a:ext uri="{0D108BD9-81ED-4DB2-BD59-A6C34878D82A}">
+                    <a16:rowId xmlns:a16="http://schemas.microsoft.com/office/drawing/2014/main" val="10002"/>
+                  </a:ext>
+                </a:extLst>
               </a:tr>
               <a:tr h="475488">
                 <a:tc>
@@ -17577,6 +18181,11 @@
                     </a:solidFill>
                   </a:tcPr>
                 </a:tc>
+                <a:extLst>
+                  <a:ext uri="{0D108BD9-81ED-4DB2-BD59-A6C34878D82A}">
+                    <a16:rowId xmlns:a16="http://schemas.microsoft.com/office/drawing/2014/main" val="10003"/>
+                  </a:ext>
+                </a:extLst>
               </a:tr>
               <a:tr h="475488">
                 <a:tc>
@@ -17671,6 +18280,11 @@
                     </a:solidFill>
                   </a:tcPr>
                 </a:tc>
+                <a:extLst>
+                  <a:ext uri="{0D108BD9-81ED-4DB2-BD59-A6C34878D82A}">
+                    <a16:rowId xmlns:a16="http://schemas.microsoft.com/office/drawing/2014/main" val="10004"/>
+                  </a:ext>
+                </a:extLst>
               </a:tr>
             </a:tbl>
           </a:graphicData>
@@ -17811,7 +18425,7 @@
 </file>
 
 <file path=ppt/slides/slide9.xml><?xml version="1.0" encoding="utf-8"?>
-<p:sld xmlns:a="http://schemas.openxmlformats.org/drawingml/2006/main" xmlns:p="http://schemas.openxmlformats.org/presentationml/2006/main" xmlns:r="http://schemas.openxmlformats.org/officeDocument/2006/relationships">
+<p:sld xmlns:a="http://schemas.openxmlformats.org/drawingml/2006/main" xmlns:r="http://schemas.openxmlformats.org/officeDocument/2006/relationships" xmlns:p="http://schemas.openxmlformats.org/presentationml/2006/main">
   <p:cSld>
     <p:spTree>
       <p:nvGrpSpPr>
@@ -17819,7 +18433,14 @@
         <p:cNvGrpSpPr/>
         <p:nvPr/>
       </p:nvGrpSpPr>
-      <p:grpSpPr/>
+      <p:grpSpPr>
+        <a:xfrm>
+          <a:off x="0" y="0"/>
+          <a:ext cx="0" cy="0"/>
+          <a:chOff x="0" y="0"/>
+          <a:chExt cx="0" cy="0"/>
+        </a:xfrm>
+      </p:grpSpPr>
       <p:sp>
         <p:nvSpPr>
           <p:cNvPr id="2" name="Rectangle 1"/>
@@ -17861,6 +18482,7 @@
           <a:lstStyle/>
           <a:p>
             <a:pPr algn="ctr"/>
+            <a:endParaRPr/>
           </a:p>
         </p:txBody>
       </p:sp>
@@ -17905,6 +18527,7 @@
           <a:lstStyle/>
           <a:p>
             <a:pPr algn="ctr"/>
+            <a:endParaRPr/>
           </a:p>
         </p:txBody>
       </p:sp>
@@ -17949,6 +18572,7 @@
           <a:lstStyle/>
           <a:p>
             <a:pPr algn="ctr"/>
+            <a:endParaRPr/>
           </a:p>
         </p:txBody>
       </p:sp>
@@ -18127,8 +18751,20 @@
                 <a:tableStyleId>{5C22544A-7EE6-4342-B048-85BDC9FD1C3A}</a:tableStyleId>
               </a:tblPr>
               <a:tblGrid>
-                <a:gridCol w="3346703"/>
-                <a:gridCol w="7808975"/>
+                <a:gridCol w="3346703">
+                  <a:extLst>
+                    <a:ext uri="{9D8B030D-6E8A-4147-A177-3AD203B41FA5}">
+                      <a16:colId xmlns:a16="http://schemas.microsoft.com/office/drawing/2014/main" val="20000"/>
+                    </a:ext>
+                  </a:extLst>
+                </a:gridCol>
+                <a:gridCol w="7808975">
+                  <a:extLst>
+                    <a:ext uri="{9D8B030D-6E8A-4147-A177-3AD203B41FA5}">
+                      <a16:colId xmlns:a16="http://schemas.microsoft.com/office/drawing/2014/main" val="20001"/>
+                    </a:ext>
+                  </a:extLst>
+                </a:gridCol>
               </a:tblGrid>
               <a:tr h="530351">
                 <a:tc>
@@ -18177,6 +18813,11 @@
                     </a:solidFill>
                   </a:tcPr>
                 </a:tc>
+                <a:extLst>
+                  <a:ext uri="{0D108BD9-81ED-4DB2-BD59-A6C34878D82A}">
+                    <a16:rowId xmlns:a16="http://schemas.microsoft.com/office/drawing/2014/main" val="10000"/>
+                  </a:ext>
+                </a:extLst>
               </a:tr>
               <a:tr h="530351">
                 <a:tc>
@@ -18225,6 +18866,11 @@
                     </a:solidFill>
                   </a:tcPr>
                 </a:tc>
+                <a:extLst>
+                  <a:ext uri="{0D108BD9-81ED-4DB2-BD59-A6C34878D82A}">
+                    <a16:rowId xmlns:a16="http://schemas.microsoft.com/office/drawing/2014/main" val="10001"/>
+                  </a:ext>
+                </a:extLst>
               </a:tr>
               <a:tr h="530351">
                 <a:tc>
@@ -18273,6 +18919,11 @@
                     </a:solidFill>
                   </a:tcPr>
                 </a:tc>
+                <a:extLst>
+                  <a:ext uri="{0D108BD9-81ED-4DB2-BD59-A6C34878D82A}">
+                    <a16:rowId xmlns:a16="http://schemas.microsoft.com/office/drawing/2014/main" val="10002"/>
+                  </a:ext>
+                </a:extLst>
               </a:tr>
               <a:tr h="530351">
                 <a:tc>
@@ -18321,6 +18972,11 @@
                     </a:solidFill>
                   </a:tcPr>
                 </a:tc>
+                <a:extLst>
+                  <a:ext uri="{0D108BD9-81ED-4DB2-BD59-A6C34878D82A}">
+                    <a16:rowId xmlns:a16="http://schemas.microsoft.com/office/drawing/2014/main" val="10003"/>
+                  </a:ext>
+                </a:extLst>
               </a:tr>
               <a:tr h="530351">
                 <a:tc>
@@ -18369,6 +19025,11 @@
                     </a:solidFill>
                   </a:tcPr>
                 </a:tc>
+                <a:extLst>
+                  <a:ext uri="{0D108BD9-81ED-4DB2-BD59-A6C34878D82A}">
+                    <a16:rowId xmlns:a16="http://schemas.microsoft.com/office/drawing/2014/main" val="10004"/>
+                  </a:ext>
+                </a:extLst>
               </a:tr>
               <a:tr h="530351">
                 <a:tc>
@@ -18417,6 +19078,11 @@
                     </a:solidFill>
                   </a:tcPr>
                 </a:tc>
+                <a:extLst>
+                  <a:ext uri="{0D108BD9-81ED-4DB2-BD59-A6C34878D82A}">
+                    <a16:rowId xmlns:a16="http://schemas.microsoft.com/office/drawing/2014/main" val="10005"/>
+                  </a:ext>
+                </a:extLst>
               </a:tr>
               <a:tr h="530357">
                 <a:tc>
@@ -18465,6 +19131,11 @@
                     </a:solidFill>
                   </a:tcPr>
                 </a:tc>
+                <a:extLst>
+                  <a:ext uri="{0D108BD9-81ED-4DB2-BD59-A6C34878D82A}">
+                    <a16:rowId xmlns:a16="http://schemas.microsoft.com/office/drawing/2014/main" val="10006"/>
+                  </a:ext>
+                </a:extLst>
               </a:tr>
             </a:tbl>
           </a:graphicData>
